--- a/documentacion_tesis/VotoAFin_Presentacion_Tesis.pptx
+++ b/documentacion_tesis/VotoAFin_Presentacion_Tesis.pptx
@@ -4,38 +4,41 @@
   <p:sldMasterIdLst>
     <p:sldMasterId id="2147483648" r:id="rId1"/>
   </p:sldMasterIdLst>
+  <p:notesMasterIdLst>
+    <p:notesMasterId r:id="rId31"/>
+  </p:notesMasterIdLst>
   <p:sldIdLst>
-    <p:sldId id="256" r:id="rId7"/>
-    <p:sldId id="257" r:id="rId9"/>
-    <p:sldId id="258" r:id="rId10"/>
-    <p:sldId id="259" r:id="rId11"/>
-    <p:sldId id="260" r:id="rId12"/>
-    <p:sldId id="261" r:id="rId13"/>
-    <p:sldId id="262" r:id="rId14"/>
-    <p:sldId id="263" r:id="rId15"/>
-    <p:sldId id="264" r:id="rId16"/>
-    <p:sldId id="265" r:id="rId17"/>
-    <p:sldId id="266" r:id="rId18"/>
-    <p:sldId id="267" r:id="rId19"/>
-    <p:sldId id="268" r:id="rId20"/>
-    <p:sldId id="269" r:id="rId21"/>
-    <p:sldId id="270" r:id="rId22"/>
-    <p:sldId id="271" r:id="rId23"/>
-    <p:sldId id="272" r:id="rId24"/>
-    <p:sldId id="273" r:id="rId25"/>
-    <p:sldId id="274" r:id="rId26"/>
-    <p:sldId id="275" r:id="rId27"/>
-    <p:sldId id="276" r:id="rId28"/>
-    <p:sldId id="277" r:id="rId29"/>
-    <p:sldId id="278" r:id="rId30"/>
-    <p:sldId id="279" r:id="rId31"/>
-    <p:sldId id="280" r:id="rId32"/>
-    <p:sldId id="281" r:id="rId33"/>
-    <p:sldId id="282" r:id="rId34"/>
-    <p:sldId id="283" r:id="rId35"/>
-    <p:sldId id="284" r:id="rId36"/>
+    <p:sldId id="256" r:id="rId2"/>
+    <p:sldId id="257" r:id="rId3"/>
+    <p:sldId id="258" r:id="rId4"/>
+    <p:sldId id="259" r:id="rId5"/>
+    <p:sldId id="260" r:id="rId6"/>
+    <p:sldId id="261" r:id="rId7"/>
+    <p:sldId id="262" r:id="rId8"/>
+    <p:sldId id="263" r:id="rId9"/>
+    <p:sldId id="264" r:id="rId10"/>
+    <p:sldId id="265" r:id="rId11"/>
+    <p:sldId id="266" r:id="rId12"/>
+    <p:sldId id="267" r:id="rId13"/>
+    <p:sldId id="268" r:id="rId14"/>
+    <p:sldId id="269" r:id="rId15"/>
+    <p:sldId id="270" r:id="rId16"/>
+    <p:sldId id="271" r:id="rId17"/>
+    <p:sldId id="272" r:id="rId18"/>
+    <p:sldId id="273" r:id="rId19"/>
+    <p:sldId id="274" r:id="rId20"/>
+    <p:sldId id="275" r:id="rId21"/>
+    <p:sldId id="276" r:id="rId22"/>
+    <p:sldId id="277" r:id="rId23"/>
+    <p:sldId id="278" r:id="rId24"/>
+    <p:sldId id="279" r:id="rId25"/>
+    <p:sldId id="280" r:id="rId26"/>
+    <p:sldId id="281" r:id="rId27"/>
+    <p:sldId id="282" r:id="rId28"/>
+    <p:sldId id="283" r:id="rId29"/>
+    <p:sldId id="284" r:id="rId30"/>
   </p:sldIdLst>
-  <p:sldSz cx="12188952" cy="6858000" type="screen4x3"/>
+  <p:sldSz cx="12188825" cy="6858000"/>
   <p:notesSz cx="6858000" cy="9144000"/>
   <p:defaultTextStyle>
     <a:defPPr>
@@ -132,11 +135,27 @@
       </a:defRPr>
     </a:lvl9pPr>
   </p:defaultTextStyle>
+  <p:extLst>
+    <p:ext uri="{EFAFB233-063F-42B5-8137-9DF3F51BA10A}">
+      <p15:sldGuideLst xmlns:p15="http://schemas.microsoft.com/office/powerpoint/2012/main">
+        <p15:guide id="1" orient="horz" pos="2160">
+          <p15:clr>
+            <a:srgbClr val="A4A3A4"/>
+          </p15:clr>
+        </p15:guide>
+        <p15:guide id="2" pos="2880">
+          <p15:clr>
+            <a:srgbClr val="A4A3A4"/>
+          </p15:clr>
+        </p15:guide>
+      </p15:sldGuideLst>
+    </p:ext>
+  </p:extLst>
 </p:presentation>
 </file>
 
 <file path=ppt/notesMasters/notesMaster1.xml><?xml version="1.0" encoding="utf-8"?>
-<p:notesMaster xmlns:a="http://schemas.openxmlformats.org/drawingml/2006/main" xmlns:p="http://schemas.openxmlformats.org/presentationml/2006/main" xmlns:r="http://schemas.openxmlformats.org/officeDocument/2006/relationships">
+<p:notesMaster xmlns:a="http://schemas.openxmlformats.org/drawingml/2006/main" xmlns:r="http://schemas.openxmlformats.org/officeDocument/2006/relationships" xmlns:p="http://schemas.openxmlformats.org/presentationml/2006/main">
   <p:cSld>
     <p:bg>
       <p:bgRef idx="1001">
@@ -157,241 +176,16 @@
           <a:chExt cx="0" cy="0"/>
         </a:xfrm>
       </p:grpSpPr>
-      <p:sp>
-        <p:nvSpPr>
-          <p:cNvPr id="2" name="Header Placeholder 1"/>
-          <p:cNvSpPr>
-            <a:spLocks noGrp="1"/>
-          </p:cNvSpPr>
-          <p:nvPr>
-            <p:ph type="hdr" sz="quarter"/>
-          </p:nvPr>
-        </p:nvSpPr>
-        <p:spPr>
-          <a:xfrm>
-            <a:off x="0" y="0"/>
-            <a:ext cx="2971800" cy="457200"/>
-          </a:xfrm>
-          <a:prstGeom prst="rect">
-            <a:avLst/>
-          </a:prstGeom>
-        </p:spPr>
-        <p:txBody>
-          <a:bodyPr vert="horz" lIns="91440" tIns="45720" rIns="91440" bIns="45720" rtlCol="0"/>
-          <a:lstStyle>
-            <a:lvl1pPr algn="l">
-              <a:defRPr sz="1200"/>
-            </a:lvl1pPr>
-          </a:lstStyle>
-          <a:p>
-            <a:endParaRPr lang="en-US"/>
-          </a:p>
-        </p:txBody>
-      </p:sp>
-      <p:sp>
-        <p:nvSpPr>
-          <p:cNvPr id="3" name="Date Placeholder 2"/>
-          <p:cNvSpPr>
-            <a:spLocks noGrp="1"/>
-          </p:cNvSpPr>
-          <p:nvPr>
-            <p:ph type="dt" idx="1"/>
-          </p:nvPr>
-        </p:nvSpPr>
-        <p:spPr>
-          <a:xfrm>
-            <a:off x="3884613" y="0"/>
-            <a:ext cx="2971800" cy="457200"/>
-          </a:xfrm>
-          <a:prstGeom prst="rect">
-            <a:avLst/>
-          </a:prstGeom>
-        </p:spPr>
-        <p:txBody>
-          <a:bodyPr vert="horz" lIns="91440" tIns="45720" rIns="91440" bIns="45720" rtlCol="0"/>
-          <a:lstStyle>
-            <a:lvl1pPr algn="r">
-              <a:defRPr sz="1200"/>
-            </a:lvl1pPr>
-          </a:lstStyle>
-          <a:p>
-            <a:fld id="{0F89C1C7-3DCD-1040-A9CF-14679D8B5DDD}" type="datetimeFigureOut">
-              <a:rPr lang="en-US" smtClean="0"/>
-              <a:t>10/17/16</a:t>
-            </a:fld>
-            <a:endParaRPr lang="en-US"/>
-          </a:p>
-        </p:txBody>
-      </p:sp>
-      <p:sp>
-        <p:nvSpPr>
-          <p:cNvPr id="4" name="Slide Image Placeholder 3"/>
-          <p:cNvSpPr>
-            <a:spLocks noGrp="1" noRot="1" noChangeAspect="1"/>
-          </p:cNvSpPr>
-          <p:nvPr>
-            <p:ph type="sldImg" idx="2"/>
-          </p:nvPr>
-        </p:nvSpPr>
-        <p:spPr>
-          <a:xfrm>
-            <a:off x="1143000" y="685800"/>
-            <a:ext cx="4572000" cy="3429000"/>
-          </a:xfrm>
-          <a:prstGeom prst="rect">
-            <a:avLst/>
-          </a:prstGeom>
-          <a:noFill/>
-          <a:ln w="12700">
-            <a:solidFill>
-              <a:prstClr val="black"/>
-            </a:solidFill>
-          </a:ln>
-        </p:spPr>
-        <p:txBody>
-          <a:bodyPr vert="horz" lIns="91440" tIns="45720" rIns="91440" bIns="45720" rtlCol="0" anchor="ctr"/>
-          <a:lstStyle/>
-          <a:p>
-            <a:endParaRPr lang="en-US"/>
-          </a:p>
-        </p:txBody>
-      </p:sp>
-      <p:sp>
-        <p:nvSpPr>
-          <p:cNvPr id="5" name="Notes Placeholder 4"/>
-          <p:cNvSpPr>
-            <a:spLocks noGrp="1"/>
-          </p:cNvSpPr>
-          <p:nvPr>
-            <p:ph type="body" sz="quarter" idx="3"/>
-          </p:nvPr>
-        </p:nvSpPr>
-        <p:spPr>
-          <a:xfrm>
-            <a:off x="685800" y="4343400"/>
-            <a:ext cx="5486400" cy="4114800"/>
-          </a:xfrm>
-          <a:prstGeom prst="rect">
-            <a:avLst/>
-          </a:prstGeom>
-        </p:spPr>
-        <p:txBody>
-          <a:bodyPr vert="horz" lIns="91440" tIns="45720" rIns="91440" bIns="45720" rtlCol="0"/>
-          <a:lstStyle/>
-          <a:p>
-            <a:pPr lvl="0"/>
-            <a:r>
-              <a:rPr lang="en-US" smtClean="0"/>
-              <a:t>Click to edit Master text styles</a:t>
-            </a:r>
-          </a:p>
-          <a:p>
-            <a:pPr lvl="1"/>
-            <a:r>
-              <a:rPr lang="en-US" smtClean="0"/>
-              <a:t>Second level</a:t>
-            </a:r>
-          </a:p>
-          <a:p>
-            <a:pPr lvl="2"/>
-            <a:r>
-              <a:rPr lang="en-US" smtClean="0"/>
-              <a:t>Third level</a:t>
-            </a:r>
-          </a:p>
-          <a:p>
-            <a:pPr lvl="3"/>
-            <a:r>
-              <a:rPr lang="en-US" smtClean="0"/>
-              <a:t>Fourth level</a:t>
-            </a:r>
-          </a:p>
-          <a:p>
-            <a:pPr lvl="4"/>
-            <a:r>
-              <a:rPr lang="en-US" smtClean="0"/>
-              <a:t>Fifth level</a:t>
-            </a:r>
-            <a:endParaRPr lang="en-US"/>
-          </a:p>
-        </p:txBody>
-      </p:sp>
-      <p:sp>
-        <p:nvSpPr>
-          <p:cNvPr id="6" name="Footer Placeholder 5"/>
-          <p:cNvSpPr>
-            <a:spLocks noGrp="1"/>
-          </p:cNvSpPr>
-          <p:nvPr>
-            <p:ph type="ftr" sz="quarter" idx="4"/>
-          </p:nvPr>
-        </p:nvSpPr>
-        <p:spPr>
-          <a:xfrm>
-            <a:off x="0" y="8685213"/>
-            <a:ext cx="2971800" cy="457200"/>
-          </a:xfrm>
-          <a:prstGeom prst="rect">
-            <a:avLst/>
-          </a:prstGeom>
-        </p:spPr>
-        <p:txBody>
-          <a:bodyPr vert="horz" lIns="91440" tIns="45720" rIns="91440" bIns="45720" rtlCol="0" anchor="b"/>
-          <a:lstStyle>
-            <a:lvl1pPr algn="l">
-              <a:defRPr sz="1200"/>
-            </a:lvl1pPr>
-          </a:lstStyle>
-          <a:p>
-            <a:endParaRPr lang="en-US"/>
-          </a:p>
-        </p:txBody>
-      </p:sp>
-      <p:sp>
-        <p:nvSpPr>
-          <p:cNvPr id="7" name="Slide Number Placeholder 6"/>
-          <p:cNvSpPr>
-            <a:spLocks noGrp="1"/>
-          </p:cNvSpPr>
-          <p:nvPr>
-            <p:ph type="sldNum" sz="quarter" idx="5"/>
-          </p:nvPr>
-        </p:nvSpPr>
-        <p:spPr>
-          <a:xfrm>
-            <a:off x="3884613" y="8685213"/>
-            <a:ext cx="2971800" cy="457200"/>
-          </a:xfrm>
-          <a:prstGeom prst="rect">
-            <a:avLst/>
-          </a:prstGeom>
-        </p:spPr>
-        <p:txBody>
-          <a:bodyPr vert="horz" lIns="91440" tIns="45720" rIns="91440" bIns="45720" rtlCol="0" anchor="b"/>
-          <a:lstStyle>
-            <a:lvl1pPr algn="r">
-              <a:defRPr sz="1200"/>
-            </a:lvl1pPr>
-          </a:lstStyle>
-          <a:p>
-            <a:fld id="{BB5E49A5-4136-284D-997B-48E1D791AD67}" type="slidenum">
-              <a:rPr lang="en-US" smtClean="0"/>
-              <a:t>‹#›</a:t>
-            </a:fld>
-            <a:endParaRPr lang="en-US"/>
-          </a:p>
-        </p:txBody>
-      </p:sp>
     </p:spTree>
     <p:extLst>
       <p:ext uri="{BB962C8B-B14F-4D97-AF65-F5344CB8AC3E}">
-        <p14:creationId xmlns:p14="http://schemas.microsoft.com/office/powerpoint/2010/main" val="2623252185"/>
+        <p14:creationId xmlns:p14="http://schemas.microsoft.com/office/powerpoint/2010/main" val="1009622737"/>
       </p:ext>
     </p:extLst>
   </p:cSld>
   <p:clrMap bg1="lt1" tx1="dk1" bg2="lt2" tx2="dk2" accent1="accent1" accent2="accent2" accent3="accent3" accent4="accent4" accent5="accent5" accent6="accent6" hlink="hlink" folHlink="folHlink"/>
   <p:notesStyle>
-    <a:lvl1pPr marL="0" algn="l" defTabSz="457200" rtl="0" eaLnBrk="1" latinLnBrk="0" hangingPunct="1">
+    <a:lvl1pPr marL="0" algn="l" defTabSz="914400" rtl="0" eaLnBrk="1" latinLnBrk="0" hangingPunct="1">
       <a:defRPr sz="1200" kern="1200">
         <a:solidFill>
           <a:schemeClr val="tx1"/>
@@ -401,7 +195,7 @@
         <a:cs typeface="+mn-cs"/>
       </a:defRPr>
     </a:lvl1pPr>
-    <a:lvl2pPr marL="457200" algn="l" defTabSz="457200" rtl="0" eaLnBrk="1" latinLnBrk="0" hangingPunct="1">
+    <a:lvl2pPr marL="457200" algn="l" defTabSz="914400" rtl="0" eaLnBrk="1" latinLnBrk="0" hangingPunct="1">
       <a:defRPr sz="1200" kern="1200">
         <a:solidFill>
           <a:schemeClr val="tx1"/>
@@ -411,7 +205,7 @@
         <a:cs typeface="+mn-cs"/>
       </a:defRPr>
     </a:lvl2pPr>
-    <a:lvl3pPr marL="914400" algn="l" defTabSz="457200" rtl="0" eaLnBrk="1" latinLnBrk="0" hangingPunct="1">
+    <a:lvl3pPr marL="914400" algn="l" defTabSz="914400" rtl="0" eaLnBrk="1" latinLnBrk="0" hangingPunct="1">
       <a:defRPr sz="1200" kern="1200">
         <a:solidFill>
           <a:schemeClr val="tx1"/>
@@ -421,7 +215,7 @@
         <a:cs typeface="+mn-cs"/>
       </a:defRPr>
     </a:lvl3pPr>
-    <a:lvl4pPr marL="1371600" algn="l" defTabSz="457200" rtl="0" eaLnBrk="1" latinLnBrk="0" hangingPunct="1">
+    <a:lvl4pPr marL="1371600" algn="l" defTabSz="914400" rtl="0" eaLnBrk="1" latinLnBrk="0" hangingPunct="1">
       <a:defRPr sz="1200" kern="1200">
         <a:solidFill>
           <a:schemeClr val="tx1"/>
@@ -431,7 +225,7 @@
         <a:cs typeface="+mn-cs"/>
       </a:defRPr>
     </a:lvl4pPr>
-    <a:lvl5pPr marL="1828800" algn="l" defTabSz="457200" rtl="0" eaLnBrk="1" latinLnBrk="0" hangingPunct="1">
+    <a:lvl5pPr marL="1828800" algn="l" defTabSz="914400" rtl="0" eaLnBrk="1" latinLnBrk="0" hangingPunct="1">
       <a:defRPr sz="1200" kern="1200">
         <a:solidFill>
           <a:schemeClr val="tx1"/>
@@ -441,7 +235,7 @@
         <a:cs typeface="+mn-cs"/>
       </a:defRPr>
     </a:lvl5pPr>
-    <a:lvl6pPr marL="2286000" algn="l" defTabSz="457200" rtl="0" eaLnBrk="1" latinLnBrk="0" hangingPunct="1">
+    <a:lvl6pPr marL="2286000" algn="l" defTabSz="914400" rtl="0" eaLnBrk="1" latinLnBrk="0" hangingPunct="1">
       <a:defRPr sz="1200" kern="1200">
         <a:solidFill>
           <a:schemeClr val="tx1"/>
@@ -451,7 +245,7 @@
         <a:cs typeface="+mn-cs"/>
       </a:defRPr>
     </a:lvl6pPr>
-    <a:lvl7pPr marL="2743200" algn="l" defTabSz="457200" rtl="0" eaLnBrk="1" latinLnBrk="0" hangingPunct="1">
+    <a:lvl7pPr marL="2743200" algn="l" defTabSz="914400" rtl="0" eaLnBrk="1" latinLnBrk="0" hangingPunct="1">
       <a:defRPr sz="1200" kern="1200">
         <a:solidFill>
           <a:schemeClr val="tx1"/>
@@ -461,7 +255,7 @@
         <a:cs typeface="+mn-cs"/>
       </a:defRPr>
     </a:lvl7pPr>
-    <a:lvl8pPr marL="3200400" algn="l" defTabSz="457200" rtl="0" eaLnBrk="1" latinLnBrk="0" hangingPunct="1">
+    <a:lvl8pPr marL="3200400" algn="l" defTabSz="914400" rtl="0" eaLnBrk="1" latinLnBrk="0" hangingPunct="1">
       <a:defRPr sz="1200" kern="1200">
         <a:solidFill>
           <a:schemeClr val="tx1"/>
@@ -471,7 +265,7 @@
         <a:cs typeface="+mn-cs"/>
       </a:defRPr>
     </a:lvl8pPr>
-    <a:lvl9pPr marL="3657600" algn="l" defTabSz="457200" rtl="0" eaLnBrk="1" latinLnBrk="0" hangingPunct="1">
+    <a:lvl9pPr marL="3657600" algn="l" defTabSz="914400" rtl="0" eaLnBrk="1" latinLnBrk="0" hangingPunct="1">
       <a:defRPr sz="1200" kern="1200">
         <a:solidFill>
           <a:schemeClr val="tx1"/>
@@ -486,7 +280,7 @@
 </file>
 
 <file path=ppt/notesSlides/notesSlide1.xml><?xml version="1.0" encoding="utf-8"?>
-<p:notes xmlns:a="http://schemas.openxmlformats.org/drawingml/2006/main" xmlns:p="http://schemas.openxmlformats.org/presentationml/2006/main" xmlns:r="http://schemas.openxmlformats.org/officeDocument/2006/relationships">
+<p:notes xmlns:a="http://schemas.openxmlformats.org/drawingml/2006/main" xmlns:r="http://schemas.openxmlformats.org/officeDocument/2006/relationships" xmlns:p="http://schemas.openxmlformats.org/presentationml/2006/main">
   <p:cSld>
     <p:spTree>
       <p:nvGrpSpPr>
@@ -506,7 +300,7 @@
         <p:nvSpPr>
           <p:cNvPr id="2" name="Slide Image Placeholder 1"/>
           <p:cNvSpPr>
-            <a:spLocks noGrp="1"/>
+            <a:spLocks noGrp="1" noRot="1" noChangeAspect="1"/>
           </p:cNvSpPr>
           <p:nvPr>
             <p:ph type="sldImg" idx="2"/>
@@ -521,7 +315,7 @@
             <a:spLocks noGrp="1"/>
           </p:cNvSpPr>
           <p:nvPr>
-            <p:ph type="body" idx="3" sz="quarter"/>
+            <p:ph type="body" sz="quarter" idx="3"/>
           </p:nvPr>
         </p:nvSpPr>
         <p:spPr/>
@@ -542,7 +336,7 @@
             <a:spLocks noGrp="1"/>
           </p:cNvSpPr>
           <p:nvPr>
-            <p:ph type="sldNum" idx="5" sz="quarter"/>
+            <p:ph type="sldNum" sz="quarter" idx="5"/>
           </p:nvPr>
         </p:nvSpPr>
         <p:spPr/>
@@ -556,7 +350,7 @@
 </file>
 
 <file path=ppt/notesSlides/notesSlide10.xml><?xml version="1.0" encoding="utf-8"?>
-<p:notes xmlns:a="http://schemas.openxmlformats.org/drawingml/2006/main" xmlns:p="http://schemas.openxmlformats.org/presentationml/2006/main" xmlns:r="http://schemas.openxmlformats.org/officeDocument/2006/relationships">
+<p:notes xmlns:a="http://schemas.openxmlformats.org/drawingml/2006/main" xmlns:r="http://schemas.openxmlformats.org/officeDocument/2006/relationships" xmlns:p="http://schemas.openxmlformats.org/presentationml/2006/main">
   <p:cSld>
     <p:spTree>
       <p:nvGrpSpPr>
@@ -576,7 +370,7 @@
         <p:nvSpPr>
           <p:cNvPr id="2" name="Slide Image Placeholder 1"/>
           <p:cNvSpPr>
-            <a:spLocks noGrp="1"/>
+            <a:spLocks noGrp="1" noRot="1" noChangeAspect="1"/>
           </p:cNvSpPr>
           <p:nvPr>
             <p:ph type="sldImg" idx="2"/>
@@ -591,7 +385,7 @@
             <a:spLocks noGrp="1"/>
           </p:cNvSpPr>
           <p:nvPr>
-            <p:ph type="body" idx="3" sz="quarter"/>
+            <p:ph type="body" sz="quarter" idx="3"/>
           </p:nvPr>
         </p:nvSpPr>
         <p:spPr/>
@@ -612,7 +406,7 @@
             <a:spLocks noGrp="1"/>
           </p:cNvSpPr>
           <p:nvPr>
-            <p:ph type="sldNum" idx="5" sz="quarter"/>
+            <p:ph type="sldNum" sz="quarter" idx="5"/>
           </p:nvPr>
         </p:nvSpPr>
         <p:spPr/>
@@ -626,7 +420,7 @@
 </file>
 
 <file path=ppt/notesSlides/notesSlide11.xml><?xml version="1.0" encoding="utf-8"?>
-<p:notes xmlns:a="http://schemas.openxmlformats.org/drawingml/2006/main" xmlns:p="http://schemas.openxmlformats.org/presentationml/2006/main" xmlns:r="http://schemas.openxmlformats.org/officeDocument/2006/relationships">
+<p:notes xmlns:a="http://schemas.openxmlformats.org/drawingml/2006/main" xmlns:r="http://schemas.openxmlformats.org/officeDocument/2006/relationships" xmlns:p="http://schemas.openxmlformats.org/presentationml/2006/main">
   <p:cSld>
     <p:spTree>
       <p:nvGrpSpPr>
@@ -646,7 +440,7 @@
         <p:nvSpPr>
           <p:cNvPr id="2" name="Slide Image Placeholder 1"/>
           <p:cNvSpPr>
-            <a:spLocks noGrp="1"/>
+            <a:spLocks noGrp="1" noRot="1" noChangeAspect="1"/>
           </p:cNvSpPr>
           <p:nvPr>
             <p:ph type="sldImg" idx="2"/>
@@ -661,7 +455,7 @@
             <a:spLocks noGrp="1"/>
           </p:cNvSpPr>
           <p:nvPr>
-            <p:ph type="body" idx="3" sz="quarter"/>
+            <p:ph type="body" sz="quarter" idx="3"/>
           </p:nvPr>
         </p:nvSpPr>
         <p:spPr/>
@@ -682,7 +476,7 @@
             <a:spLocks noGrp="1"/>
           </p:cNvSpPr>
           <p:nvPr>
-            <p:ph type="sldNum" idx="5" sz="quarter"/>
+            <p:ph type="sldNum" sz="quarter" idx="5"/>
           </p:nvPr>
         </p:nvSpPr>
         <p:spPr/>
@@ -696,7 +490,7 @@
 </file>
 
 <file path=ppt/notesSlides/notesSlide12.xml><?xml version="1.0" encoding="utf-8"?>
-<p:notes xmlns:a="http://schemas.openxmlformats.org/drawingml/2006/main" xmlns:p="http://schemas.openxmlformats.org/presentationml/2006/main" xmlns:r="http://schemas.openxmlformats.org/officeDocument/2006/relationships">
+<p:notes xmlns:a="http://schemas.openxmlformats.org/drawingml/2006/main" xmlns:r="http://schemas.openxmlformats.org/officeDocument/2006/relationships" xmlns:p="http://schemas.openxmlformats.org/presentationml/2006/main">
   <p:cSld>
     <p:spTree>
       <p:nvGrpSpPr>
@@ -716,7 +510,7 @@
         <p:nvSpPr>
           <p:cNvPr id="2" name="Slide Image Placeholder 1"/>
           <p:cNvSpPr>
-            <a:spLocks noGrp="1"/>
+            <a:spLocks noGrp="1" noRot="1" noChangeAspect="1"/>
           </p:cNvSpPr>
           <p:nvPr>
             <p:ph type="sldImg" idx="2"/>
@@ -731,7 +525,7 @@
             <a:spLocks noGrp="1"/>
           </p:cNvSpPr>
           <p:nvPr>
-            <p:ph type="body" idx="3" sz="quarter"/>
+            <p:ph type="body" sz="quarter" idx="3"/>
           </p:nvPr>
         </p:nvSpPr>
         <p:spPr/>
@@ -752,7 +546,7 @@
             <a:spLocks noGrp="1"/>
           </p:cNvSpPr>
           <p:nvPr>
-            <p:ph type="sldNum" idx="5" sz="quarter"/>
+            <p:ph type="sldNum" sz="quarter" idx="5"/>
           </p:nvPr>
         </p:nvSpPr>
         <p:spPr/>
@@ -766,7 +560,7 @@
 </file>
 
 <file path=ppt/notesSlides/notesSlide13.xml><?xml version="1.0" encoding="utf-8"?>
-<p:notes xmlns:a="http://schemas.openxmlformats.org/drawingml/2006/main" xmlns:p="http://schemas.openxmlformats.org/presentationml/2006/main" xmlns:r="http://schemas.openxmlformats.org/officeDocument/2006/relationships">
+<p:notes xmlns:a="http://schemas.openxmlformats.org/drawingml/2006/main" xmlns:r="http://schemas.openxmlformats.org/officeDocument/2006/relationships" xmlns:p="http://schemas.openxmlformats.org/presentationml/2006/main">
   <p:cSld>
     <p:spTree>
       <p:nvGrpSpPr>
@@ -786,7 +580,7 @@
         <p:nvSpPr>
           <p:cNvPr id="2" name="Slide Image Placeholder 1"/>
           <p:cNvSpPr>
-            <a:spLocks noGrp="1"/>
+            <a:spLocks noGrp="1" noRot="1" noChangeAspect="1"/>
           </p:cNvSpPr>
           <p:nvPr>
             <p:ph type="sldImg" idx="2"/>
@@ -801,7 +595,7 @@
             <a:spLocks noGrp="1"/>
           </p:cNvSpPr>
           <p:nvPr>
-            <p:ph type="body" idx="3" sz="quarter"/>
+            <p:ph type="body" sz="quarter" idx="3"/>
           </p:nvPr>
         </p:nvSpPr>
         <p:spPr/>
@@ -822,7 +616,7 @@
             <a:spLocks noGrp="1"/>
           </p:cNvSpPr>
           <p:nvPr>
-            <p:ph type="sldNum" idx="5" sz="quarter"/>
+            <p:ph type="sldNum" sz="quarter" idx="5"/>
           </p:nvPr>
         </p:nvSpPr>
         <p:spPr/>
@@ -836,7 +630,7 @@
 </file>
 
 <file path=ppt/notesSlides/notesSlide14.xml><?xml version="1.0" encoding="utf-8"?>
-<p:notes xmlns:a="http://schemas.openxmlformats.org/drawingml/2006/main" xmlns:p="http://schemas.openxmlformats.org/presentationml/2006/main" xmlns:r="http://schemas.openxmlformats.org/officeDocument/2006/relationships">
+<p:notes xmlns:a="http://schemas.openxmlformats.org/drawingml/2006/main" xmlns:r="http://schemas.openxmlformats.org/officeDocument/2006/relationships" xmlns:p="http://schemas.openxmlformats.org/presentationml/2006/main">
   <p:cSld>
     <p:spTree>
       <p:nvGrpSpPr>
@@ -856,7 +650,7 @@
         <p:nvSpPr>
           <p:cNvPr id="2" name="Slide Image Placeholder 1"/>
           <p:cNvSpPr>
-            <a:spLocks noGrp="1"/>
+            <a:spLocks noGrp="1" noRot="1" noChangeAspect="1"/>
           </p:cNvSpPr>
           <p:nvPr>
             <p:ph type="sldImg" idx="2"/>
@@ -871,7 +665,7 @@
             <a:spLocks noGrp="1"/>
           </p:cNvSpPr>
           <p:nvPr>
-            <p:ph type="body" idx="3" sz="quarter"/>
+            <p:ph type="body" sz="quarter" idx="3"/>
           </p:nvPr>
         </p:nvSpPr>
         <p:spPr/>
@@ -892,7 +686,7 @@
             <a:spLocks noGrp="1"/>
           </p:cNvSpPr>
           <p:nvPr>
-            <p:ph type="sldNum" idx="5" sz="quarter"/>
+            <p:ph type="sldNum" sz="quarter" idx="5"/>
           </p:nvPr>
         </p:nvSpPr>
         <p:spPr/>
@@ -906,7 +700,7 @@
 </file>
 
 <file path=ppt/notesSlides/notesSlide15.xml><?xml version="1.0" encoding="utf-8"?>
-<p:notes xmlns:a="http://schemas.openxmlformats.org/drawingml/2006/main" xmlns:p="http://schemas.openxmlformats.org/presentationml/2006/main" xmlns:r="http://schemas.openxmlformats.org/officeDocument/2006/relationships">
+<p:notes xmlns:a="http://schemas.openxmlformats.org/drawingml/2006/main" xmlns:r="http://schemas.openxmlformats.org/officeDocument/2006/relationships" xmlns:p="http://schemas.openxmlformats.org/presentationml/2006/main">
   <p:cSld>
     <p:spTree>
       <p:nvGrpSpPr>
@@ -926,7 +720,7 @@
         <p:nvSpPr>
           <p:cNvPr id="2" name="Slide Image Placeholder 1"/>
           <p:cNvSpPr>
-            <a:spLocks noGrp="1"/>
+            <a:spLocks noGrp="1" noRot="1" noChangeAspect="1"/>
           </p:cNvSpPr>
           <p:nvPr>
             <p:ph type="sldImg" idx="2"/>
@@ -941,7 +735,7 @@
             <a:spLocks noGrp="1"/>
           </p:cNvSpPr>
           <p:nvPr>
-            <p:ph type="body" idx="3" sz="quarter"/>
+            <p:ph type="body" sz="quarter" idx="3"/>
           </p:nvPr>
         </p:nvSpPr>
         <p:spPr/>
@@ -962,7 +756,7 @@
             <a:spLocks noGrp="1"/>
           </p:cNvSpPr>
           <p:nvPr>
-            <p:ph type="sldNum" idx="5" sz="quarter"/>
+            <p:ph type="sldNum" sz="quarter" idx="5"/>
           </p:nvPr>
         </p:nvSpPr>
         <p:spPr/>
@@ -976,7 +770,7 @@
 </file>
 
 <file path=ppt/notesSlides/notesSlide16.xml><?xml version="1.0" encoding="utf-8"?>
-<p:notes xmlns:a="http://schemas.openxmlformats.org/drawingml/2006/main" xmlns:p="http://schemas.openxmlformats.org/presentationml/2006/main" xmlns:r="http://schemas.openxmlformats.org/officeDocument/2006/relationships">
+<p:notes xmlns:a="http://schemas.openxmlformats.org/drawingml/2006/main" xmlns:r="http://schemas.openxmlformats.org/officeDocument/2006/relationships" xmlns:p="http://schemas.openxmlformats.org/presentationml/2006/main">
   <p:cSld>
     <p:spTree>
       <p:nvGrpSpPr>
@@ -996,7 +790,7 @@
         <p:nvSpPr>
           <p:cNvPr id="2" name="Slide Image Placeholder 1"/>
           <p:cNvSpPr>
-            <a:spLocks noGrp="1"/>
+            <a:spLocks noGrp="1" noRot="1" noChangeAspect="1"/>
           </p:cNvSpPr>
           <p:nvPr>
             <p:ph type="sldImg" idx="2"/>
@@ -1011,7 +805,7 @@
             <a:spLocks noGrp="1"/>
           </p:cNvSpPr>
           <p:nvPr>
-            <p:ph type="body" idx="3" sz="quarter"/>
+            <p:ph type="body" sz="quarter" idx="3"/>
           </p:nvPr>
         </p:nvSpPr>
         <p:spPr/>
@@ -1032,7 +826,7 @@
             <a:spLocks noGrp="1"/>
           </p:cNvSpPr>
           <p:nvPr>
-            <p:ph type="sldNum" idx="5" sz="quarter"/>
+            <p:ph type="sldNum" sz="quarter" idx="5"/>
           </p:nvPr>
         </p:nvSpPr>
         <p:spPr/>
@@ -1046,7 +840,7 @@
 </file>
 
 <file path=ppt/notesSlides/notesSlide17.xml><?xml version="1.0" encoding="utf-8"?>
-<p:notes xmlns:a="http://schemas.openxmlformats.org/drawingml/2006/main" xmlns:p="http://schemas.openxmlformats.org/presentationml/2006/main" xmlns:r="http://schemas.openxmlformats.org/officeDocument/2006/relationships">
+<p:notes xmlns:a="http://schemas.openxmlformats.org/drawingml/2006/main" xmlns:r="http://schemas.openxmlformats.org/officeDocument/2006/relationships" xmlns:p="http://schemas.openxmlformats.org/presentationml/2006/main">
   <p:cSld>
     <p:spTree>
       <p:nvGrpSpPr>
@@ -1066,7 +860,7 @@
         <p:nvSpPr>
           <p:cNvPr id="2" name="Slide Image Placeholder 1"/>
           <p:cNvSpPr>
-            <a:spLocks noGrp="1"/>
+            <a:spLocks noGrp="1" noRot="1" noChangeAspect="1"/>
           </p:cNvSpPr>
           <p:nvPr>
             <p:ph type="sldImg" idx="2"/>
@@ -1081,7 +875,7 @@
             <a:spLocks noGrp="1"/>
           </p:cNvSpPr>
           <p:nvPr>
-            <p:ph type="body" idx="3" sz="quarter"/>
+            <p:ph type="body" sz="quarter" idx="3"/>
           </p:nvPr>
         </p:nvSpPr>
         <p:spPr/>
@@ -1102,7 +896,7 @@
             <a:spLocks noGrp="1"/>
           </p:cNvSpPr>
           <p:nvPr>
-            <p:ph type="sldNum" idx="5" sz="quarter"/>
+            <p:ph type="sldNum" sz="quarter" idx="5"/>
           </p:nvPr>
         </p:nvSpPr>
         <p:spPr/>
@@ -1116,7 +910,7 @@
 </file>
 
 <file path=ppt/notesSlides/notesSlide18.xml><?xml version="1.0" encoding="utf-8"?>
-<p:notes xmlns:a="http://schemas.openxmlformats.org/drawingml/2006/main" xmlns:p="http://schemas.openxmlformats.org/presentationml/2006/main" xmlns:r="http://schemas.openxmlformats.org/officeDocument/2006/relationships">
+<p:notes xmlns:a="http://schemas.openxmlformats.org/drawingml/2006/main" xmlns:r="http://schemas.openxmlformats.org/officeDocument/2006/relationships" xmlns:p="http://schemas.openxmlformats.org/presentationml/2006/main">
   <p:cSld>
     <p:spTree>
       <p:nvGrpSpPr>
@@ -1136,7 +930,7 @@
         <p:nvSpPr>
           <p:cNvPr id="2" name="Slide Image Placeholder 1"/>
           <p:cNvSpPr>
-            <a:spLocks noGrp="1"/>
+            <a:spLocks noGrp="1" noRot="1" noChangeAspect="1"/>
           </p:cNvSpPr>
           <p:nvPr>
             <p:ph type="sldImg" idx="2"/>
@@ -1151,7 +945,7 @@
             <a:spLocks noGrp="1"/>
           </p:cNvSpPr>
           <p:nvPr>
-            <p:ph type="body" idx="3" sz="quarter"/>
+            <p:ph type="body" sz="quarter" idx="3"/>
           </p:nvPr>
         </p:nvSpPr>
         <p:spPr/>
@@ -1172,7 +966,7 @@
             <a:spLocks noGrp="1"/>
           </p:cNvSpPr>
           <p:nvPr>
-            <p:ph type="sldNum" idx="5" sz="quarter"/>
+            <p:ph type="sldNum" sz="quarter" idx="5"/>
           </p:nvPr>
         </p:nvSpPr>
         <p:spPr/>
@@ -1186,7 +980,7 @@
 </file>
 
 <file path=ppt/notesSlides/notesSlide19.xml><?xml version="1.0" encoding="utf-8"?>
-<p:notes xmlns:a="http://schemas.openxmlformats.org/drawingml/2006/main" xmlns:p="http://schemas.openxmlformats.org/presentationml/2006/main" xmlns:r="http://schemas.openxmlformats.org/officeDocument/2006/relationships">
+<p:notes xmlns:a="http://schemas.openxmlformats.org/drawingml/2006/main" xmlns:r="http://schemas.openxmlformats.org/officeDocument/2006/relationships" xmlns:p="http://schemas.openxmlformats.org/presentationml/2006/main">
   <p:cSld>
     <p:spTree>
       <p:nvGrpSpPr>
@@ -1206,7 +1000,7 @@
         <p:nvSpPr>
           <p:cNvPr id="2" name="Slide Image Placeholder 1"/>
           <p:cNvSpPr>
-            <a:spLocks noGrp="1"/>
+            <a:spLocks noGrp="1" noRot="1" noChangeAspect="1"/>
           </p:cNvSpPr>
           <p:nvPr>
             <p:ph type="sldImg" idx="2"/>
@@ -1221,7 +1015,7 @@
             <a:spLocks noGrp="1"/>
           </p:cNvSpPr>
           <p:nvPr>
-            <p:ph type="body" idx="3" sz="quarter"/>
+            <p:ph type="body" sz="quarter" idx="3"/>
           </p:nvPr>
         </p:nvSpPr>
         <p:spPr/>
@@ -1242,7 +1036,7 @@
             <a:spLocks noGrp="1"/>
           </p:cNvSpPr>
           <p:nvPr>
-            <p:ph type="sldNum" idx="5" sz="quarter"/>
+            <p:ph type="sldNum" sz="quarter" idx="5"/>
           </p:nvPr>
         </p:nvSpPr>
         <p:spPr/>
@@ -1256,7 +1050,7 @@
 </file>
 
 <file path=ppt/notesSlides/notesSlide2.xml><?xml version="1.0" encoding="utf-8"?>
-<p:notes xmlns:a="http://schemas.openxmlformats.org/drawingml/2006/main" xmlns:p="http://schemas.openxmlformats.org/presentationml/2006/main" xmlns:r="http://schemas.openxmlformats.org/officeDocument/2006/relationships">
+<p:notes xmlns:a="http://schemas.openxmlformats.org/drawingml/2006/main" xmlns:r="http://schemas.openxmlformats.org/officeDocument/2006/relationships" xmlns:p="http://schemas.openxmlformats.org/presentationml/2006/main">
   <p:cSld>
     <p:spTree>
       <p:nvGrpSpPr>
@@ -1276,7 +1070,7 @@
         <p:nvSpPr>
           <p:cNvPr id="2" name="Slide Image Placeholder 1"/>
           <p:cNvSpPr>
-            <a:spLocks noGrp="1"/>
+            <a:spLocks noGrp="1" noRot="1" noChangeAspect="1"/>
           </p:cNvSpPr>
           <p:nvPr>
             <p:ph type="sldImg" idx="2"/>
@@ -1291,7 +1085,7 @@
             <a:spLocks noGrp="1"/>
           </p:cNvSpPr>
           <p:nvPr>
-            <p:ph type="body" idx="3" sz="quarter"/>
+            <p:ph type="body" sz="quarter" idx="3"/>
           </p:nvPr>
         </p:nvSpPr>
         <p:spPr/>
@@ -1312,7 +1106,7 @@
             <a:spLocks noGrp="1"/>
           </p:cNvSpPr>
           <p:nvPr>
-            <p:ph type="sldNum" idx="5" sz="quarter"/>
+            <p:ph type="sldNum" sz="quarter" idx="5"/>
           </p:nvPr>
         </p:nvSpPr>
         <p:spPr/>
@@ -1326,7 +1120,7 @@
 </file>
 
 <file path=ppt/notesSlides/notesSlide20.xml><?xml version="1.0" encoding="utf-8"?>
-<p:notes xmlns:a="http://schemas.openxmlformats.org/drawingml/2006/main" xmlns:p="http://schemas.openxmlformats.org/presentationml/2006/main" xmlns:r="http://schemas.openxmlformats.org/officeDocument/2006/relationships">
+<p:notes xmlns:a="http://schemas.openxmlformats.org/drawingml/2006/main" xmlns:r="http://schemas.openxmlformats.org/officeDocument/2006/relationships" xmlns:p="http://schemas.openxmlformats.org/presentationml/2006/main">
   <p:cSld>
     <p:spTree>
       <p:nvGrpSpPr>
@@ -1346,7 +1140,7 @@
         <p:nvSpPr>
           <p:cNvPr id="2" name="Slide Image Placeholder 1"/>
           <p:cNvSpPr>
-            <a:spLocks noGrp="1"/>
+            <a:spLocks noGrp="1" noRot="1" noChangeAspect="1"/>
           </p:cNvSpPr>
           <p:nvPr>
             <p:ph type="sldImg" idx="2"/>
@@ -1361,7 +1155,7 @@
             <a:spLocks noGrp="1"/>
           </p:cNvSpPr>
           <p:nvPr>
-            <p:ph type="body" idx="3" sz="quarter"/>
+            <p:ph type="body" sz="quarter" idx="3"/>
           </p:nvPr>
         </p:nvSpPr>
         <p:spPr/>
@@ -1382,7 +1176,7 @@
             <a:spLocks noGrp="1"/>
           </p:cNvSpPr>
           <p:nvPr>
-            <p:ph type="sldNum" idx="5" sz="quarter"/>
+            <p:ph type="sldNum" sz="quarter" idx="5"/>
           </p:nvPr>
         </p:nvSpPr>
         <p:spPr/>
@@ -1396,7 +1190,7 @@
 </file>
 
 <file path=ppt/notesSlides/notesSlide21.xml><?xml version="1.0" encoding="utf-8"?>
-<p:notes xmlns:a="http://schemas.openxmlformats.org/drawingml/2006/main" xmlns:p="http://schemas.openxmlformats.org/presentationml/2006/main" xmlns:r="http://schemas.openxmlformats.org/officeDocument/2006/relationships">
+<p:notes xmlns:a="http://schemas.openxmlformats.org/drawingml/2006/main" xmlns:r="http://schemas.openxmlformats.org/officeDocument/2006/relationships" xmlns:p="http://schemas.openxmlformats.org/presentationml/2006/main">
   <p:cSld>
     <p:spTree>
       <p:nvGrpSpPr>
@@ -1416,7 +1210,7 @@
         <p:nvSpPr>
           <p:cNvPr id="2" name="Slide Image Placeholder 1"/>
           <p:cNvSpPr>
-            <a:spLocks noGrp="1"/>
+            <a:spLocks noGrp="1" noRot="1" noChangeAspect="1"/>
           </p:cNvSpPr>
           <p:nvPr>
             <p:ph type="sldImg" idx="2"/>
@@ -1431,7 +1225,7 @@
             <a:spLocks noGrp="1"/>
           </p:cNvSpPr>
           <p:nvPr>
-            <p:ph type="body" idx="3" sz="quarter"/>
+            <p:ph type="body" sz="quarter" idx="3"/>
           </p:nvPr>
         </p:nvSpPr>
         <p:spPr/>
@@ -1452,7 +1246,7 @@
             <a:spLocks noGrp="1"/>
           </p:cNvSpPr>
           <p:nvPr>
-            <p:ph type="sldNum" idx="5" sz="quarter"/>
+            <p:ph type="sldNum" sz="quarter" idx="5"/>
           </p:nvPr>
         </p:nvSpPr>
         <p:spPr/>
@@ -1466,7 +1260,7 @@
 </file>
 
 <file path=ppt/notesSlides/notesSlide22.xml><?xml version="1.0" encoding="utf-8"?>
-<p:notes xmlns:a="http://schemas.openxmlformats.org/drawingml/2006/main" xmlns:p="http://schemas.openxmlformats.org/presentationml/2006/main" xmlns:r="http://schemas.openxmlformats.org/officeDocument/2006/relationships">
+<p:notes xmlns:a="http://schemas.openxmlformats.org/drawingml/2006/main" xmlns:r="http://schemas.openxmlformats.org/officeDocument/2006/relationships" xmlns:p="http://schemas.openxmlformats.org/presentationml/2006/main">
   <p:cSld>
     <p:spTree>
       <p:nvGrpSpPr>
@@ -1486,7 +1280,7 @@
         <p:nvSpPr>
           <p:cNvPr id="2" name="Slide Image Placeholder 1"/>
           <p:cNvSpPr>
-            <a:spLocks noGrp="1"/>
+            <a:spLocks noGrp="1" noRot="1" noChangeAspect="1"/>
           </p:cNvSpPr>
           <p:nvPr>
             <p:ph type="sldImg" idx="2"/>
@@ -1501,7 +1295,7 @@
             <a:spLocks noGrp="1"/>
           </p:cNvSpPr>
           <p:nvPr>
-            <p:ph type="body" idx="3" sz="quarter"/>
+            <p:ph type="body" sz="quarter" idx="3"/>
           </p:nvPr>
         </p:nvSpPr>
         <p:spPr/>
@@ -1522,7 +1316,7 @@
             <a:spLocks noGrp="1"/>
           </p:cNvSpPr>
           <p:nvPr>
-            <p:ph type="sldNum" idx="5" sz="quarter"/>
+            <p:ph type="sldNum" sz="quarter" idx="5"/>
           </p:nvPr>
         </p:nvSpPr>
         <p:spPr/>
@@ -1536,7 +1330,7 @@
 </file>
 
 <file path=ppt/notesSlides/notesSlide23.xml><?xml version="1.0" encoding="utf-8"?>
-<p:notes xmlns:a="http://schemas.openxmlformats.org/drawingml/2006/main" xmlns:p="http://schemas.openxmlformats.org/presentationml/2006/main" xmlns:r="http://schemas.openxmlformats.org/officeDocument/2006/relationships">
+<p:notes xmlns:a="http://schemas.openxmlformats.org/drawingml/2006/main" xmlns:r="http://schemas.openxmlformats.org/officeDocument/2006/relationships" xmlns:p="http://schemas.openxmlformats.org/presentationml/2006/main">
   <p:cSld>
     <p:spTree>
       <p:nvGrpSpPr>
@@ -1556,7 +1350,7 @@
         <p:nvSpPr>
           <p:cNvPr id="2" name="Slide Image Placeholder 1"/>
           <p:cNvSpPr>
-            <a:spLocks noGrp="1"/>
+            <a:spLocks noGrp="1" noRot="1" noChangeAspect="1"/>
           </p:cNvSpPr>
           <p:nvPr>
             <p:ph type="sldImg" idx="2"/>
@@ -1571,7 +1365,7 @@
             <a:spLocks noGrp="1"/>
           </p:cNvSpPr>
           <p:nvPr>
-            <p:ph type="body" idx="3" sz="quarter"/>
+            <p:ph type="body" sz="quarter" idx="3"/>
           </p:nvPr>
         </p:nvSpPr>
         <p:spPr/>
@@ -1592,7 +1386,7 @@
             <a:spLocks noGrp="1"/>
           </p:cNvSpPr>
           <p:nvPr>
-            <p:ph type="sldNum" idx="5" sz="quarter"/>
+            <p:ph type="sldNum" sz="quarter" idx="5"/>
           </p:nvPr>
         </p:nvSpPr>
         <p:spPr/>
@@ -1606,7 +1400,7 @@
 </file>
 
 <file path=ppt/notesSlides/notesSlide24.xml><?xml version="1.0" encoding="utf-8"?>
-<p:notes xmlns:a="http://schemas.openxmlformats.org/drawingml/2006/main" xmlns:p="http://schemas.openxmlformats.org/presentationml/2006/main" xmlns:r="http://schemas.openxmlformats.org/officeDocument/2006/relationships">
+<p:notes xmlns:a="http://schemas.openxmlformats.org/drawingml/2006/main" xmlns:r="http://schemas.openxmlformats.org/officeDocument/2006/relationships" xmlns:p="http://schemas.openxmlformats.org/presentationml/2006/main">
   <p:cSld>
     <p:spTree>
       <p:nvGrpSpPr>
@@ -1626,7 +1420,7 @@
         <p:nvSpPr>
           <p:cNvPr id="2" name="Slide Image Placeholder 1"/>
           <p:cNvSpPr>
-            <a:spLocks noGrp="1"/>
+            <a:spLocks noGrp="1" noRot="1" noChangeAspect="1"/>
           </p:cNvSpPr>
           <p:nvPr>
             <p:ph type="sldImg" idx="2"/>
@@ -1641,7 +1435,7 @@
             <a:spLocks noGrp="1"/>
           </p:cNvSpPr>
           <p:nvPr>
-            <p:ph type="body" idx="3" sz="quarter"/>
+            <p:ph type="body" sz="quarter" idx="3"/>
           </p:nvPr>
         </p:nvSpPr>
         <p:spPr/>
@@ -1662,7 +1456,7 @@
             <a:spLocks noGrp="1"/>
           </p:cNvSpPr>
           <p:nvPr>
-            <p:ph type="sldNum" idx="5" sz="quarter"/>
+            <p:ph type="sldNum" sz="quarter" idx="5"/>
           </p:nvPr>
         </p:nvSpPr>
         <p:spPr/>
@@ -1676,7 +1470,7 @@
 </file>
 
 <file path=ppt/notesSlides/notesSlide25.xml><?xml version="1.0" encoding="utf-8"?>
-<p:notes xmlns:a="http://schemas.openxmlformats.org/drawingml/2006/main" xmlns:p="http://schemas.openxmlformats.org/presentationml/2006/main" xmlns:r="http://schemas.openxmlformats.org/officeDocument/2006/relationships">
+<p:notes xmlns:a="http://schemas.openxmlformats.org/drawingml/2006/main" xmlns:r="http://schemas.openxmlformats.org/officeDocument/2006/relationships" xmlns:p="http://schemas.openxmlformats.org/presentationml/2006/main">
   <p:cSld>
     <p:spTree>
       <p:nvGrpSpPr>
@@ -1696,7 +1490,7 @@
         <p:nvSpPr>
           <p:cNvPr id="2" name="Slide Image Placeholder 1"/>
           <p:cNvSpPr>
-            <a:spLocks noGrp="1"/>
+            <a:spLocks noGrp="1" noRot="1" noChangeAspect="1"/>
           </p:cNvSpPr>
           <p:nvPr>
             <p:ph type="sldImg" idx="2"/>
@@ -1711,7 +1505,7 @@
             <a:spLocks noGrp="1"/>
           </p:cNvSpPr>
           <p:nvPr>
-            <p:ph type="body" idx="3" sz="quarter"/>
+            <p:ph type="body" sz="quarter" idx="3"/>
           </p:nvPr>
         </p:nvSpPr>
         <p:spPr/>
@@ -1732,7 +1526,7 @@
             <a:spLocks noGrp="1"/>
           </p:cNvSpPr>
           <p:nvPr>
-            <p:ph type="sldNum" idx="5" sz="quarter"/>
+            <p:ph type="sldNum" sz="quarter" idx="5"/>
           </p:nvPr>
         </p:nvSpPr>
         <p:spPr/>
@@ -1746,7 +1540,7 @@
 </file>
 
 <file path=ppt/notesSlides/notesSlide26.xml><?xml version="1.0" encoding="utf-8"?>
-<p:notes xmlns:a="http://schemas.openxmlformats.org/drawingml/2006/main" xmlns:p="http://schemas.openxmlformats.org/presentationml/2006/main" xmlns:r="http://schemas.openxmlformats.org/officeDocument/2006/relationships">
+<p:notes xmlns:a="http://schemas.openxmlformats.org/drawingml/2006/main" xmlns:r="http://schemas.openxmlformats.org/officeDocument/2006/relationships" xmlns:p="http://schemas.openxmlformats.org/presentationml/2006/main">
   <p:cSld>
     <p:spTree>
       <p:nvGrpSpPr>
@@ -1766,7 +1560,7 @@
         <p:nvSpPr>
           <p:cNvPr id="2" name="Slide Image Placeholder 1"/>
           <p:cNvSpPr>
-            <a:spLocks noGrp="1"/>
+            <a:spLocks noGrp="1" noRot="1" noChangeAspect="1"/>
           </p:cNvSpPr>
           <p:nvPr>
             <p:ph type="sldImg" idx="2"/>
@@ -1781,7 +1575,7 @@
             <a:spLocks noGrp="1"/>
           </p:cNvSpPr>
           <p:nvPr>
-            <p:ph type="body" idx="3" sz="quarter"/>
+            <p:ph type="body" sz="quarter" idx="3"/>
           </p:nvPr>
         </p:nvSpPr>
         <p:spPr/>
@@ -1802,7 +1596,7 @@
             <a:spLocks noGrp="1"/>
           </p:cNvSpPr>
           <p:nvPr>
-            <p:ph type="sldNum" idx="5" sz="quarter"/>
+            <p:ph type="sldNum" sz="quarter" idx="5"/>
           </p:nvPr>
         </p:nvSpPr>
         <p:spPr/>
@@ -1816,7 +1610,7 @@
 </file>
 
 <file path=ppt/notesSlides/notesSlide27.xml><?xml version="1.0" encoding="utf-8"?>
-<p:notes xmlns:a="http://schemas.openxmlformats.org/drawingml/2006/main" xmlns:p="http://schemas.openxmlformats.org/presentationml/2006/main" xmlns:r="http://schemas.openxmlformats.org/officeDocument/2006/relationships">
+<p:notes xmlns:a="http://schemas.openxmlformats.org/drawingml/2006/main" xmlns:r="http://schemas.openxmlformats.org/officeDocument/2006/relationships" xmlns:p="http://schemas.openxmlformats.org/presentationml/2006/main">
   <p:cSld>
     <p:spTree>
       <p:nvGrpSpPr>
@@ -1836,7 +1630,7 @@
         <p:nvSpPr>
           <p:cNvPr id="2" name="Slide Image Placeholder 1"/>
           <p:cNvSpPr>
-            <a:spLocks noGrp="1"/>
+            <a:spLocks noGrp="1" noRot="1" noChangeAspect="1"/>
           </p:cNvSpPr>
           <p:nvPr>
             <p:ph type="sldImg" idx="2"/>
@@ -1851,7 +1645,7 @@
             <a:spLocks noGrp="1"/>
           </p:cNvSpPr>
           <p:nvPr>
-            <p:ph type="body" idx="3" sz="quarter"/>
+            <p:ph type="body" sz="quarter" idx="3"/>
           </p:nvPr>
         </p:nvSpPr>
         <p:spPr/>
@@ -1872,7 +1666,7 @@
             <a:spLocks noGrp="1"/>
           </p:cNvSpPr>
           <p:nvPr>
-            <p:ph type="sldNum" idx="5" sz="quarter"/>
+            <p:ph type="sldNum" sz="quarter" idx="5"/>
           </p:nvPr>
         </p:nvSpPr>
         <p:spPr/>
@@ -1886,7 +1680,7 @@
 </file>
 
 <file path=ppt/notesSlides/notesSlide28.xml><?xml version="1.0" encoding="utf-8"?>
-<p:notes xmlns:a="http://schemas.openxmlformats.org/drawingml/2006/main" xmlns:p="http://schemas.openxmlformats.org/presentationml/2006/main" xmlns:r="http://schemas.openxmlformats.org/officeDocument/2006/relationships">
+<p:notes xmlns:a="http://schemas.openxmlformats.org/drawingml/2006/main" xmlns:r="http://schemas.openxmlformats.org/officeDocument/2006/relationships" xmlns:p="http://schemas.openxmlformats.org/presentationml/2006/main">
   <p:cSld>
     <p:spTree>
       <p:nvGrpSpPr>
@@ -1906,7 +1700,7 @@
         <p:nvSpPr>
           <p:cNvPr id="2" name="Slide Image Placeholder 1"/>
           <p:cNvSpPr>
-            <a:spLocks noGrp="1"/>
+            <a:spLocks noGrp="1" noRot="1" noChangeAspect="1"/>
           </p:cNvSpPr>
           <p:nvPr>
             <p:ph type="sldImg" idx="2"/>
@@ -1921,7 +1715,7 @@
             <a:spLocks noGrp="1"/>
           </p:cNvSpPr>
           <p:nvPr>
-            <p:ph type="body" idx="3" sz="quarter"/>
+            <p:ph type="body" sz="quarter" idx="3"/>
           </p:nvPr>
         </p:nvSpPr>
         <p:spPr/>
@@ -1942,7 +1736,7 @@
             <a:spLocks noGrp="1"/>
           </p:cNvSpPr>
           <p:nvPr>
-            <p:ph type="sldNum" idx="5" sz="quarter"/>
+            <p:ph type="sldNum" sz="quarter" idx="5"/>
           </p:nvPr>
         </p:nvSpPr>
         <p:spPr/>
@@ -1956,7 +1750,7 @@
 </file>
 
 <file path=ppt/notesSlides/notesSlide29.xml><?xml version="1.0" encoding="utf-8"?>
-<p:notes xmlns:a="http://schemas.openxmlformats.org/drawingml/2006/main" xmlns:p="http://schemas.openxmlformats.org/presentationml/2006/main" xmlns:r="http://schemas.openxmlformats.org/officeDocument/2006/relationships">
+<p:notes xmlns:a="http://schemas.openxmlformats.org/drawingml/2006/main" xmlns:r="http://schemas.openxmlformats.org/officeDocument/2006/relationships" xmlns:p="http://schemas.openxmlformats.org/presentationml/2006/main">
   <p:cSld>
     <p:spTree>
       <p:nvGrpSpPr>
@@ -1976,7 +1770,7 @@
         <p:nvSpPr>
           <p:cNvPr id="2" name="Slide Image Placeholder 1"/>
           <p:cNvSpPr>
-            <a:spLocks noGrp="1"/>
+            <a:spLocks noGrp="1" noRot="1" noChangeAspect="1"/>
           </p:cNvSpPr>
           <p:nvPr>
             <p:ph type="sldImg" idx="2"/>
@@ -1991,7 +1785,7 @@
             <a:spLocks noGrp="1"/>
           </p:cNvSpPr>
           <p:nvPr>
-            <p:ph type="body" idx="3" sz="quarter"/>
+            <p:ph type="body" sz="quarter" idx="3"/>
           </p:nvPr>
         </p:nvSpPr>
         <p:spPr/>
@@ -2012,7 +1806,7 @@
             <a:spLocks noGrp="1"/>
           </p:cNvSpPr>
           <p:nvPr>
-            <p:ph type="sldNum" idx="5" sz="quarter"/>
+            <p:ph type="sldNum" sz="quarter" idx="5"/>
           </p:nvPr>
         </p:nvSpPr>
         <p:spPr/>
@@ -2026,7 +1820,7 @@
 </file>
 
 <file path=ppt/notesSlides/notesSlide3.xml><?xml version="1.0" encoding="utf-8"?>
-<p:notes xmlns:a="http://schemas.openxmlformats.org/drawingml/2006/main" xmlns:p="http://schemas.openxmlformats.org/presentationml/2006/main" xmlns:r="http://schemas.openxmlformats.org/officeDocument/2006/relationships">
+<p:notes xmlns:a="http://schemas.openxmlformats.org/drawingml/2006/main" xmlns:r="http://schemas.openxmlformats.org/officeDocument/2006/relationships" xmlns:p="http://schemas.openxmlformats.org/presentationml/2006/main">
   <p:cSld>
     <p:spTree>
       <p:nvGrpSpPr>
@@ -2046,7 +1840,7 @@
         <p:nvSpPr>
           <p:cNvPr id="2" name="Slide Image Placeholder 1"/>
           <p:cNvSpPr>
-            <a:spLocks noGrp="1"/>
+            <a:spLocks noGrp="1" noRot="1" noChangeAspect="1"/>
           </p:cNvSpPr>
           <p:nvPr>
             <p:ph type="sldImg" idx="2"/>
@@ -2061,7 +1855,7 @@
             <a:spLocks noGrp="1"/>
           </p:cNvSpPr>
           <p:nvPr>
-            <p:ph type="body" idx="3" sz="quarter"/>
+            <p:ph type="body" sz="quarter" idx="3"/>
           </p:nvPr>
         </p:nvSpPr>
         <p:spPr/>
@@ -2082,7 +1876,7 @@
             <a:spLocks noGrp="1"/>
           </p:cNvSpPr>
           <p:nvPr>
-            <p:ph type="sldNum" idx="5" sz="quarter"/>
+            <p:ph type="sldNum" sz="quarter" idx="5"/>
           </p:nvPr>
         </p:nvSpPr>
         <p:spPr/>
@@ -2096,7 +1890,7 @@
 </file>
 
 <file path=ppt/notesSlides/notesSlide4.xml><?xml version="1.0" encoding="utf-8"?>
-<p:notes xmlns:a="http://schemas.openxmlformats.org/drawingml/2006/main" xmlns:p="http://schemas.openxmlformats.org/presentationml/2006/main" xmlns:r="http://schemas.openxmlformats.org/officeDocument/2006/relationships">
+<p:notes xmlns:a="http://schemas.openxmlformats.org/drawingml/2006/main" xmlns:r="http://schemas.openxmlformats.org/officeDocument/2006/relationships" xmlns:p="http://schemas.openxmlformats.org/presentationml/2006/main">
   <p:cSld>
     <p:spTree>
       <p:nvGrpSpPr>
@@ -2116,7 +1910,7 @@
         <p:nvSpPr>
           <p:cNvPr id="2" name="Slide Image Placeholder 1"/>
           <p:cNvSpPr>
-            <a:spLocks noGrp="1"/>
+            <a:spLocks noGrp="1" noRot="1" noChangeAspect="1"/>
           </p:cNvSpPr>
           <p:nvPr>
             <p:ph type="sldImg" idx="2"/>
@@ -2131,7 +1925,7 @@
             <a:spLocks noGrp="1"/>
           </p:cNvSpPr>
           <p:nvPr>
-            <p:ph type="body" idx="3" sz="quarter"/>
+            <p:ph type="body" sz="quarter" idx="3"/>
           </p:nvPr>
         </p:nvSpPr>
         <p:spPr/>
@@ -2152,7 +1946,7 @@
             <a:spLocks noGrp="1"/>
           </p:cNvSpPr>
           <p:nvPr>
-            <p:ph type="sldNum" idx="5" sz="quarter"/>
+            <p:ph type="sldNum" sz="quarter" idx="5"/>
           </p:nvPr>
         </p:nvSpPr>
         <p:spPr/>
@@ -2166,7 +1960,7 @@
 </file>
 
 <file path=ppt/notesSlides/notesSlide5.xml><?xml version="1.0" encoding="utf-8"?>
-<p:notes xmlns:a="http://schemas.openxmlformats.org/drawingml/2006/main" xmlns:p="http://schemas.openxmlformats.org/presentationml/2006/main" xmlns:r="http://schemas.openxmlformats.org/officeDocument/2006/relationships">
+<p:notes xmlns:a="http://schemas.openxmlformats.org/drawingml/2006/main" xmlns:r="http://schemas.openxmlformats.org/officeDocument/2006/relationships" xmlns:p="http://schemas.openxmlformats.org/presentationml/2006/main">
   <p:cSld>
     <p:spTree>
       <p:nvGrpSpPr>
@@ -2186,7 +1980,7 @@
         <p:nvSpPr>
           <p:cNvPr id="2" name="Slide Image Placeholder 1"/>
           <p:cNvSpPr>
-            <a:spLocks noGrp="1"/>
+            <a:spLocks noGrp="1" noRot="1" noChangeAspect="1"/>
           </p:cNvSpPr>
           <p:nvPr>
             <p:ph type="sldImg" idx="2"/>
@@ -2201,7 +1995,7 @@
             <a:spLocks noGrp="1"/>
           </p:cNvSpPr>
           <p:nvPr>
-            <p:ph type="body" idx="3" sz="quarter"/>
+            <p:ph type="body" sz="quarter" idx="3"/>
           </p:nvPr>
         </p:nvSpPr>
         <p:spPr/>
@@ -2222,7 +2016,7 @@
             <a:spLocks noGrp="1"/>
           </p:cNvSpPr>
           <p:nvPr>
-            <p:ph type="sldNum" idx="5" sz="quarter"/>
+            <p:ph type="sldNum" sz="quarter" idx="5"/>
           </p:nvPr>
         </p:nvSpPr>
         <p:spPr/>
@@ -2236,7 +2030,7 @@
 </file>
 
 <file path=ppt/notesSlides/notesSlide6.xml><?xml version="1.0" encoding="utf-8"?>
-<p:notes xmlns:a="http://schemas.openxmlformats.org/drawingml/2006/main" xmlns:p="http://schemas.openxmlformats.org/presentationml/2006/main" xmlns:r="http://schemas.openxmlformats.org/officeDocument/2006/relationships">
+<p:notes xmlns:a="http://schemas.openxmlformats.org/drawingml/2006/main" xmlns:r="http://schemas.openxmlformats.org/officeDocument/2006/relationships" xmlns:p="http://schemas.openxmlformats.org/presentationml/2006/main">
   <p:cSld>
     <p:spTree>
       <p:nvGrpSpPr>
@@ -2256,7 +2050,7 @@
         <p:nvSpPr>
           <p:cNvPr id="2" name="Slide Image Placeholder 1"/>
           <p:cNvSpPr>
-            <a:spLocks noGrp="1"/>
+            <a:spLocks noGrp="1" noRot="1" noChangeAspect="1"/>
           </p:cNvSpPr>
           <p:nvPr>
             <p:ph type="sldImg" idx="2"/>
@@ -2271,7 +2065,7 @@
             <a:spLocks noGrp="1"/>
           </p:cNvSpPr>
           <p:nvPr>
-            <p:ph type="body" idx="3" sz="quarter"/>
+            <p:ph type="body" sz="quarter" idx="3"/>
           </p:nvPr>
         </p:nvSpPr>
         <p:spPr/>
@@ -2292,7 +2086,7 @@
             <a:spLocks noGrp="1"/>
           </p:cNvSpPr>
           <p:nvPr>
-            <p:ph type="sldNum" idx="5" sz="quarter"/>
+            <p:ph type="sldNum" sz="quarter" idx="5"/>
           </p:nvPr>
         </p:nvSpPr>
         <p:spPr/>
@@ -2306,7 +2100,7 @@
 </file>
 
 <file path=ppt/notesSlides/notesSlide7.xml><?xml version="1.0" encoding="utf-8"?>
-<p:notes xmlns:a="http://schemas.openxmlformats.org/drawingml/2006/main" xmlns:p="http://schemas.openxmlformats.org/presentationml/2006/main" xmlns:r="http://schemas.openxmlformats.org/officeDocument/2006/relationships">
+<p:notes xmlns:a="http://schemas.openxmlformats.org/drawingml/2006/main" xmlns:r="http://schemas.openxmlformats.org/officeDocument/2006/relationships" xmlns:p="http://schemas.openxmlformats.org/presentationml/2006/main">
   <p:cSld>
     <p:spTree>
       <p:nvGrpSpPr>
@@ -2326,7 +2120,7 @@
         <p:nvSpPr>
           <p:cNvPr id="2" name="Slide Image Placeholder 1"/>
           <p:cNvSpPr>
-            <a:spLocks noGrp="1"/>
+            <a:spLocks noGrp="1" noRot="1" noChangeAspect="1"/>
           </p:cNvSpPr>
           <p:nvPr>
             <p:ph type="sldImg" idx="2"/>
@@ -2341,7 +2135,7 @@
             <a:spLocks noGrp="1"/>
           </p:cNvSpPr>
           <p:nvPr>
-            <p:ph type="body" idx="3" sz="quarter"/>
+            <p:ph type="body" sz="quarter" idx="3"/>
           </p:nvPr>
         </p:nvSpPr>
         <p:spPr/>
@@ -2362,7 +2156,7 @@
             <a:spLocks noGrp="1"/>
           </p:cNvSpPr>
           <p:nvPr>
-            <p:ph type="sldNum" idx="5" sz="quarter"/>
+            <p:ph type="sldNum" sz="quarter" idx="5"/>
           </p:nvPr>
         </p:nvSpPr>
         <p:spPr/>
@@ -2376,7 +2170,7 @@
 </file>
 
 <file path=ppt/notesSlides/notesSlide8.xml><?xml version="1.0" encoding="utf-8"?>
-<p:notes xmlns:a="http://schemas.openxmlformats.org/drawingml/2006/main" xmlns:p="http://schemas.openxmlformats.org/presentationml/2006/main" xmlns:r="http://schemas.openxmlformats.org/officeDocument/2006/relationships">
+<p:notes xmlns:a="http://schemas.openxmlformats.org/drawingml/2006/main" xmlns:r="http://schemas.openxmlformats.org/officeDocument/2006/relationships" xmlns:p="http://schemas.openxmlformats.org/presentationml/2006/main">
   <p:cSld>
     <p:spTree>
       <p:nvGrpSpPr>
@@ -2396,7 +2190,7 @@
         <p:nvSpPr>
           <p:cNvPr id="2" name="Slide Image Placeholder 1"/>
           <p:cNvSpPr>
-            <a:spLocks noGrp="1"/>
+            <a:spLocks noGrp="1" noRot="1" noChangeAspect="1"/>
           </p:cNvSpPr>
           <p:nvPr>
             <p:ph type="sldImg" idx="2"/>
@@ -2411,7 +2205,7 @@
             <a:spLocks noGrp="1"/>
           </p:cNvSpPr>
           <p:nvPr>
-            <p:ph type="body" idx="3" sz="quarter"/>
+            <p:ph type="body" sz="quarter" idx="3"/>
           </p:nvPr>
         </p:nvSpPr>
         <p:spPr/>
@@ -2432,7 +2226,7 @@
             <a:spLocks noGrp="1"/>
           </p:cNvSpPr>
           <p:nvPr>
-            <p:ph type="sldNum" idx="5" sz="quarter"/>
+            <p:ph type="sldNum" sz="quarter" idx="5"/>
           </p:nvPr>
         </p:nvSpPr>
         <p:spPr/>
@@ -2446,7 +2240,7 @@
 </file>
 
 <file path=ppt/notesSlides/notesSlide9.xml><?xml version="1.0" encoding="utf-8"?>
-<p:notes xmlns:a="http://schemas.openxmlformats.org/drawingml/2006/main" xmlns:p="http://schemas.openxmlformats.org/presentationml/2006/main" xmlns:r="http://schemas.openxmlformats.org/officeDocument/2006/relationships">
+<p:notes xmlns:a="http://schemas.openxmlformats.org/drawingml/2006/main" xmlns:r="http://schemas.openxmlformats.org/officeDocument/2006/relationships" xmlns:p="http://schemas.openxmlformats.org/presentationml/2006/main">
   <p:cSld>
     <p:spTree>
       <p:nvGrpSpPr>
@@ -2466,7 +2260,7 @@
         <p:nvSpPr>
           <p:cNvPr id="2" name="Slide Image Placeholder 1"/>
           <p:cNvSpPr>
-            <a:spLocks noGrp="1"/>
+            <a:spLocks noGrp="1" noRot="1" noChangeAspect="1"/>
           </p:cNvSpPr>
           <p:nvPr>
             <p:ph type="sldImg" idx="2"/>
@@ -2481,7 +2275,7 @@
             <a:spLocks noGrp="1"/>
           </p:cNvSpPr>
           <p:nvPr>
-            <p:ph type="body" idx="3" sz="quarter"/>
+            <p:ph type="body" sz="quarter" idx="3"/>
           </p:nvPr>
         </p:nvSpPr>
         <p:spPr/>
@@ -2502,7 +2296,7 @@
             <a:spLocks noGrp="1"/>
           </p:cNvSpPr>
           <p:nvPr>
-            <p:ph type="sldNum" idx="5" sz="quarter"/>
+            <p:ph type="sldNum" sz="quarter" idx="5"/>
           </p:nvPr>
         </p:nvSpPr>
         <p:spPr/>
@@ -2553,10 +2347,9 @@
           <a:lstStyle/>
           <a:p>
             <a:r>
-              <a:rPr lang="en-US" smtClean="0"/>
+              <a:rPr lang="en-US"/>
               <a:t>Click to edit Master title style</a:t>
             </a:r>
-            <a:endParaRPr lang="en-US"/>
           </a:p>
         </p:txBody>
       </p:sp>
@@ -2672,10 +2465,9 @@
           </a:lstStyle>
           <a:p>
             <a:r>
-              <a:rPr lang="en-US" smtClean="0"/>
+              <a:rPr lang="en-US"/>
               <a:t>Click to edit Master subtitle style</a:t>
             </a:r>
-            <a:endParaRPr lang="en-US"/>
           </a:p>
         </p:txBody>
       </p:sp>
@@ -2696,7 +2488,7 @@
           <a:p>
             <a:fld id="{5BCAD085-E8A6-8845-BD4E-CB4CCA059FC4}" type="datetimeFigureOut">
               <a:rPr lang="en-US" smtClean="0"/>
-              <a:t>1/27/13</a:t>
+              <a:t>8/4/2026</a:t>
             </a:fld>
             <a:endParaRPr lang="en-US"/>
           </a:p>
@@ -2738,7 +2530,7 @@
           <a:p>
             <a:fld id="{C1FF6DA9-008F-8B48-92A6-B652298478BF}" type="slidenum">
               <a:rPr lang="en-US" smtClean="0"/>
-              <a:t>‹#›</a:t>
+              <a:t>‹Nº›</a:t>
             </a:fld>
             <a:endParaRPr lang="en-US"/>
           </a:p>
@@ -2790,10 +2582,9 @@
           <a:lstStyle/>
           <a:p>
             <a:r>
-              <a:rPr lang="en-US" smtClean="0"/>
+              <a:rPr lang="en-US"/>
               <a:t>Click to edit Master title style</a:t>
             </a:r>
-            <a:endParaRPr lang="en-US"/>
           </a:p>
         </p:txBody>
       </p:sp>
@@ -2814,38 +2605,37 @@
           <a:p>
             <a:pPr lvl="0"/>
             <a:r>
-              <a:rPr lang="en-US" smtClean="0"/>
+              <a:rPr lang="en-US"/>
               <a:t>Click to edit Master text styles</a:t>
             </a:r>
           </a:p>
           <a:p>
             <a:pPr lvl="1"/>
             <a:r>
-              <a:rPr lang="en-US" smtClean="0"/>
+              <a:rPr lang="en-US"/>
               <a:t>Second level</a:t>
             </a:r>
           </a:p>
           <a:p>
             <a:pPr lvl="2"/>
             <a:r>
-              <a:rPr lang="en-US" smtClean="0"/>
+              <a:rPr lang="en-US"/>
               <a:t>Third level</a:t>
             </a:r>
           </a:p>
           <a:p>
             <a:pPr lvl="3"/>
             <a:r>
-              <a:rPr lang="en-US" smtClean="0"/>
+              <a:rPr lang="en-US"/>
               <a:t>Fourth level</a:t>
             </a:r>
           </a:p>
           <a:p>
             <a:pPr lvl="4"/>
             <a:r>
-              <a:rPr lang="en-US" smtClean="0"/>
+              <a:rPr lang="en-US"/>
               <a:t>Fifth level</a:t>
             </a:r>
-            <a:endParaRPr lang="en-US"/>
           </a:p>
         </p:txBody>
       </p:sp>
@@ -2866,7 +2656,7 @@
           <a:p>
             <a:fld id="{5BCAD085-E8A6-8845-BD4E-CB4CCA059FC4}" type="datetimeFigureOut">
               <a:rPr lang="en-US" smtClean="0"/>
-              <a:t>1/27/13</a:t>
+              <a:t>8/4/2026</a:t>
             </a:fld>
             <a:endParaRPr lang="en-US"/>
           </a:p>
@@ -2908,7 +2698,7 @@
           <a:p>
             <a:fld id="{C1FF6DA9-008F-8B48-92A6-B652298478BF}" type="slidenum">
               <a:rPr lang="en-US" smtClean="0"/>
-              <a:t>‹#›</a:t>
+              <a:t>‹Nº›</a:t>
             </a:fld>
             <a:endParaRPr lang="en-US"/>
           </a:p>
@@ -2965,10 +2755,9 @@
           <a:lstStyle/>
           <a:p>
             <a:r>
-              <a:rPr lang="en-US" smtClean="0"/>
+              <a:rPr lang="en-US"/>
               <a:t>Click to edit Master title style</a:t>
             </a:r>
-            <a:endParaRPr lang="en-US"/>
           </a:p>
         </p:txBody>
       </p:sp>
@@ -2994,38 +2783,37 @@
           <a:p>
             <a:pPr lvl="0"/>
             <a:r>
-              <a:rPr lang="en-US" smtClean="0"/>
+              <a:rPr lang="en-US"/>
               <a:t>Click to edit Master text styles</a:t>
             </a:r>
           </a:p>
           <a:p>
             <a:pPr lvl="1"/>
             <a:r>
-              <a:rPr lang="en-US" smtClean="0"/>
+              <a:rPr lang="en-US"/>
               <a:t>Second level</a:t>
             </a:r>
           </a:p>
           <a:p>
             <a:pPr lvl="2"/>
             <a:r>
-              <a:rPr lang="en-US" smtClean="0"/>
+              <a:rPr lang="en-US"/>
               <a:t>Third level</a:t>
             </a:r>
           </a:p>
           <a:p>
             <a:pPr lvl="3"/>
             <a:r>
-              <a:rPr lang="en-US" smtClean="0"/>
+              <a:rPr lang="en-US"/>
               <a:t>Fourth level</a:t>
             </a:r>
           </a:p>
           <a:p>
             <a:pPr lvl="4"/>
             <a:r>
-              <a:rPr lang="en-US" smtClean="0"/>
+              <a:rPr lang="en-US"/>
               <a:t>Fifth level</a:t>
             </a:r>
-            <a:endParaRPr lang="en-US"/>
           </a:p>
         </p:txBody>
       </p:sp>
@@ -3046,7 +2834,7 @@
           <a:p>
             <a:fld id="{5BCAD085-E8A6-8845-BD4E-CB4CCA059FC4}" type="datetimeFigureOut">
               <a:rPr lang="en-US" smtClean="0"/>
-              <a:t>1/27/13</a:t>
+              <a:t>8/4/2026</a:t>
             </a:fld>
             <a:endParaRPr lang="en-US"/>
           </a:p>
@@ -3088,7 +2876,7 @@
           <a:p>
             <a:fld id="{C1FF6DA9-008F-8B48-92A6-B652298478BF}" type="slidenum">
               <a:rPr lang="en-US" smtClean="0"/>
-              <a:t>‹#›</a:t>
+              <a:t>‹Nº›</a:t>
             </a:fld>
             <a:endParaRPr lang="en-US"/>
           </a:p>
@@ -3140,10 +2928,9 @@
           <a:lstStyle/>
           <a:p>
             <a:r>
-              <a:rPr lang="en-US" smtClean="0"/>
+              <a:rPr lang="en-US"/>
               <a:t>Click to edit Master title style</a:t>
             </a:r>
-            <a:endParaRPr lang="en-US"/>
           </a:p>
         </p:txBody>
       </p:sp>
@@ -3164,38 +2951,37 @@
           <a:p>
             <a:pPr lvl="0"/>
             <a:r>
-              <a:rPr lang="en-US" smtClean="0"/>
+              <a:rPr lang="en-US"/>
               <a:t>Click to edit Master text styles</a:t>
             </a:r>
           </a:p>
           <a:p>
             <a:pPr lvl="1"/>
             <a:r>
-              <a:rPr lang="en-US" smtClean="0"/>
+              <a:rPr lang="en-US"/>
               <a:t>Second level</a:t>
             </a:r>
           </a:p>
           <a:p>
             <a:pPr lvl="2"/>
             <a:r>
-              <a:rPr lang="en-US" smtClean="0"/>
+              <a:rPr lang="en-US"/>
               <a:t>Third level</a:t>
             </a:r>
           </a:p>
           <a:p>
             <a:pPr lvl="3"/>
             <a:r>
-              <a:rPr lang="en-US" smtClean="0"/>
+              <a:rPr lang="en-US"/>
               <a:t>Fourth level</a:t>
             </a:r>
           </a:p>
           <a:p>
             <a:pPr lvl="4"/>
             <a:r>
-              <a:rPr lang="en-US" smtClean="0"/>
+              <a:rPr lang="en-US"/>
               <a:t>Fifth level</a:t>
             </a:r>
-            <a:endParaRPr lang="en-US"/>
           </a:p>
         </p:txBody>
       </p:sp>
@@ -3216,7 +3002,7 @@
           <a:p>
             <a:fld id="{5BCAD085-E8A6-8845-BD4E-CB4CCA059FC4}" type="datetimeFigureOut">
               <a:rPr lang="en-US" smtClean="0"/>
-              <a:t>1/27/13</a:t>
+              <a:t>8/4/2026</a:t>
             </a:fld>
             <a:endParaRPr lang="en-US"/>
           </a:p>
@@ -3258,7 +3044,7 @@
           <a:p>
             <a:fld id="{C1FF6DA9-008F-8B48-92A6-B652298478BF}" type="slidenum">
               <a:rPr lang="en-US" smtClean="0"/>
-              <a:t>‹#›</a:t>
+              <a:t>‹Nº›</a:t>
             </a:fld>
             <a:endParaRPr lang="en-US"/>
           </a:p>
@@ -3319,10 +3105,9 @@
           </a:lstStyle>
           <a:p>
             <a:r>
-              <a:rPr lang="en-US" smtClean="0"/>
+              <a:rPr lang="en-US"/>
               <a:t>Click to edit Master title style</a:t>
             </a:r>
-            <a:endParaRPr lang="en-US"/>
           </a:p>
         </p:txBody>
       </p:sp>
@@ -3439,7 +3224,7 @@
           <a:p>
             <a:pPr lvl="0"/>
             <a:r>
-              <a:rPr lang="en-US" smtClean="0"/>
+              <a:rPr lang="en-US"/>
               <a:t>Click to edit Master text styles</a:t>
             </a:r>
           </a:p>
@@ -3462,7 +3247,7 @@
           <a:p>
             <a:fld id="{5BCAD085-E8A6-8845-BD4E-CB4CCA059FC4}" type="datetimeFigureOut">
               <a:rPr lang="en-US" smtClean="0"/>
-              <a:t>1/27/13</a:t>
+              <a:t>8/4/2026</a:t>
             </a:fld>
             <a:endParaRPr lang="en-US"/>
           </a:p>
@@ -3504,7 +3289,7 @@
           <a:p>
             <a:fld id="{C1FF6DA9-008F-8B48-92A6-B652298478BF}" type="slidenum">
               <a:rPr lang="en-US" smtClean="0"/>
-              <a:t>‹#›</a:t>
+              <a:t>‹Nº›</a:t>
             </a:fld>
             <a:endParaRPr lang="en-US"/>
           </a:p>
@@ -3556,10 +3341,9 @@
           <a:lstStyle/>
           <a:p>
             <a:r>
-              <a:rPr lang="en-US" smtClean="0"/>
+              <a:rPr lang="en-US"/>
               <a:t>Click to edit Master title style</a:t>
             </a:r>
-            <a:endParaRPr lang="en-US"/>
           </a:p>
         </p:txBody>
       </p:sp>
@@ -3613,38 +3397,37 @@
           <a:p>
             <a:pPr lvl="0"/>
             <a:r>
-              <a:rPr lang="en-US" smtClean="0"/>
+              <a:rPr lang="en-US"/>
               <a:t>Click to edit Master text styles</a:t>
             </a:r>
           </a:p>
           <a:p>
             <a:pPr lvl="1"/>
             <a:r>
-              <a:rPr lang="en-US" smtClean="0"/>
+              <a:rPr lang="en-US"/>
               <a:t>Second level</a:t>
             </a:r>
           </a:p>
           <a:p>
             <a:pPr lvl="2"/>
             <a:r>
-              <a:rPr lang="en-US" smtClean="0"/>
+              <a:rPr lang="en-US"/>
               <a:t>Third level</a:t>
             </a:r>
           </a:p>
           <a:p>
             <a:pPr lvl="3"/>
             <a:r>
-              <a:rPr lang="en-US" smtClean="0"/>
+              <a:rPr lang="en-US"/>
               <a:t>Fourth level</a:t>
             </a:r>
           </a:p>
           <a:p>
             <a:pPr lvl="4"/>
             <a:r>
-              <a:rPr lang="en-US" smtClean="0"/>
+              <a:rPr lang="en-US"/>
               <a:t>Fifth level</a:t>
             </a:r>
-            <a:endParaRPr lang="en-US"/>
           </a:p>
         </p:txBody>
       </p:sp>
@@ -3698,38 +3481,37 @@
           <a:p>
             <a:pPr lvl="0"/>
             <a:r>
-              <a:rPr lang="en-US" smtClean="0"/>
+              <a:rPr lang="en-US"/>
               <a:t>Click to edit Master text styles</a:t>
             </a:r>
           </a:p>
           <a:p>
             <a:pPr lvl="1"/>
             <a:r>
-              <a:rPr lang="en-US" smtClean="0"/>
+              <a:rPr lang="en-US"/>
               <a:t>Second level</a:t>
             </a:r>
           </a:p>
           <a:p>
             <a:pPr lvl="2"/>
             <a:r>
-              <a:rPr lang="en-US" smtClean="0"/>
+              <a:rPr lang="en-US"/>
               <a:t>Third level</a:t>
             </a:r>
           </a:p>
           <a:p>
             <a:pPr lvl="3"/>
             <a:r>
-              <a:rPr lang="en-US" smtClean="0"/>
+              <a:rPr lang="en-US"/>
               <a:t>Fourth level</a:t>
             </a:r>
           </a:p>
           <a:p>
             <a:pPr lvl="4"/>
             <a:r>
-              <a:rPr lang="en-US" smtClean="0"/>
+              <a:rPr lang="en-US"/>
               <a:t>Fifth level</a:t>
             </a:r>
-            <a:endParaRPr lang="en-US"/>
           </a:p>
         </p:txBody>
       </p:sp>
@@ -3750,7 +3532,7 @@
           <a:p>
             <a:fld id="{5BCAD085-E8A6-8845-BD4E-CB4CCA059FC4}" type="datetimeFigureOut">
               <a:rPr lang="en-US" smtClean="0"/>
-              <a:t>1/27/13</a:t>
+              <a:t>8/4/2026</a:t>
             </a:fld>
             <a:endParaRPr lang="en-US"/>
           </a:p>
@@ -3792,7 +3574,7 @@
           <a:p>
             <a:fld id="{C1FF6DA9-008F-8B48-92A6-B652298478BF}" type="slidenum">
               <a:rPr lang="en-US" smtClean="0"/>
-              <a:t>‹#›</a:t>
+              <a:t>‹Nº›</a:t>
             </a:fld>
             <a:endParaRPr lang="en-US"/>
           </a:p>
@@ -3848,10 +3630,9 @@
           </a:lstStyle>
           <a:p>
             <a:r>
-              <a:rPr lang="en-US" smtClean="0"/>
+              <a:rPr lang="en-US"/>
               <a:t>Click to edit Master title style</a:t>
             </a:r>
-            <a:endParaRPr lang="en-US"/>
           </a:p>
         </p:txBody>
       </p:sp>
@@ -3914,7 +3695,7 @@
           <a:p>
             <a:pPr lvl="0"/>
             <a:r>
-              <a:rPr lang="en-US" smtClean="0"/>
+              <a:rPr lang="en-US"/>
               <a:t>Click to edit Master text styles</a:t>
             </a:r>
           </a:p>
@@ -3970,38 +3751,37 @@
           <a:p>
             <a:pPr lvl="0"/>
             <a:r>
-              <a:rPr lang="en-US" smtClean="0"/>
+              <a:rPr lang="en-US"/>
               <a:t>Click to edit Master text styles</a:t>
             </a:r>
           </a:p>
           <a:p>
             <a:pPr lvl="1"/>
             <a:r>
-              <a:rPr lang="en-US" smtClean="0"/>
+              <a:rPr lang="en-US"/>
               <a:t>Second level</a:t>
             </a:r>
           </a:p>
           <a:p>
             <a:pPr lvl="2"/>
             <a:r>
-              <a:rPr lang="en-US" smtClean="0"/>
+              <a:rPr lang="en-US"/>
               <a:t>Third level</a:t>
             </a:r>
           </a:p>
           <a:p>
             <a:pPr lvl="3"/>
             <a:r>
-              <a:rPr lang="en-US" smtClean="0"/>
+              <a:rPr lang="en-US"/>
               <a:t>Fourth level</a:t>
             </a:r>
           </a:p>
           <a:p>
             <a:pPr lvl="4"/>
             <a:r>
-              <a:rPr lang="en-US" smtClean="0"/>
+              <a:rPr lang="en-US"/>
               <a:t>Fifth level</a:t>
             </a:r>
-            <a:endParaRPr lang="en-US"/>
           </a:p>
         </p:txBody>
       </p:sp>
@@ -4064,7 +3844,7 @@
           <a:p>
             <a:pPr lvl="0"/>
             <a:r>
-              <a:rPr lang="en-US" smtClean="0"/>
+              <a:rPr lang="en-US"/>
               <a:t>Click to edit Master text styles</a:t>
             </a:r>
           </a:p>
@@ -4120,38 +3900,37 @@
           <a:p>
             <a:pPr lvl="0"/>
             <a:r>
-              <a:rPr lang="en-US" smtClean="0"/>
+              <a:rPr lang="en-US"/>
               <a:t>Click to edit Master text styles</a:t>
             </a:r>
           </a:p>
           <a:p>
             <a:pPr lvl="1"/>
             <a:r>
-              <a:rPr lang="en-US" smtClean="0"/>
+              <a:rPr lang="en-US"/>
               <a:t>Second level</a:t>
             </a:r>
           </a:p>
           <a:p>
             <a:pPr lvl="2"/>
             <a:r>
-              <a:rPr lang="en-US" smtClean="0"/>
+              <a:rPr lang="en-US"/>
               <a:t>Third level</a:t>
             </a:r>
           </a:p>
           <a:p>
             <a:pPr lvl="3"/>
             <a:r>
-              <a:rPr lang="en-US" smtClean="0"/>
+              <a:rPr lang="en-US"/>
               <a:t>Fourth level</a:t>
             </a:r>
           </a:p>
           <a:p>
             <a:pPr lvl="4"/>
             <a:r>
-              <a:rPr lang="en-US" smtClean="0"/>
+              <a:rPr lang="en-US"/>
               <a:t>Fifth level</a:t>
             </a:r>
-            <a:endParaRPr lang="en-US"/>
           </a:p>
         </p:txBody>
       </p:sp>
@@ -4172,7 +3951,7 @@
           <a:p>
             <a:fld id="{5BCAD085-E8A6-8845-BD4E-CB4CCA059FC4}" type="datetimeFigureOut">
               <a:rPr lang="en-US" smtClean="0"/>
-              <a:t>1/27/13</a:t>
+              <a:t>8/4/2026</a:t>
             </a:fld>
             <a:endParaRPr lang="en-US"/>
           </a:p>
@@ -4214,7 +3993,7 @@
           <a:p>
             <a:fld id="{C1FF6DA9-008F-8B48-92A6-B652298478BF}" type="slidenum">
               <a:rPr lang="en-US" smtClean="0"/>
-              <a:t>‹#›</a:t>
+              <a:t>‹Nº›</a:t>
             </a:fld>
             <a:endParaRPr lang="en-US"/>
           </a:p>
@@ -4266,10 +4045,9 @@
           <a:lstStyle/>
           <a:p>
             <a:r>
-              <a:rPr lang="en-US" smtClean="0"/>
+              <a:rPr lang="en-US"/>
               <a:t>Click to edit Master title style</a:t>
             </a:r>
-            <a:endParaRPr lang="en-US"/>
           </a:p>
         </p:txBody>
       </p:sp>
@@ -4290,7 +4068,7 @@
           <a:p>
             <a:fld id="{5BCAD085-E8A6-8845-BD4E-CB4CCA059FC4}" type="datetimeFigureOut">
               <a:rPr lang="en-US" smtClean="0"/>
-              <a:t>1/27/13</a:t>
+              <a:t>8/4/2026</a:t>
             </a:fld>
             <a:endParaRPr lang="en-US"/>
           </a:p>
@@ -4332,7 +4110,7 @@
           <a:p>
             <a:fld id="{C1FF6DA9-008F-8B48-92A6-B652298478BF}" type="slidenum">
               <a:rPr lang="en-US" smtClean="0"/>
-              <a:t>‹#›</a:t>
+              <a:t>‹Nº›</a:t>
             </a:fld>
             <a:endParaRPr lang="en-US"/>
           </a:p>
@@ -4385,7 +4163,7 @@
           <a:p>
             <a:fld id="{5BCAD085-E8A6-8845-BD4E-CB4CCA059FC4}" type="datetimeFigureOut">
               <a:rPr lang="en-US" smtClean="0"/>
-              <a:t>1/27/13</a:t>
+              <a:t>8/4/2026</a:t>
             </a:fld>
             <a:endParaRPr lang="en-US"/>
           </a:p>
@@ -4427,7 +4205,7 @@
           <a:p>
             <a:fld id="{C1FF6DA9-008F-8B48-92A6-B652298478BF}" type="slidenum">
               <a:rPr lang="en-US" smtClean="0"/>
-              <a:t>‹#›</a:t>
+              <a:t>‹Nº›</a:t>
             </a:fld>
             <a:endParaRPr lang="en-US"/>
           </a:p>
@@ -4488,10 +4266,9 @@
           </a:lstStyle>
           <a:p>
             <a:r>
-              <a:rPr lang="en-US" smtClean="0"/>
+              <a:rPr lang="en-US"/>
               <a:t>Click to edit Master title style</a:t>
             </a:r>
-            <a:endParaRPr lang="en-US"/>
           </a:p>
         </p:txBody>
       </p:sp>
@@ -4545,38 +4322,37 @@
           <a:p>
             <a:pPr lvl="0"/>
             <a:r>
-              <a:rPr lang="en-US" smtClean="0"/>
+              <a:rPr lang="en-US"/>
               <a:t>Click to edit Master text styles</a:t>
             </a:r>
           </a:p>
           <a:p>
             <a:pPr lvl="1"/>
             <a:r>
-              <a:rPr lang="en-US" smtClean="0"/>
+              <a:rPr lang="en-US"/>
               <a:t>Second level</a:t>
             </a:r>
           </a:p>
           <a:p>
             <a:pPr lvl="2"/>
             <a:r>
-              <a:rPr lang="en-US" smtClean="0"/>
+              <a:rPr lang="en-US"/>
               <a:t>Third level</a:t>
             </a:r>
           </a:p>
           <a:p>
             <a:pPr lvl="3"/>
             <a:r>
-              <a:rPr lang="en-US" smtClean="0"/>
+              <a:rPr lang="en-US"/>
               <a:t>Fourth level</a:t>
             </a:r>
           </a:p>
           <a:p>
             <a:pPr lvl="4"/>
             <a:r>
-              <a:rPr lang="en-US" smtClean="0"/>
+              <a:rPr lang="en-US"/>
               <a:t>Fifth level</a:t>
             </a:r>
-            <a:endParaRPr lang="en-US"/>
           </a:p>
         </p:txBody>
       </p:sp>
@@ -4639,7 +4415,7 @@
           <a:p>
             <a:pPr lvl="0"/>
             <a:r>
-              <a:rPr lang="en-US" smtClean="0"/>
+              <a:rPr lang="en-US"/>
               <a:t>Click to edit Master text styles</a:t>
             </a:r>
           </a:p>
@@ -4662,7 +4438,7 @@
           <a:p>
             <a:fld id="{5BCAD085-E8A6-8845-BD4E-CB4CCA059FC4}" type="datetimeFigureOut">
               <a:rPr lang="en-US" smtClean="0"/>
-              <a:t>1/27/13</a:t>
+              <a:t>8/4/2026</a:t>
             </a:fld>
             <a:endParaRPr lang="en-US"/>
           </a:p>
@@ -4704,7 +4480,7 @@
           <a:p>
             <a:fld id="{C1FF6DA9-008F-8B48-92A6-B652298478BF}" type="slidenum">
               <a:rPr lang="en-US" smtClean="0"/>
-              <a:t>‹#›</a:t>
+              <a:t>‹Nº›</a:t>
             </a:fld>
             <a:endParaRPr lang="en-US"/>
           </a:p>
@@ -4765,10 +4541,9 @@
           </a:lstStyle>
           <a:p>
             <a:r>
-              <a:rPr lang="en-US" smtClean="0"/>
+              <a:rPr lang="en-US"/>
               <a:t>Click to edit Master title style</a:t>
             </a:r>
-            <a:endParaRPr lang="en-US"/>
           </a:p>
         </p:txBody>
       </p:sp>
@@ -4892,7 +4667,7 @@
           <a:p>
             <a:pPr lvl="0"/>
             <a:r>
-              <a:rPr lang="en-US" smtClean="0"/>
+              <a:rPr lang="en-US"/>
               <a:t>Click to edit Master text styles</a:t>
             </a:r>
           </a:p>
@@ -4915,7 +4690,7 @@
           <a:p>
             <a:fld id="{5BCAD085-E8A6-8845-BD4E-CB4CCA059FC4}" type="datetimeFigureOut">
               <a:rPr lang="en-US" smtClean="0"/>
-              <a:t>1/27/13</a:t>
+              <a:t>8/4/2026</a:t>
             </a:fld>
             <a:endParaRPr lang="en-US"/>
           </a:p>
@@ -4957,7 +4732,7 @@
           <a:p>
             <a:fld id="{C1FF6DA9-008F-8B48-92A6-B652298478BF}" type="slidenum">
               <a:rPr lang="en-US" smtClean="0"/>
-              <a:t>‹#›</a:t>
+              <a:t>‹Nº›</a:t>
             </a:fld>
             <a:endParaRPr lang="en-US"/>
           </a:p>
@@ -5024,10 +4799,9 @@
           <a:lstStyle/>
           <a:p>
             <a:r>
-              <a:rPr lang="en-US" smtClean="0"/>
+              <a:rPr lang="en-US"/>
               <a:t>Click to edit Master title style</a:t>
             </a:r>
-            <a:endParaRPr lang="en-US"/>
           </a:p>
         </p:txBody>
       </p:sp>
@@ -5058,38 +4832,37 @@
           <a:p>
             <a:pPr lvl="0"/>
             <a:r>
-              <a:rPr lang="en-US" smtClean="0"/>
+              <a:rPr lang="en-US"/>
               <a:t>Click to edit Master text styles</a:t>
             </a:r>
           </a:p>
           <a:p>
             <a:pPr lvl="1"/>
             <a:r>
-              <a:rPr lang="en-US" smtClean="0"/>
+              <a:rPr lang="en-US"/>
               <a:t>Second level</a:t>
             </a:r>
           </a:p>
           <a:p>
             <a:pPr lvl="2"/>
             <a:r>
-              <a:rPr lang="en-US" smtClean="0"/>
+              <a:rPr lang="en-US"/>
               <a:t>Third level</a:t>
             </a:r>
           </a:p>
           <a:p>
             <a:pPr lvl="3"/>
             <a:r>
-              <a:rPr lang="en-US" smtClean="0"/>
+              <a:rPr lang="en-US"/>
               <a:t>Fourth level</a:t>
             </a:r>
           </a:p>
           <a:p>
             <a:pPr lvl="4"/>
             <a:r>
-              <a:rPr lang="en-US" smtClean="0"/>
+              <a:rPr lang="en-US"/>
               <a:t>Fifth level</a:t>
             </a:r>
-            <a:endParaRPr lang="en-US"/>
           </a:p>
         </p:txBody>
       </p:sp>
@@ -5128,7 +4901,7 @@
           <a:p>
             <a:fld id="{5BCAD085-E8A6-8845-BD4E-CB4CCA059FC4}" type="datetimeFigureOut">
               <a:rPr lang="en-US" smtClean="0"/>
-              <a:t>1/27/13</a:t>
+              <a:t>8/4/2026</a:t>
             </a:fld>
             <a:endParaRPr lang="en-US"/>
           </a:p>
@@ -5206,7 +4979,7 @@
           <a:p>
             <a:fld id="{C1FF6DA9-008F-8B48-92A6-B652298478BF}" type="slidenum">
               <a:rPr lang="en-US" smtClean="0"/>
-              <a:t>‹#›</a:t>
+              <a:t>‹Nº›</a:t>
             </a:fld>
             <a:endParaRPr lang="en-US"/>
           </a:p>
@@ -5487,7 +5260,7 @@
 </file>
 
 <file path=ppt/slides/slide1.xml><?xml version="1.0" encoding="utf-8"?>
-<p:sld xmlns:a="http://schemas.openxmlformats.org/drawingml/2006/main" xmlns:p="http://schemas.openxmlformats.org/presentationml/2006/main" xmlns:r="http://schemas.openxmlformats.org/officeDocument/2006/relationships">
+<p:sld xmlns:a="http://schemas.openxmlformats.org/drawingml/2006/main" xmlns:r="http://schemas.openxmlformats.org/officeDocument/2006/relationships" xmlns:p="http://schemas.openxmlformats.org/presentationml/2006/main">
   <p:cSld>
     <p:bg>
       <p:bgPr>
@@ -5503,7 +5276,14 @@
         <p:cNvGrpSpPr/>
         <p:nvPr/>
       </p:nvGrpSpPr>
-      <p:grpSpPr/>
+      <p:grpSpPr>
+        <a:xfrm>
+          <a:off x="0" y="0"/>
+          <a:ext cx="0" cy="0"/>
+          <a:chOff x="0" y="0"/>
+          <a:chExt cx="0" cy="0"/>
+        </a:xfrm>
+      </p:grpSpPr>
       <p:sp>
         <p:nvSpPr>
           <p:cNvPr id="2" name="Rectangle 1"/>
@@ -5544,6 +5324,7 @@
           <a:lstStyle/>
           <a:p>
             <a:pPr algn="ctr"/>
+            <a:endParaRPr/>
           </a:p>
         </p:txBody>
       </p:sp>
@@ -5659,6 +5440,7 @@
           <a:lstStyle/>
           <a:p>
             <a:pPr algn="ctr"/>
+            <a:endParaRPr/>
           </a:p>
         </p:txBody>
       </p:sp>
@@ -5807,6 +5589,7 @@
           <a:lstStyle/>
           <a:p>
             <a:pPr algn="ctr"/>
+            <a:endParaRPr/>
           </a:p>
         </p:txBody>
       </p:sp>
@@ -5850,6 +5633,7 @@
           <a:lstStyle/>
           <a:p>
             <a:pPr algn="ctr"/>
+            <a:endParaRPr/>
           </a:p>
         </p:txBody>
       </p:sp>
@@ -5893,6 +5677,7 @@
           <a:lstStyle/>
           <a:p>
             <a:pPr algn="ctr"/>
+            <a:endParaRPr/>
           </a:p>
         </p:txBody>
       </p:sp>
@@ -5972,6 +5757,7 @@
           <a:lstStyle/>
           <a:p>
             <a:pPr algn="ctr"/>
+            <a:endParaRPr/>
           </a:p>
         </p:txBody>
       </p:sp>
@@ -5984,7 +5770,7 @@
 </file>
 
 <file path=ppt/slides/slide10.xml><?xml version="1.0" encoding="utf-8"?>
-<p:sld xmlns:a="http://schemas.openxmlformats.org/drawingml/2006/main" xmlns:p="http://schemas.openxmlformats.org/presentationml/2006/main" xmlns:r="http://schemas.openxmlformats.org/officeDocument/2006/relationships">
+<p:sld xmlns:a="http://schemas.openxmlformats.org/drawingml/2006/main" xmlns:r="http://schemas.openxmlformats.org/officeDocument/2006/relationships" xmlns:p="http://schemas.openxmlformats.org/presentationml/2006/main">
   <p:cSld>
     <p:bg>
       <p:bgPr>
@@ -6000,7 +5786,14 @@
         <p:cNvGrpSpPr/>
         <p:nvPr/>
       </p:nvGrpSpPr>
-      <p:grpSpPr/>
+      <p:grpSpPr>
+        <a:xfrm>
+          <a:off x="0" y="0"/>
+          <a:ext cx="0" cy="0"/>
+          <a:chOff x="0" y="0"/>
+          <a:chExt cx="0" cy="0"/>
+        </a:xfrm>
+      </p:grpSpPr>
       <p:sp>
         <p:nvSpPr>
           <p:cNvPr id="2" name="Rectangle 1"/>
@@ -6041,6 +5834,7 @@
           <a:lstStyle/>
           <a:p>
             <a:pPr algn="ctr"/>
+            <a:endParaRPr/>
           </a:p>
         </p:txBody>
       </p:sp>
@@ -6154,6 +5948,7 @@
           <a:lstStyle/>
           <a:p>
             <a:pPr algn="ctr"/>
+            <a:endParaRPr/>
           </a:p>
         </p:txBody>
       </p:sp>
@@ -6197,6 +5992,7 @@
           <a:lstStyle/>
           <a:p>
             <a:pPr algn="ctr"/>
+            <a:endParaRPr/>
           </a:p>
         </p:txBody>
       </p:sp>
@@ -6310,6 +6106,7 @@
           <a:lstStyle/>
           <a:p>
             <a:pPr algn="ctr"/>
+            <a:endParaRPr/>
           </a:p>
         </p:txBody>
       </p:sp>
@@ -6425,6 +6222,7 @@
           <a:lstStyle/>
           <a:p>
             <a:pPr algn="ctr"/>
+            <a:endParaRPr/>
           </a:p>
         </p:txBody>
       </p:sp>
@@ -6538,6 +6336,7 @@
           <a:lstStyle/>
           <a:p>
             <a:pPr algn="ctr"/>
+            <a:endParaRPr/>
           </a:p>
         </p:txBody>
       </p:sp>
@@ -6653,6 +6452,7 @@
           <a:lstStyle/>
           <a:p>
             <a:pPr algn="ctr"/>
+            <a:endParaRPr/>
           </a:p>
         </p:txBody>
       </p:sp>
@@ -6766,6 +6566,7 @@
           <a:lstStyle/>
           <a:p>
             <a:pPr algn="ctr"/>
+            <a:endParaRPr/>
           </a:p>
         </p:txBody>
       </p:sp>
@@ -6881,6 +6682,7 @@
           <a:lstStyle/>
           <a:p>
             <a:pPr algn="ctr"/>
+            <a:endParaRPr/>
           </a:p>
         </p:txBody>
       </p:sp>
@@ -6994,6 +6796,7 @@
           <a:lstStyle/>
           <a:p>
             <a:pPr algn="ctr"/>
+            <a:endParaRPr/>
           </a:p>
         </p:txBody>
       </p:sp>
@@ -7078,7 +6881,7 @@
 </file>
 
 <file path=ppt/slides/slide11.xml><?xml version="1.0" encoding="utf-8"?>
-<p:sld xmlns:a="http://schemas.openxmlformats.org/drawingml/2006/main" xmlns:p="http://schemas.openxmlformats.org/presentationml/2006/main" xmlns:r="http://schemas.openxmlformats.org/officeDocument/2006/relationships">
+<p:sld xmlns:a="http://schemas.openxmlformats.org/drawingml/2006/main" xmlns:r="http://schemas.openxmlformats.org/officeDocument/2006/relationships" xmlns:p="http://schemas.openxmlformats.org/presentationml/2006/main">
   <p:cSld>
     <p:bg>
       <p:bgPr>
@@ -7094,7 +6897,14 @@
         <p:cNvGrpSpPr/>
         <p:nvPr/>
       </p:nvGrpSpPr>
-      <p:grpSpPr/>
+      <p:grpSpPr>
+        <a:xfrm>
+          <a:off x="0" y="0"/>
+          <a:ext cx="0" cy="0"/>
+          <a:chOff x="0" y="0"/>
+          <a:chExt cx="0" cy="0"/>
+        </a:xfrm>
+      </p:grpSpPr>
       <p:sp>
         <p:nvSpPr>
           <p:cNvPr id="2" name="Rectangle 1"/>
@@ -7135,6 +6945,7 @@
           <a:lstStyle/>
           <a:p>
             <a:pPr algn="ctr"/>
+            <a:endParaRPr/>
           </a:p>
         </p:txBody>
       </p:sp>
@@ -7283,6 +7094,7 @@
           <a:lstStyle/>
           <a:p>
             <a:pPr algn="ctr"/>
+            <a:endParaRPr/>
           </a:p>
         </p:txBody>
       </p:sp>
@@ -7432,6 +7244,7 @@
           <a:lstStyle/>
           <a:p>
             <a:pPr algn="ctr"/>
+            <a:endParaRPr/>
           </a:p>
         </p:txBody>
       </p:sp>
@@ -7581,6 +7394,7 @@
           <a:lstStyle/>
           <a:p>
             <a:pPr algn="ctr"/>
+            <a:endParaRPr/>
           </a:p>
         </p:txBody>
       </p:sp>
@@ -7729,6 +7543,7 @@
           <a:lstStyle/>
           <a:p>
             <a:pPr algn="ctr"/>
+            <a:endParaRPr/>
           </a:p>
         </p:txBody>
       </p:sp>
@@ -7877,6 +7692,7 @@
           <a:lstStyle/>
           <a:p>
             <a:pPr algn="ctr"/>
+            <a:endParaRPr/>
           </a:p>
         </p:txBody>
       </p:sp>
@@ -8025,6 +7841,7 @@
           <a:lstStyle/>
           <a:p>
             <a:pPr algn="ctr"/>
+            <a:endParaRPr/>
           </a:p>
         </p:txBody>
       </p:sp>
@@ -8142,7 +7959,7 @@
 </file>
 
 <file path=ppt/slides/slide12.xml><?xml version="1.0" encoding="utf-8"?>
-<p:sld xmlns:a="http://schemas.openxmlformats.org/drawingml/2006/main" xmlns:p="http://schemas.openxmlformats.org/presentationml/2006/main" xmlns:r="http://schemas.openxmlformats.org/officeDocument/2006/relationships">
+<p:sld xmlns:a="http://schemas.openxmlformats.org/drawingml/2006/main" xmlns:r="http://schemas.openxmlformats.org/officeDocument/2006/relationships" xmlns:p="http://schemas.openxmlformats.org/presentationml/2006/main">
   <p:cSld>
     <p:bg>
       <p:bgPr>
@@ -8158,7 +7975,14 @@
         <p:cNvGrpSpPr/>
         <p:nvPr/>
       </p:nvGrpSpPr>
-      <p:grpSpPr/>
+      <p:grpSpPr>
+        <a:xfrm>
+          <a:off x="0" y="0"/>
+          <a:ext cx="0" cy="0"/>
+          <a:chOff x="0" y="0"/>
+          <a:chExt cx="0" cy="0"/>
+        </a:xfrm>
+      </p:grpSpPr>
       <p:sp>
         <p:nvSpPr>
           <p:cNvPr id="2" name="Rectangle 1"/>
@@ -8199,6 +8023,7 @@
           <a:lstStyle/>
           <a:p>
             <a:pPr algn="ctr"/>
+            <a:endParaRPr/>
           </a:p>
         </p:txBody>
       </p:sp>
@@ -8312,6 +8137,7 @@
           <a:lstStyle/>
           <a:p>
             <a:pPr algn="ctr"/>
+            <a:endParaRPr/>
           </a:p>
         </p:txBody>
       </p:sp>
@@ -8425,6 +8251,7 @@
           <a:lstStyle/>
           <a:p>
             <a:pPr algn="ctr"/>
+            <a:endParaRPr/>
           </a:p>
         </p:txBody>
       </p:sp>
@@ -8505,6 +8332,7 @@
           <a:lstStyle/>
           <a:p>
             <a:pPr algn="ctr"/>
+            <a:endParaRPr/>
           </a:p>
         </p:txBody>
       </p:sp>
@@ -8618,6 +8446,7 @@
           <a:lstStyle/>
           <a:p>
             <a:pPr algn="ctr"/>
+            <a:endParaRPr/>
           </a:p>
         </p:txBody>
       </p:sp>
@@ -8698,6 +8527,7 @@
           <a:lstStyle/>
           <a:p>
             <a:pPr algn="ctr"/>
+            <a:endParaRPr/>
           </a:p>
         </p:txBody>
       </p:sp>
@@ -8811,6 +8641,7 @@
           <a:lstStyle/>
           <a:p>
             <a:pPr algn="ctr"/>
+            <a:endParaRPr/>
           </a:p>
         </p:txBody>
       </p:sp>
@@ -8926,6 +8757,7 @@
           <a:lstStyle/>
           <a:p>
             <a:pPr algn="ctr"/>
+            <a:endParaRPr/>
           </a:p>
         </p:txBody>
       </p:sp>
@@ -9004,6 +8836,7 @@
           <a:lstStyle/>
           <a:p>
             <a:pPr algn="ctr"/>
+            <a:endParaRPr/>
           </a:p>
         </p:txBody>
       </p:sp>
@@ -9082,6 +8915,7 @@
           <a:lstStyle/>
           <a:p>
             <a:pPr algn="ctr"/>
+            <a:endParaRPr/>
           </a:p>
         </p:txBody>
       </p:sp>
@@ -9160,6 +8994,7 @@
           <a:lstStyle/>
           <a:p>
             <a:pPr algn="ctr"/>
+            <a:endParaRPr/>
           </a:p>
         </p:txBody>
       </p:sp>
@@ -9238,6 +9073,7 @@
           <a:lstStyle/>
           <a:p>
             <a:pPr algn="ctr"/>
+            <a:endParaRPr/>
           </a:p>
         </p:txBody>
       </p:sp>
@@ -9285,7 +9121,7 @@
 </file>
 
 <file path=ppt/slides/slide13.xml><?xml version="1.0" encoding="utf-8"?>
-<p:sld xmlns:a="http://schemas.openxmlformats.org/drawingml/2006/main" xmlns:p="http://schemas.openxmlformats.org/presentationml/2006/main" xmlns:r="http://schemas.openxmlformats.org/officeDocument/2006/relationships">
+<p:sld xmlns:a="http://schemas.openxmlformats.org/drawingml/2006/main" xmlns:r="http://schemas.openxmlformats.org/officeDocument/2006/relationships" xmlns:p="http://schemas.openxmlformats.org/presentationml/2006/main">
   <p:cSld>
     <p:bg>
       <p:bgPr>
@@ -9301,7 +9137,14 @@
         <p:cNvGrpSpPr/>
         <p:nvPr/>
       </p:nvGrpSpPr>
-      <p:grpSpPr/>
+      <p:grpSpPr>
+        <a:xfrm>
+          <a:off x="0" y="0"/>
+          <a:ext cx="0" cy="0"/>
+          <a:chOff x="0" y="0"/>
+          <a:chExt cx="0" cy="0"/>
+        </a:xfrm>
+      </p:grpSpPr>
       <p:sp>
         <p:nvSpPr>
           <p:cNvPr id="2" name="Rectangle 1"/>
@@ -9342,6 +9185,7 @@
           <a:lstStyle/>
           <a:p>
             <a:pPr algn="ctr"/>
+            <a:endParaRPr/>
           </a:p>
         </p:txBody>
       </p:sp>
@@ -9455,6 +9299,7 @@
           <a:lstStyle/>
           <a:p>
             <a:pPr algn="ctr"/>
+            <a:endParaRPr/>
           </a:p>
         </p:txBody>
       </p:sp>
@@ -9517,13 +9362,202 @@
           <a:p>
             <a:pPr algn="l"/>
             <a:r>
-              <a:rPr sz="1300" b="0">
+              <a:rPr sz="1300" b="0" dirty="0" err="1">
                 <a:solidFill>
                   <a:srgbClr val="FFFFFF"/>
                 </a:solidFill>
                 <a:latin typeface="Calibri"/>
               </a:rPr>
-              <a:t>Disenar e implementar una VAA de codigo abierto para Chile con algoritmo transparente, ponderacion por preferencias e indicador de confianza.</a:t>
+              <a:t>Disenar</a:t>
+            </a:r>
+            <a:r>
+              <a:rPr sz="1300" b="0" dirty="0">
+                <a:solidFill>
+                  <a:srgbClr val="FFFFFF"/>
+                </a:solidFill>
+                <a:latin typeface="Calibri"/>
+              </a:rPr>
+              <a:t> e </a:t>
+            </a:r>
+            <a:r>
+              <a:rPr sz="1300" b="0" dirty="0" err="1">
+                <a:solidFill>
+                  <a:srgbClr val="FFFFFF"/>
+                </a:solidFill>
+                <a:latin typeface="Calibri"/>
+              </a:rPr>
+              <a:t>implementar</a:t>
+            </a:r>
+            <a:r>
+              <a:rPr sz="1300" b="0" dirty="0">
+                <a:solidFill>
+                  <a:srgbClr val="FFFFFF"/>
+                </a:solidFill>
+                <a:latin typeface="Calibri"/>
+              </a:rPr>
+              <a:t> </a:t>
+            </a:r>
+            <a:r>
+              <a:rPr sz="1300" b="0" dirty="0" err="1">
+                <a:solidFill>
+                  <a:srgbClr val="FFFFFF"/>
+                </a:solidFill>
+                <a:latin typeface="Calibri"/>
+              </a:rPr>
+              <a:t>una</a:t>
+            </a:r>
+            <a:r>
+              <a:rPr sz="1300" b="0" dirty="0">
+                <a:solidFill>
+                  <a:srgbClr val="FFFFFF"/>
+                </a:solidFill>
+                <a:latin typeface="Calibri"/>
+              </a:rPr>
+              <a:t> VAA de </a:t>
+            </a:r>
+            <a:r>
+              <a:rPr sz="1300" b="0" dirty="0" err="1">
+                <a:solidFill>
+                  <a:srgbClr val="FFFFFF"/>
+                </a:solidFill>
+                <a:latin typeface="Calibri"/>
+              </a:rPr>
+              <a:t>codigo</a:t>
+            </a:r>
+            <a:r>
+              <a:rPr sz="1300" b="0" dirty="0">
+                <a:solidFill>
+                  <a:srgbClr val="FFFFFF"/>
+                </a:solidFill>
+                <a:latin typeface="Calibri"/>
+              </a:rPr>
+              <a:t> </a:t>
+            </a:r>
+            <a:r>
+              <a:rPr sz="1300" b="0" dirty="0" err="1">
+                <a:solidFill>
+                  <a:srgbClr val="FFFFFF"/>
+                </a:solidFill>
+                <a:latin typeface="Calibri"/>
+              </a:rPr>
+              <a:t>abierto</a:t>
+            </a:r>
+            <a:r>
+              <a:rPr sz="1300" b="0" dirty="0">
+                <a:solidFill>
+                  <a:srgbClr val="FFFFFF"/>
+                </a:solidFill>
+                <a:latin typeface="Calibri"/>
+              </a:rPr>
+              <a:t> para Chile con </a:t>
+            </a:r>
+            <a:r>
+              <a:rPr sz="1300" b="0" dirty="0" err="1">
+                <a:solidFill>
+                  <a:srgbClr val="FFFFFF"/>
+                </a:solidFill>
+                <a:latin typeface="Calibri"/>
+              </a:rPr>
+              <a:t>algoritmo</a:t>
+            </a:r>
+            <a:r>
+              <a:rPr sz="1300" b="0" dirty="0">
+                <a:solidFill>
+                  <a:srgbClr val="FFFFFF"/>
+                </a:solidFill>
+                <a:latin typeface="Calibri"/>
+              </a:rPr>
+              <a:t> </a:t>
+            </a:r>
+            <a:r>
+              <a:rPr sz="1300" b="0" dirty="0" err="1">
+                <a:solidFill>
+                  <a:srgbClr val="FFFFFF"/>
+                </a:solidFill>
+                <a:latin typeface="Calibri"/>
+              </a:rPr>
+              <a:t>transparente</a:t>
+            </a:r>
+            <a:r>
+              <a:rPr sz="1300" b="0" dirty="0">
+                <a:solidFill>
+                  <a:srgbClr val="FFFFFF"/>
+                </a:solidFill>
+                <a:latin typeface="Calibri"/>
+              </a:rPr>
+              <a:t>, </a:t>
+            </a:r>
+            <a:r>
+              <a:rPr sz="1300" b="0" dirty="0" err="1">
+                <a:solidFill>
+                  <a:srgbClr val="FFFFFF"/>
+                </a:solidFill>
+                <a:latin typeface="Calibri"/>
+              </a:rPr>
+              <a:t>ponderacion</a:t>
+            </a:r>
+            <a:r>
+              <a:rPr sz="1300" b="0" dirty="0">
+                <a:solidFill>
+                  <a:srgbClr val="FFFFFF"/>
+                </a:solidFill>
+                <a:latin typeface="Calibri"/>
+              </a:rPr>
+              <a:t> </a:t>
+            </a:r>
+            <a:r>
+              <a:rPr sz="1300" b="0" dirty="0" err="1">
+                <a:solidFill>
+                  <a:srgbClr val="FFFFFF"/>
+                </a:solidFill>
+                <a:latin typeface="Calibri"/>
+              </a:rPr>
+              <a:t>por</a:t>
+            </a:r>
+            <a:r>
+              <a:rPr sz="1300" b="0" dirty="0">
+                <a:solidFill>
+                  <a:srgbClr val="FFFFFF"/>
+                </a:solidFill>
+                <a:latin typeface="Calibri"/>
+              </a:rPr>
+              <a:t> </a:t>
+            </a:r>
+            <a:r>
+              <a:rPr sz="1300" b="0" dirty="0" err="1">
+                <a:solidFill>
+                  <a:srgbClr val="FFFFFF"/>
+                </a:solidFill>
+                <a:latin typeface="Calibri"/>
+              </a:rPr>
+              <a:t>preferencias</a:t>
+            </a:r>
+            <a:r>
+              <a:rPr sz="1300" b="0" dirty="0">
+                <a:solidFill>
+                  <a:srgbClr val="FFFFFF"/>
+                </a:solidFill>
+                <a:latin typeface="Calibri"/>
+              </a:rPr>
+              <a:t> e </a:t>
+            </a:r>
+            <a:r>
+              <a:rPr sz="1300" b="0" dirty="0" err="1">
+                <a:solidFill>
+                  <a:srgbClr val="FFFFFF"/>
+                </a:solidFill>
+                <a:latin typeface="Calibri"/>
+              </a:rPr>
+              <a:t>indicador</a:t>
+            </a:r>
+            <a:r>
+              <a:rPr sz="1300" b="0" dirty="0">
+                <a:solidFill>
+                  <a:srgbClr val="FFFFFF"/>
+                </a:solidFill>
+                <a:latin typeface="Calibri"/>
+              </a:rPr>
+              <a:t> de confianza.</a:t>
             </a:r>
           </a:p>
         </p:txBody>
@@ -9568,6 +9602,7 @@
           <a:lstStyle/>
           <a:p>
             <a:pPr algn="ctr"/>
+            <a:endParaRPr/>
           </a:p>
         </p:txBody>
       </p:sp>
@@ -9716,6 +9751,7 @@
           <a:lstStyle/>
           <a:p>
             <a:pPr algn="ctr"/>
+            <a:endParaRPr/>
           </a:p>
         </p:txBody>
       </p:sp>
@@ -9864,6 +9900,7 @@
           <a:lstStyle/>
           <a:p>
             <a:pPr algn="ctr"/>
+            <a:endParaRPr/>
           </a:p>
         </p:txBody>
       </p:sp>
@@ -10012,6 +10049,7 @@
           <a:lstStyle/>
           <a:p>
             <a:pPr algn="ctr"/>
+            <a:endParaRPr/>
           </a:p>
         </p:txBody>
       </p:sp>
@@ -10160,6 +10198,7 @@
           <a:lstStyle/>
           <a:p>
             <a:pPr algn="ctr"/>
+            <a:endParaRPr/>
           </a:p>
         </p:txBody>
       </p:sp>
@@ -10308,6 +10347,7 @@
           <a:lstStyle/>
           <a:p>
             <a:pPr algn="ctr"/>
+            <a:endParaRPr/>
           </a:p>
         </p:txBody>
       </p:sp>
@@ -10456,6 +10496,7 @@
           <a:lstStyle/>
           <a:p>
             <a:pPr algn="ctr"/>
+            <a:endParaRPr/>
           </a:p>
         </p:txBody>
       </p:sp>
@@ -10573,7 +10614,7 @@
 </file>
 
 <file path=ppt/slides/slide14.xml><?xml version="1.0" encoding="utf-8"?>
-<p:sld xmlns:a="http://schemas.openxmlformats.org/drawingml/2006/main" xmlns:p="http://schemas.openxmlformats.org/presentationml/2006/main" xmlns:r="http://schemas.openxmlformats.org/officeDocument/2006/relationships">
+<p:sld xmlns:a="http://schemas.openxmlformats.org/drawingml/2006/main" xmlns:r="http://schemas.openxmlformats.org/officeDocument/2006/relationships" xmlns:p="http://schemas.openxmlformats.org/presentationml/2006/main">
   <p:cSld>
     <p:bg>
       <p:bgPr>
@@ -10589,7 +10630,14 @@
         <p:cNvGrpSpPr/>
         <p:nvPr/>
       </p:nvGrpSpPr>
-      <p:grpSpPr/>
+      <p:grpSpPr>
+        <a:xfrm>
+          <a:off x="0" y="0"/>
+          <a:ext cx="0" cy="0"/>
+          <a:chOff x="0" y="0"/>
+          <a:chExt cx="0" cy="0"/>
+        </a:xfrm>
+      </p:grpSpPr>
       <p:sp>
         <p:nvSpPr>
           <p:cNvPr id="2" name="Rectangle 1"/>
@@ -10630,6 +10678,7 @@
           <a:lstStyle/>
           <a:p>
             <a:pPr algn="ctr"/>
+            <a:endParaRPr/>
           </a:p>
         </p:txBody>
       </p:sp>
@@ -10778,6 +10827,7 @@
           <a:lstStyle/>
           <a:p>
             <a:pPr algn="ctr"/>
+            <a:endParaRPr/>
           </a:p>
         </p:txBody>
       </p:sp>
@@ -10891,6 +10941,7 @@
           <a:lstStyle/>
           <a:p>
             <a:pPr algn="ctr"/>
+            <a:endParaRPr/>
           </a:p>
         </p:txBody>
       </p:sp>
@@ -11006,6 +11057,7 @@
           <a:lstStyle/>
           <a:p>
             <a:pPr algn="ctr"/>
+            <a:endParaRPr/>
           </a:p>
         </p:txBody>
       </p:sp>
@@ -11119,6 +11171,7 @@
           <a:lstStyle/>
           <a:p>
             <a:pPr algn="ctr"/>
+            <a:endParaRPr/>
           </a:p>
         </p:txBody>
       </p:sp>
@@ -11234,6 +11287,7 @@
           <a:lstStyle/>
           <a:p>
             <a:pPr algn="ctr"/>
+            <a:endParaRPr/>
           </a:p>
         </p:txBody>
       </p:sp>
@@ -11347,6 +11401,7 @@
           <a:lstStyle/>
           <a:p>
             <a:pPr algn="ctr"/>
+            <a:endParaRPr/>
           </a:p>
         </p:txBody>
       </p:sp>
@@ -11462,6 +11517,7 @@
           <a:lstStyle/>
           <a:p>
             <a:pPr algn="ctr"/>
+            <a:endParaRPr/>
           </a:p>
         </p:txBody>
       </p:sp>
@@ -11575,6 +11631,7 @@
           <a:lstStyle/>
           <a:p>
             <a:pPr algn="ctr"/>
+            <a:endParaRPr/>
           </a:p>
         </p:txBody>
       </p:sp>
@@ -11659,7 +11716,7 @@
 </file>
 
 <file path=ppt/slides/slide15.xml><?xml version="1.0" encoding="utf-8"?>
-<p:sld xmlns:a="http://schemas.openxmlformats.org/drawingml/2006/main" xmlns:p="http://schemas.openxmlformats.org/presentationml/2006/main" xmlns:r="http://schemas.openxmlformats.org/officeDocument/2006/relationships">
+<p:sld xmlns:a="http://schemas.openxmlformats.org/drawingml/2006/main" xmlns:r="http://schemas.openxmlformats.org/officeDocument/2006/relationships" xmlns:p="http://schemas.openxmlformats.org/presentationml/2006/main">
   <p:cSld>
     <p:bg>
       <p:bgPr>
@@ -11675,7 +11732,14 @@
         <p:cNvGrpSpPr/>
         <p:nvPr/>
       </p:nvGrpSpPr>
-      <p:grpSpPr/>
+      <p:grpSpPr>
+        <a:xfrm>
+          <a:off x="0" y="0"/>
+          <a:ext cx="0" cy="0"/>
+          <a:chOff x="0" y="0"/>
+          <a:chExt cx="0" cy="0"/>
+        </a:xfrm>
+      </p:grpSpPr>
       <p:sp>
         <p:nvSpPr>
           <p:cNvPr id="2" name="Rectangle 1"/>
@@ -11716,6 +11780,7 @@
           <a:lstStyle/>
           <a:p>
             <a:pPr algn="ctr"/>
+            <a:endParaRPr/>
           </a:p>
         </p:txBody>
       </p:sp>
@@ -11829,6 +11894,7 @@
           <a:lstStyle/>
           <a:p>
             <a:pPr algn="ctr"/>
+            <a:endParaRPr/>
           </a:p>
         </p:txBody>
       </p:sp>
@@ -11907,6 +11973,7 @@
           <a:lstStyle/>
           <a:p>
             <a:pPr algn="ctr"/>
+            <a:endParaRPr/>
           </a:p>
         </p:txBody>
       </p:sp>
@@ -11987,6 +12054,7 @@
           <a:lstStyle/>
           <a:p>
             <a:pPr algn="ctr"/>
+            <a:endParaRPr/>
           </a:p>
         </p:txBody>
       </p:sp>
@@ -12065,6 +12133,7 @@
           <a:lstStyle/>
           <a:p>
             <a:pPr algn="ctr"/>
+            <a:endParaRPr/>
           </a:p>
         </p:txBody>
       </p:sp>
@@ -12145,6 +12214,7 @@
           <a:lstStyle/>
           <a:p>
             <a:pPr algn="ctr"/>
+            <a:endParaRPr/>
           </a:p>
         </p:txBody>
       </p:sp>
@@ -12223,6 +12293,7 @@
           <a:lstStyle/>
           <a:p>
             <a:pPr algn="ctr"/>
+            <a:endParaRPr/>
           </a:p>
         </p:txBody>
       </p:sp>
@@ -12303,6 +12374,7 @@
           <a:lstStyle/>
           <a:p>
             <a:pPr algn="ctr"/>
+            <a:endParaRPr/>
           </a:p>
         </p:txBody>
       </p:sp>
@@ -12381,6 +12453,7 @@
           <a:lstStyle/>
           <a:p>
             <a:pPr algn="ctr"/>
+            <a:endParaRPr/>
           </a:p>
         </p:txBody>
       </p:sp>
@@ -12430,7 +12503,7 @@
 </file>
 
 <file path=ppt/slides/slide16.xml><?xml version="1.0" encoding="utf-8"?>
-<p:sld xmlns:a="http://schemas.openxmlformats.org/drawingml/2006/main" xmlns:p="http://schemas.openxmlformats.org/presentationml/2006/main" xmlns:r="http://schemas.openxmlformats.org/officeDocument/2006/relationships">
+<p:sld xmlns:a="http://schemas.openxmlformats.org/drawingml/2006/main" xmlns:r="http://schemas.openxmlformats.org/officeDocument/2006/relationships" xmlns:p="http://schemas.openxmlformats.org/presentationml/2006/main">
   <p:cSld>
     <p:bg>
       <p:bgPr>
@@ -12446,7 +12519,14 @@
         <p:cNvGrpSpPr/>
         <p:nvPr/>
       </p:nvGrpSpPr>
-      <p:grpSpPr/>
+      <p:grpSpPr>
+        <a:xfrm>
+          <a:off x="0" y="0"/>
+          <a:ext cx="0" cy="0"/>
+          <a:chOff x="0" y="0"/>
+          <a:chExt cx="0" cy="0"/>
+        </a:xfrm>
+      </p:grpSpPr>
       <p:sp>
         <p:nvSpPr>
           <p:cNvPr id="2" name="Rectangle 1"/>
@@ -12487,6 +12567,7 @@
           <a:lstStyle/>
           <a:p>
             <a:pPr algn="ctr"/>
+            <a:endParaRPr/>
           </a:p>
         </p:txBody>
       </p:sp>
@@ -12600,6 +12681,7 @@
           <a:lstStyle/>
           <a:p>
             <a:pPr algn="ctr"/>
+            <a:endParaRPr/>
           </a:p>
         </p:txBody>
       </p:sp>
@@ -12678,6 +12760,7 @@
           <a:lstStyle/>
           <a:p>
             <a:pPr algn="ctr"/>
+            <a:endParaRPr/>
           </a:p>
         </p:txBody>
       </p:sp>
@@ -12756,6 +12839,7 @@
           <a:lstStyle/>
           <a:p>
             <a:pPr algn="ctr"/>
+            <a:endParaRPr/>
           </a:p>
         </p:txBody>
       </p:sp>
@@ -12834,6 +12918,7 @@
           <a:lstStyle/>
           <a:p>
             <a:pPr algn="ctr"/>
+            <a:endParaRPr/>
           </a:p>
         </p:txBody>
       </p:sp>
@@ -12912,6 +12997,7 @@
           <a:lstStyle/>
           <a:p>
             <a:pPr algn="ctr"/>
+            <a:endParaRPr/>
           </a:p>
         </p:txBody>
       </p:sp>
@@ -12990,6 +13076,7 @@
           <a:lstStyle/>
           <a:p>
             <a:pPr algn="ctr"/>
+            <a:endParaRPr/>
           </a:p>
         </p:txBody>
       </p:sp>
@@ -13068,6 +13155,7 @@
           <a:lstStyle/>
           <a:p>
             <a:pPr algn="ctr"/>
+            <a:endParaRPr/>
           </a:p>
         </p:txBody>
       </p:sp>
@@ -13146,6 +13234,7 @@
           <a:lstStyle/>
           <a:p>
             <a:pPr algn="ctr"/>
+            <a:endParaRPr/>
           </a:p>
         </p:txBody>
       </p:sp>
@@ -13224,6 +13313,7 @@
           <a:lstStyle/>
           <a:p>
             <a:pPr algn="ctr"/>
+            <a:endParaRPr/>
           </a:p>
         </p:txBody>
       </p:sp>
@@ -13302,6 +13392,7 @@
           <a:lstStyle/>
           <a:p>
             <a:pPr algn="ctr"/>
+            <a:endParaRPr/>
           </a:p>
         </p:txBody>
       </p:sp>
@@ -13380,6 +13471,7 @@
           <a:lstStyle/>
           <a:p>
             <a:pPr algn="ctr"/>
+            <a:endParaRPr/>
           </a:p>
         </p:txBody>
       </p:sp>
@@ -13458,6 +13550,7 @@
           <a:lstStyle/>
           <a:p>
             <a:pPr algn="ctr"/>
+            <a:endParaRPr/>
           </a:p>
         </p:txBody>
       </p:sp>
@@ -13536,6 +13629,7 @@
           <a:lstStyle/>
           <a:p>
             <a:pPr algn="ctr"/>
+            <a:endParaRPr/>
           </a:p>
         </p:txBody>
       </p:sp>
@@ -13614,6 +13708,7 @@
           <a:lstStyle/>
           <a:p>
             <a:pPr algn="ctr"/>
+            <a:endParaRPr/>
           </a:p>
         </p:txBody>
       </p:sp>
@@ -13692,6 +13787,7 @@
           <a:lstStyle/>
           <a:p>
             <a:pPr algn="ctr"/>
+            <a:endParaRPr/>
           </a:p>
         </p:txBody>
       </p:sp>
@@ -13770,6 +13866,7 @@
           <a:lstStyle/>
           <a:p>
             <a:pPr algn="ctr"/>
+            <a:endParaRPr/>
           </a:p>
         </p:txBody>
       </p:sp>
@@ -13848,6 +13945,7 @@
           <a:lstStyle/>
           <a:p>
             <a:pPr algn="ctr"/>
+            <a:endParaRPr/>
           </a:p>
         </p:txBody>
       </p:sp>
@@ -13926,6 +14024,7 @@
           <a:lstStyle/>
           <a:p>
             <a:pPr algn="ctr"/>
+            <a:endParaRPr/>
           </a:p>
         </p:txBody>
       </p:sp>
@@ -14004,6 +14103,7 @@
           <a:lstStyle/>
           <a:p>
             <a:pPr algn="ctr"/>
+            <a:endParaRPr/>
           </a:p>
         </p:txBody>
       </p:sp>
@@ -14082,6 +14182,7 @@
           <a:lstStyle/>
           <a:p>
             <a:pPr algn="ctr"/>
+            <a:endParaRPr/>
           </a:p>
         </p:txBody>
       </p:sp>
@@ -14160,6 +14261,7 @@
           <a:lstStyle/>
           <a:p>
             <a:pPr algn="ctr"/>
+            <a:endParaRPr/>
           </a:p>
         </p:txBody>
       </p:sp>
@@ -14238,6 +14340,7 @@
           <a:lstStyle/>
           <a:p>
             <a:pPr algn="ctr"/>
+            <a:endParaRPr/>
           </a:p>
         </p:txBody>
       </p:sp>
@@ -14316,6 +14419,7 @@
           <a:lstStyle/>
           <a:p>
             <a:pPr algn="ctr"/>
+            <a:endParaRPr/>
           </a:p>
         </p:txBody>
       </p:sp>
@@ -14394,6 +14498,7 @@
           <a:lstStyle/>
           <a:p>
             <a:pPr algn="ctr"/>
+            <a:endParaRPr/>
           </a:p>
         </p:txBody>
       </p:sp>
@@ -14472,6 +14577,7 @@
           <a:lstStyle/>
           <a:p>
             <a:pPr algn="ctr"/>
+            <a:endParaRPr/>
           </a:p>
         </p:txBody>
       </p:sp>
@@ -14550,6 +14656,7 @@
           <a:lstStyle/>
           <a:p>
             <a:pPr algn="ctr"/>
+            <a:endParaRPr/>
           </a:p>
         </p:txBody>
       </p:sp>
@@ -14628,6 +14735,7 @@
           <a:lstStyle/>
           <a:p>
             <a:pPr algn="ctr"/>
+            <a:endParaRPr/>
           </a:p>
         </p:txBody>
       </p:sp>
@@ -14706,6 +14814,7 @@
           <a:lstStyle/>
           <a:p>
             <a:pPr algn="ctr"/>
+            <a:endParaRPr/>
           </a:p>
         </p:txBody>
       </p:sp>
@@ -14784,6 +14893,7 @@
           <a:lstStyle/>
           <a:p>
             <a:pPr algn="ctr"/>
+            <a:endParaRPr/>
           </a:p>
         </p:txBody>
       </p:sp>
@@ -14862,6 +14972,7 @@
           <a:lstStyle/>
           <a:p>
             <a:pPr algn="ctr"/>
+            <a:endParaRPr/>
           </a:p>
         </p:txBody>
       </p:sp>
@@ -14940,6 +15051,7 @@
           <a:lstStyle/>
           <a:p>
             <a:pPr algn="ctr"/>
+            <a:endParaRPr/>
           </a:p>
         </p:txBody>
       </p:sp>
@@ -15018,6 +15130,7 @@
           <a:lstStyle/>
           <a:p>
             <a:pPr algn="ctr"/>
+            <a:endParaRPr/>
           </a:p>
         </p:txBody>
       </p:sp>
@@ -15096,6 +15209,7 @@
           <a:lstStyle/>
           <a:p>
             <a:pPr algn="ctr"/>
+            <a:endParaRPr/>
           </a:p>
         </p:txBody>
       </p:sp>
@@ -15174,6 +15288,7 @@
           <a:lstStyle/>
           <a:p>
             <a:pPr algn="ctr"/>
+            <a:endParaRPr/>
           </a:p>
         </p:txBody>
       </p:sp>
@@ -15252,6 +15367,7 @@
           <a:lstStyle/>
           <a:p>
             <a:pPr algn="ctr"/>
+            <a:endParaRPr/>
           </a:p>
         </p:txBody>
       </p:sp>
@@ -15330,6 +15446,7 @@
           <a:lstStyle/>
           <a:p>
             <a:pPr algn="ctr"/>
+            <a:endParaRPr/>
           </a:p>
         </p:txBody>
       </p:sp>
@@ -15408,6 +15525,7 @@
           <a:lstStyle/>
           <a:p>
             <a:pPr algn="ctr"/>
+            <a:endParaRPr/>
           </a:p>
         </p:txBody>
       </p:sp>
@@ -15486,6 +15604,7 @@
           <a:lstStyle/>
           <a:p>
             <a:pPr algn="ctr"/>
+            <a:endParaRPr/>
           </a:p>
         </p:txBody>
       </p:sp>
@@ -15564,6 +15683,7 @@
           <a:lstStyle/>
           <a:p>
             <a:pPr algn="ctr"/>
+            <a:endParaRPr/>
           </a:p>
         </p:txBody>
       </p:sp>
@@ -15642,6 +15762,7 @@
           <a:lstStyle/>
           <a:p>
             <a:pPr algn="ctr"/>
+            <a:endParaRPr/>
           </a:p>
         </p:txBody>
       </p:sp>
@@ -15720,6 +15841,7 @@
           <a:lstStyle/>
           <a:p>
             <a:pPr algn="ctr"/>
+            <a:endParaRPr/>
           </a:p>
         </p:txBody>
       </p:sp>
@@ -15798,6 +15920,7 @@
           <a:lstStyle/>
           <a:p>
             <a:pPr algn="ctr"/>
+            <a:endParaRPr/>
           </a:p>
         </p:txBody>
       </p:sp>
@@ -15876,6 +15999,7 @@
           <a:lstStyle/>
           <a:p>
             <a:pPr algn="ctr"/>
+            <a:endParaRPr/>
           </a:p>
         </p:txBody>
       </p:sp>
@@ -15954,6 +16078,7 @@
           <a:lstStyle/>
           <a:p>
             <a:pPr algn="ctr"/>
+            <a:endParaRPr/>
           </a:p>
         </p:txBody>
       </p:sp>
@@ -16032,6 +16157,7 @@
           <a:lstStyle/>
           <a:p>
             <a:pPr algn="ctr"/>
+            <a:endParaRPr/>
           </a:p>
         </p:txBody>
       </p:sp>
@@ -16114,7 +16240,7 @@
 </file>
 
 <file path=ppt/slides/slide17.xml><?xml version="1.0" encoding="utf-8"?>
-<p:sld xmlns:a="http://schemas.openxmlformats.org/drawingml/2006/main" xmlns:p="http://schemas.openxmlformats.org/presentationml/2006/main" xmlns:r="http://schemas.openxmlformats.org/officeDocument/2006/relationships">
+<p:sld xmlns:a="http://schemas.openxmlformats.org/drawingml/2006/main" xmlns:r="http://schemas.openxmlformats.org/officeDocument/2006/relationships" xmlns:p="http://schemas.openxmlformats.org/presentationml/2006/main">
   <p:cSld>
     <p:bg>
       <p:bgPr>
@@ -16130,7 +16256,14 @@
         <p:cNvGrpSpPr/>
         <p:nvPr/>
       </p:nvGrpSpPr>
-      <p:grpSpPr/>
+      <p:grpSpPr>
+        <a:xfrm>
+          <a:off x="0" y="0"/>
+          <a:ext cx="0" cy="0"/>
+          <a:chOff x="0" y="0"/>
+          <a:chExt cx="0" cy="0"/>
+        </a:xfrm>
+      </p:grpSpPr>
       <p:sp>
         <p:nvSpPr>
           <p:cNvPr id="2" name="Rectangle 1"/>
@@ -16171,6 +16304,7 @@
           <a:lstStyle/>
           <a:p>
             <a:pPr algn="ctr"/>
+            <a:endParaRPr/>
           </a:p>
         </p:txBody>
       </p:sp>
@@ -16284,6 +16418,7 @@
           <a:lstStyle/>
           <a:p>
             <a:pPr algn="ctr"/>
+            <a:endParaRPr/>
           </a:p>
         </p:txBody>
       </p:sp>
@@ -16362,6 +16497,7 @@
           <a:lstStyle/>
           <a:p>
             <a:pPr algn="ctr"/>
+            <a:endParaRPr/>
           </a:p>
         </p:txBody>
       </p:sp>
@@ -16477,6 +16613,7 @@
           <a:lstStyle/>
           <a:p>
             <a:pPr algn="ctr"/>
+            <a:endParaRPr/>
           </a:p>
         </p:txBody>
       </p:sp>
@@ -16555,6 +16692,7 @@
           <a:lstStyle/>
           <a:p>
             <a:pPr algn="ctr"/>
+            <a:endParaRPr/>
           </a:p>
         </p:txBody>
       </p:sp>
@@ -16670,6 +16808,7 @@
           <a:lstStyle/>
           <a:p>
             <a:pPr algn="ctr"/>
+            <a:endParaRPr/>
           </a:p>
         </p:txBody>
       </p:sp>
@@ -16748,6 +16887,7 @@
           <a:lstStyle/>
           <a:p>
             <a:pPr algn="ctr"/>
+            <a:endParaRPr/>
           </a:p>
         </p:txBody>
       </p:sp>
@@ -16863,6 +17003,7 @@
           <a:lstStyle/>
           <a:p>
             <a:pPr algn="ctr"/>
+            <a:endParaRPr/>
           </a:p>
         </p:txBody>
       </p:sp>
@@ -16910,7 +17051,7 @@
 </file>
 
 <file path=ppt/slides/slide18.xml><?xml version="1.0" encoding="utf-8"?>
-<p:sld xmlns:a="http://schemas.openxmlformats.org/drawingml/2006/main" xmlns:p="http://schemas.openxmlformats.org/presentationml/2006/main" xmlns:r="http://schemas.openxmlformats.org/officeDocument/2006/relationships">
+<p:sld xmlns:a="http://schemas.openxmlformats.org/drawingml/2006/main" xmlns:r="http://schemas.openxmlformats.org/officeDocument/2006/relationships" xmlns:p="http://schemas.openxmlformats.org/presentationml/2006/main">
   <p:cSld>
     <p:bg>
       <p:bgPr>
@@ -16926,7 +17067,14 @@
         <p:cNvGrpSpPr/>
         <p:nvPr/>
       </p:nvGrpSpPr>
-      <p:grpSpPr/>
+      <p:grpSpPr>
+        <a:xfrm>
+          <a:off x="0" y="0"/>
+          <a:ext cx="0" cy="0"/>
+          <a:chOff x="0" y="0"/>
+          <a:chExt cx="0" cy="0"/>
+        </a:xfrm>
+      </p:grpSpPr>
       <p:sp>
         <p:nvSpPr>
           <p:cNvPr id="2" name="Rectangle 1"/>
@@ -16967,6 +17115,7 @@
           <a:lstStyle/>
           <a:p>
             <a:pPr algn="ctr"/>
+            <a:endParaRPr/>
           </a:p>
         </p:txBody>
       </p:sp>
@@ -17115,6 +17264,7 @@
           <a:lstStyle/>
           <a:p>
             <a:pPr algn="ctr"/>
+            <a:endParaRPr/>
           </a:p>
         </p:txBody>
       </p:sp>
@@ -17193,6 +17343,7 @@
           <a:lstStyle/>
           <a:p>
             <a:pPr algn="ctr"/>
+            <a:endParaRPr/>
           </a:p>
         </p:txBody>
       </p:sp>
@@ -17308,6 +17459,7 @@
           <a:lstStyle/>
           <a:p>
             <a:pPr algn="ctr"/>
+            <a:endParaRPr/>
           </a:p>
         </p:txBody>
       </p:sp>
@@ -17386,6 +17538,7 @@
           <a:lstStyle/>
           <a:p>
             <a:pPr algn="ctr"/>
+            <a:endParaRPr/>
           </a:p>
         </p:txBody>
       </p:sp>
@@ -17501,6 +17654,7 @@
           <a:lstStyle/>
           <a:p>
             <a:pPr algn="ctr"/>
+            <a:endParaRPr/>
           </a:p>
         </p:txBody>
       </p:sp>
@@ -17579,6 +17733,7 @@
           <a:lstStyle/>
           <a:p>
             <a:pPr algn="ctr"/>
+            <a:endParaRPr/>
           </a:p>
         </p:txBody>
       </p:sp>
@@ -17659,6 +17814,7 @@
           <a:lstStyle/>
           <a:p>
             <a:pPr algn="ctr"/>
+            <a:endParaRPr/>
           </a:p>
         </p:txBody>
       </p:sp>
@@ -17737,6 +17893,7 @@
           <a:lstStyle/>
           <a:p>
             <a:pPr algn="ctr"/>
+            <a:endParaRPr/>
           </a:p>
         </p:txBody>
       </p:sp>
@@ -17817,6 +17974,7 @@
           <a:lstStyle/>
           <a:p>
             <a:pPr algn="ctr"/>
+            <a:endParaRPr/>
           </a:p>
         </p:txBody>
       </p:sp>
@@ -17864,7 +18022,7 @@
 </file>
 
 <file path=ppt/slides/slide19.xml><?xml version="1.0" encoding="utf-8"?>
-<p:sld xmlns:a="http://schemas.openxmlformats.org/drawingml/2006/main" xmlns:p="http://schemas.openxmlformats.org/presentationml/2006/main" xmlns:r="http://schemas.openxmlformats.org/officeDocument/2006/relationships">
+<p:sld xmlns:a="http://schemas.openxmlformats.org/drawingml/2006/main" xmlns:r="http://schemas.openxmlformats.org/officeDocument/2006/relationships" xmlns:p="http://schemas.openxmlformats.org/presentationml/2006/main">
   <p:cSld>
     <p:bg>
       <p:bgPr>
@@ -17880,7 +18038,14 @@
         <p:cNvGrpSpPr/>
         <p:nvPr/>
       </p:nvGrpSpPr>
-      <p:grpSpPr/>
+      <p:grpSpPr>
+        <a:xfrm>
+          <a:off x="0" y="0"/>
+          <a:ext cx="0" cy="0"/>
+          <a:chOff x="0" y="0"/>
+          <a:chExt cx="0" cy="0"/>
+        </a:xfrm>
+      </p:grpSpPr>
       <p:sp>
         <p:nvSpPr>
           <p:cNvPr id="2" name="Rectangle 1"/>
@@ -17921,6 +18086,7 @@
           <a:lstStyle/>
           <a:p>
             <a:pPr algn="ctr"/>
+            <a:endParaRPr/>
           </a:p>
         </p:txBody>
       </p:sp>
@@ -18034,6 +18200,7 @@
           <a:lstStyle/>
           <a:p>
             <a:pPr algn="ctr"/>
+            <a:endParaRPr/>
           </a:p>
         </p:txBody>
       </p:sp>
@@ -18112,6 +18279,7 @@
           <a:lstStyle/>
           <a:p>
             <a:pPr algn="ctr"/>
+            <a:endParaRPr/>
           </a:p>
         </p:txBody>
       </p:sp>
@@ -18192,6 +18360,7 @@
           <a:lstStyle/>
           <a:p>
             <a:pPr algn="ctr"/>
+            <a:endParaRPr/>
           </a:p>
         </p:txBody>
       </p:sp>
@@ -18270,6 +18439,7 @@
           <a:lstStyle/>
           <a:p>
             <a:pPr algn="ctr"/>
+            <a:endParaRPr/>
           </a:p>
         </p:txBody>
       </p:sp>
@@ -18350,6 +18520,7 @@
           <a:lstStyle/>
           <a:p>
             <a:pPr algn="ctr"/>
+            <a:endParaRPr/>
           </a:p>
         </p:txBody>
       </p:sp>
@@ -18428,6 +18599,7 @@
           <a:lstStyle/>
           <a:p>
             <a:pPr algn="ctr"/>
+            <a:endParaRPr/>
           </a:p>
         </p:txBody>
       </p:sp>
@@ -18508,6 +18680,7 @@
           <a:lstStyle/>
           <a:p>
             <a:pPr algn="ctr"/>
+            <a:endParaRPr/>
           </a:p>
         </p:txBody>
       </p:sp>
@@ -18586,6 +18759,7 @@
           <a:lstStyle/>
           <a:p>
             <a:pPr algn="ctr"/>
+            <a:endParaRPr/>
           </a:p>
         </p:txBody>
       </p:sp>
@@ -18635,7 +18809,7 @@
 </file>
 
 <file path=ppt/slides/slide2.xml><?xml version="1.0" encoding="utf-8"?>
-<p:sld xmlns:a="http://schemas.openxmlformats.org/drawingml/2006/main" xmlns:p="http://schemas.openxmlformats.org/presentationml/2006/main" xmlns:r="http://schemas.openxmlformats.org/officeDocument/2006/relationships">
+<p:sld xmlns:a="http://schemas.openxmlformats.org/drawingml/2006/main" xmlns:r="http://schemas.openxmlformats.org/officeDocument/2006/relationships" xmlns:p="http://schemas.openxmlformats.org/presentationml/2006/main">
   <p:cSld>
     <p:bg>
       <p:bgPr>
@@ -18651,7 +18825,14 @@
         <p:cNvGrpSpPr/>
         <p:nvPr/>
       </p:nvGrpSpPr>
-      <p:grpSpPr/>
+      <p:grpSpPr>
+        <a:xfrm>
+          <a:off x="0" y="0"/>
+          <a:ext cx="0" cy="0"/>
+          <a:chOff x="0" y="0"/>
+          <a:chExt cx="0" cy="0"/>
+        </a:xfrm>
+      </p:grpSpPr>
       <p:sp>
         <p:nvSpPr>
           <p:cNvPr id="2" name="Rectangle 1"/>
@@ -18692,6 +18873,7 @@
           <a:lstStyle/>
           <a:p>
             <a:pPr algn="ctr"/>
+            <a:endParaRPr/>
           </a:p>
         </p:txBody>
       </p:sp>
@@ -18805,6 +18987,7 @@
           <a:lstStyle/>
           <a:p>
             <a:pPr algn="ctr"/>
+            <a:endParaRPr/>
           </a:p>
         </p:txBody>
       </p:sp>
@@ -18918,6 +19101,7 @@
           <a:lstStyle/>
           <a:p>
             <a:pPr algn="ctr"/>
+            <a:endParaRPr/>
           </a:p>
         </p:txBody>
       </p:sp>
@@ -18999,6 +19183,7 @@
           <a:lstStyle/>
           <a:p>
             <a:pPr algn="ctr"/>
+            <a:endParaRPr/>
           </a:p>
         </p:txBody>
       </p:sp>
@@ -19112,6 +19297,7 @@
           <a:lstStyle/>
           <a:p>
             <a:pPr algn="ctr"/>
+            <a:endParaRPr/>
           </a:p>
         </p:txBody>
       </p:sp>
@@ -19193,6 +19379,7 @@
           <a:lstStyle/>
           <a:p>
             <a:pPr algn="ctr"/>
+            <a:endParaRPr/>
           </a:p>
         </p:txBody>
       </p:sp>
@@ -19306,6 +19493,7 @@
           <a:lstStyle/>
           <a:p>
             <a:pPr algn="ctr"/>
+            <a:endParaRPr/>
           </a:p>
         </p:txBody>
       </p:sp>
@@ -19356,7 +19544,7 @@
 </file>
 
 <file path=ppt/slides/slide20.xml><?xml version="1.0" encoding="utf-8"?>
-<p:sld xmlns:a="http://schemas.openxmlformats.org/drawingml/2006/main" xmlns:p="http://schemas.openxmlformats.org/presentationml/2006/main" xmlns:r="http://schemas.openxmlformats.org/officeDocument/2006/relationships">
+<p:sld xmlns:a="http://schemas.openxmlformats.org/drawingml/2006/main" xmlns:r="http://schemas.openxmlformats.org/officeDocument/2006/relationships" xmlns:p="http://schemas.openxmlformats.org/presentationml/2006/main">
   <p:cSld>
     <p:bg>
       <p:bgPr>
@@ -19372,7 +19560,14 @@
         <p:cNvGrpSpPr/>
         <p:nvPr/>
       </p:nvGrpSpPr>
-      <p:grpSpPr/>
+      <p:grpSpPr>
+        <a:xfrm>
+          <a:off x="0" y="0"/>
+          <a:ext cx="0" cy="0"/>
+          <a:chOff x="0" y="0"/>
+          <a:chExt cx="0" cy="0"/>
+        </a:xfrm>
+      </p:grpSpPr>
       <p:sp>
         <p:nvSpPr>
           <p:cNvPr id="2" name="Rectangle 1"/>
@@ -19413,6 +19608,7 @@
           <a:lstStyle/>
           <a:p>
             <a:pPr algn="ctr"/>
+            <a:endParaRPr/>
           </a:p>
         </p:txBody>
       </p:sp>
@@ -19526,6 +19722,7 @@
           <a:lstStyle/>
           <a:p>
             <a:pPr algn="ctr"/>
+            <a:endParaRPr/>
           </a:p>
         </p:txBody>
       </p:sp>
@@ -19569,6 +19766,7 @@
           <a:lstStyle/>
           <a:p>
             <a:pPr algn="ctr"/>
+            <a:endParaRPr/>
           </a:p>
         </p:txBody>
       </p:sp>
@@ -19683,6 +19881,7 @@
           <a:lstStyle/>
           <a:p>
             <a:pPr algn="ctr"/>
+            <a:endParaRPr/>
           </a:p>
         </p:txBody>
       </p:sp>
@@ -19763,6 +19962,7 @@
           <a:lstStyle/>
           <a:p>
             <a:pPr algn="ctr"/>
+            <a:endParaRPr/>
           </a:p>
         </p:txBody>
       </p:sp>
@@ -19806,6 +20006,7 @@
           <a:lstStyle/>
           <a:p>
             <a:pPr algn="ctr"/>
+            <a:endParaRPr/>
           </a:p>
         </p:txBody>
       </p:sp>
@@ -19920,6 +20121,7 @@
           <a:lstStyle/>
           <a:p>
             <a:pPr algn="ctr"/>
+            <a:endParaRPr/>
           </a:p>
         </p:txBody>
       </p:sp>
@@ -20000,6 +20202,7 @@
           <a:lstStyle/>
           <a:p>
             <a:pPr algn="ctr"/>
+            <a:endParaRPr/>
           </a:p>
         </p:txBody>
       </p:sp>
@@ -20043,6 +20246,7 @@
           <a:lstStyle/>
           <a:p>
             <a:pPr algn="ctr"/>
+            <a:endParaRPr/>
           </a:p>
         </p:txBody>
       </p:sp>
@@ -20157,6 +20361,7 @@
           <a:lstStyle/>
           <a:p>
             <a:pPr algn="ctr"/>
+            <a:endParaRPr/>
           </a:p>
         </p:txBody>
       </p:sp>
@@ -20237,6 +20442,7 @@
           <a:lstStyle/>
           <a:p>
             <a:pPr algn="ctr"/>
+            <a:endParaRPr/>
           </a:p>
         </p:txBody>
       </p:sp>
@@ -20280,6 +20486,7 @@
           <a:lstStyle/>
           <a:p>
             <a:pPr algn="ctr"/>
+            <a:endParaRPr/>
           </a:p>
         </p:txBody>
       </p:sp>
@@ -20394,6 +20601,7 @@
           <a:lstStyle/>
           <a:p>
             <a:pPr algn="ctr"/>
+            <a:endParaRPr/>
           </a:p>
         </p:txBody>
       </p:sp>
@@ -20443,7 +20651,7 @@
 </file>
 
 <file path=ppt/slides/slide21.xml><?xml version="1.0" encoding="utf-8"?>
-<p:sld xmlns:a="http://schemas.openxmlformats.org/drawingml/2006/main" xmlns:p="http://schemas.openxmlformats.org/presentationml/2006/main" xmlns:r="http://schemas.openxmlformats.org/officeDocument/2006/relationships">
+<p:sld xmlns:a="http://schemas.openxmlformats.org/drawingml/2006/main" xmlns:r="http://schemas.openxmlformats.org/officeDocument/2006/relationships" xmlns:p="http://schemas.openxmlformats.org/presentationml/2006/main">
   <p:cSld>
     <p:bg>
       <p:bgPr>
@@ -20459,7 +20667,14 @@
         <p:cNvGrpSpPr/>
         <p:nvPr/>
       </p:nvGrpSpPr>
-      <p:grpSpPr/>
+      <p:grpSpPr>
+        <a:xfrm>
+          <a:off x="0" y="0"/>
+          <a:ext cx="0" cy="0"/>
+          <a:chOff x="0" y="0"/>
+          <a:chExt cx="0" cy="0"/>
+        </a:xfrm>
+      </p:grpSpPr>
       <p:sp>
         <p:nvSpPr>
           <p:cNvPr id="2" name="Rectangle 1"/>
@@ -20500,6 +20715,7 @@
           <a:lstStyle/>
           <a:p>
             <a:pPr algn="ctr"/>
+            <a:endParaRPr/>
           </a:p>
         </p:txBody>
       </p:sp>
@@ -20648,6 +20864,7 @@
           <a:lstStyle/>
           <a:p>
             <a:pPr algn="ctr"/>
+            <a:endParaRPr/>
           </a:p>
         </p:txBody>
       </p:sp>
@@ -20796,6 +21013,7 @@
           <a:lstStyle/>
           <a:p>
             <a:pPr algn="ctr"/>
+            <a:endParaRPr/>
           </a:p>
         </p:txBody>
       </p:sp>
@@ -20944,6 +21162,7 @@
           <a:lstStyle/>
           <a:p>
             <a:pPr algn="ctr"/>
+            <a:endParaRPr/>
           </a:p>
         </p:txBody>
       </p:sp>
@@ -21092,6 +21311,7 @@
           <a:lstStyle/>
           <a:p>
             <a:pPr algn="ctr"/>
+            <a:endParaRPr/>
           </a:p>
         </p:txBody>
       </p:sp>
@@ -21240,6 +21460,7 @@
           <a:lstStyle/>
           <a:p>
             <a:pPr algn="ctr"/>
+            <a:endParaRPr/>
           </a:p>
         </p:txBody>
       </p:sp>
@@ -21388,6 +21609,7 @@
           <a:lstStyle/>
           <a:p>
             <a:pPr algn="ctr"/>
+            <a:endParaRPr/>
           </a:p>
         </p:txBody>
       </p:sp>
@@ -21571,6 +21793,7 @@
           <a:lstStyle/>
           <a:p>
             <a:pPr algn="ctr"/>
+            <a:endParaRPr/>
           </a:p>
         </p:txBody>
       </p:sp>
@@ -21685,6 +21908,7 @@
           <a:lstStyle/>
           <a:p>
             <a:pPr algn="ctr"/>
+            <a:endParaRPr/>
           </a:p>
         </p:txBody>
       </p:sp>
@@ -21768,7 +21992,7 @@
 </file>
 
 <file path=ppt/slides/slide22.xml><?xml version="1.0" encoding="utf-8"?>
-<p:sld xmlns:a="http://schemas.openxmlformats.org/drawingml/2006/main" xmlns:p="http://schemas.openxmlformats.org/presentationml/2006/main" xmlns:r="http://schemas.openxmlformats.org/officeDocument/2006/relationships">
+<p:sld xmlns:a="http://schemas.openxmlformats.org/drawingml/2006/main" xmlns:r="http://schemas.openxmlformats.org/officeDocument/2006/relationships" xmlns:p="http://schemas.openxmlformats.org/presentationml/2006/main">
   <p:cSld>
     <p:bg>
       <p:bgPr>
@@ -21784,7 +22008,14 @@
         <p:cNvGrpSpPr/>
         <p:nvPr/>
       </p:nvGrpSpPr>
-      <p:grpSpPr/>
+      <p:grpSpPr>
+        <a:xfrm>
+          <a:off x="0" y="0"/>
+          <a:ext cx="0" cy="0"/>
+          <a:chOff x="0" y="0"/>
+          <a:chExt cx="0" cy="0"/>
+        </a:xfrm>
+      </p:grpSpPr>
       <p:sp>
         <p:nvSpPr>
           <p:cNvPr id="2" name="Rectangle 1"/>
@@ -21825,6 +22056,7 @@
           <a:lstStyle/>
           <a:p>
             <a:pPr algn="ctr"/>
+            <a:endParaRPr/>
           </a:p>
         </p:txBody>
       </p:sp>
@@ -21938,6 +22170,7 @@
           <a:lstStyle/>
           <a:p>
             <a:pPr algn="ctr"/>
+            <a:endParaRPr/>
           </a:p>
         </p:txBody>
       </p:sp>
@@ -22087,6 +22320,7 @@
           <a:lstStyle/>
           <a:p>
             <a:pPr algn="ctr"/>
+            <a:endParaRPr/>
           </a:p>
         </p:txBody>
       </p:sp>
@@ -22236,6 +22470,7 @@
           <a:lstStyle/>
           <a:p>
             <a:pPr algn="ctr"/>
+            <a:endParaRPr/>
           </a:p>
         </p:txBody>
       </p:sp>
@@ -22385,6 +22620,7 @@
           <a:lstStyle/>
           <a:p>
             <a:pPr algn="ctr"/>
+            <a:endParaRPr/>
           </a:p>
         </p:txBody>
       </p:sp>
@@ -22534,6 +22770,7 @@
           <a:lstStyle/>
           <a:p>
             <a:pPr algn="ctr"/>
+            <a:endParaRPr/>
           </a:p>
         </p:txBody>
       </p:sp>
@@ -22683,6 +22920,7 @@
           <a:lstStyle/>
           <a:p>
             <a:pPr algn="ctr"/>
+            <a:endParaRPr/>
           </a:p>
         </p:txBody>
       </p:sp>
@@ -22801,7 +23039,7 @@
 </file>
 
 <file path=ppt/slides/slide23.xml><?xml version="1.0" encoding="utf-8"?>
-<p:sld xmlns:a="http://schemas.openxmlformats.org/drawingml/2006/main" xmlns:p="http://schemas.openxmlformats.org/presentationml/2006/main" xmlns:r="http://schemas.openxmlformats.org/officeDocument/2006/relationships">
+<p:sld xmlns:a="http://schemas.openxmlformats.org/drawingml/2006/main" xmlns:r="http://schemas.openxmlformats.org/officeDocument/2006/relationships" xmlns:p="http://schemas.openxmlformats.org/presentationml/2006/main">
   <p:cSld>
     <p:bg>
       <p:bgPr>
@@ -22817,7 +23055,14 @@
         <p:cNvGrpSpPr/>
         <p:nvPr/>
       </p:nvGrpSpPr>
-      <p:grpSpPr/>
+      <p:grpSpPr>
+        <a:xfrm>
+          <a:off x="0" y="0"/>
+          <a:ext cx="0" cy="0"/>
+          <a:chOff x="0" y="0"/>
+          <a:chExt cx="0" cy="0"/>
+        </a:xfrm>
+      </p:grpSpPr>
       <p:sp>
         <p:nvSpPr>
           <p:cNvPr id="2" name="Rectangle 1"/>
@@ -22858,6 +23103,7 @@
           <a:lstStyle/>
           <a:p>
             <a:pPr algn="ctr"/>
+            <a:endParaRPr/>
           </a:p>
         </p:txBody>
       </p:sp>
@@ -22971,6 +23217,7 @@
           <a:lstStyle/>
           <a:p>
             <a:pPr algn="ctr"/>
+            <a:endParaRPr/>
           </a:p>
         </p:txBody>
       </p:sp>
@@ -23084,6 +23331,7 @@
           <a:lstStyle/>
           <a:p>
             <a:pPr algn="ctr"/>
+            <a:endParaRPr/>
           </a:p>
         </p:txBody>
       </p:sp>
@@ -23197,6 +23445,7 @@
           <a:lstStyle/>
           <a:p>
             <a:pPr algn="ctr"/>
+            <a:endParaRPr/>
           </a:p>
         </p:txBody>
       </p:sp>
@@ -23310,6 +23559,7 @@
           <a:lstStyle/>
           <a:p>
             <a:pPr algn="ctr"/>
+            <a:endParaRPr/>
           </a:p>
         </p:txBody>
       </p:sp>
@@ -23423,6 +23673,7 @@
           <a:lstStyle/>
           <a:p>
             <a:pPr algn="ctr"/>
+            <a:endParaRPr/>
           </a:p>
         </p:txBody>
       </p:sp>
@@ -23505,7 +23756,7 @@
 </file>
 
 <file path=ppt/slides/slide24.xml><?xml version="1.0" encoding="utf-8"?>
-<p:sld xmlns:a="http://schemas.openxmlformats.org/drawingml/2006/main" xmlns:p="http://schemas.openxmlformats.org/presentationml/2006/main" xmlns:r="http://schemas.openxmlformats.org/officeDocument/2006/relationships">
+<p:sld xmlns:a="http://schemas.openxmlformats.org/drawingml/2006/main" xmlns:r="http://schemas.openxmlformats.org/officeDocument/2006/relationships" xmlns:p="http://schemas.openxmlformats.org/presentationml/2006/main">
   <p:cSld>
     <p:bg>
       <p:bgPr>
@@ -23521,7 +23772,14 @@
         <p:cNvGrpSpPr/>
         <p:nvPr/>
       </p:nvGrpSpPr>
-      <p:grpSpPr/>
+      <p:grpSpPr>
+        <a:xfrm>
+          <a:off x="0" y="0"/>
+          <a:ext cx="0" cy="0"/>
+          <a:chOff x="0" y="0"/>
+          <a:chExt cx="0" cy="0"/>
+        </a:xfrm>
+      </p:grpSpPr>
       <p:sp>
         <p:nvSpPr>
           <p:cNvPr id="2" name="Rectangle 1"/>
@@ -23562,6 +23820,7 @@
           <a:lstStyle/>
           <a:p>
             <a:pPr algn="ctr"/>
+            <a:endParaRPr/>
           </a:p>
         </p:txBody>
       </p:sp>
@@ -23675,6 +23934,7 @@
           <a:lstStyle/>
           <a:p>
             <a:pPr algn="ctr"/>
+            <a:endParaRPr/>
           </a:p>
         </p:txBody>
       </p:sp>
@@ -23788,6 +24048,7 @@
           <a:lstStyle/>
           <a:p>
             <a:pPr algn="ctr"/>
+            <a:endParaRPr/>
           </a:p>
         </p:txBody>
       </p:sp>
@@ -23901,6 +24162,7 @@
           <a:lstStyle/>
           <a:p>
             <a:pPr algn="ctr"/>
+            <a:endParaRPr/>
           </a:p>
         </p:txBody>
       </p:sp>
@@ -24014,6 +24276,7 @@
           <a:lstStyle/>
           <a:p>
             <a:pPr algn="ctr"/>
+            <a:endParaRPr/>
           </a:p>
         </p:txBody>
       </p:sp>
@@ -24095,7 +24358,7 @@
         </p:nvSpPr>
         <p:spPr>
           <a:xfrm>
-            <a:off x="457200" y="5998464"/>
+            <a:off x="457200" y="3694176"/>
             <a:ext cx="2697480" cy="2084831"/>
           </a:xfrm>
           <a:prstGeom prst="rect">
@@ -24127,6 +24390,7 @@
           <a:lstStyle/>
           <a:p>
             <a:pPr algn="ctr"/>
+            <a:endParaRPr/>
           </a:p>
         </p:txBody>
       </p:sp>
@@ -24138,7 +24402,7 @@
         </p:nvSpPr>
         <p:spPr>
           <a:xfrm>
-            <a:off x="594360" y="6108192"/>
+            <a:off x="594360" y="3803904"/>
             <a:ext cx="2423160" cy="1005840"/>
           </a:xfrm>
           <a:prstGeom prst="rect">
@@ -24173,7 +24437,7 @@
         </p:nvSpPr>
         <p:spPr>
           <a:xfrm>
-            <a:off x="594360" y="7187184"/>
+            <a:off x="594360" y="4882896"/>
             <a:ext cx="2423160" cy="731520"/>
           </a:xfrm>
           <a:prstGeom prst="rect">
@@ -24208,7 +24472,7 @@
         </p:nvSpPr>
         <p:spPr>
           <a:xfrm>
-            <a:off x="3337560" y="5998464"/>
+            <a:off x="3337560" y="3694176"/>
             <a:ext cx="2697480" cy="2084831"/>
           </a:xfrm>
           <a:prstGeom prst="rect">
@@ -24240,6 +24504,7 @@
           <a:lstStyle/>
           <a:p>
             <a:pPr algn="ctr"/>
+            <a:endParaRPr/>
           </a:p>
         </p:txBody>
       </p:sp>
@@ -24251,7 +24516,7 @@
         </p:nvSpPr>
         <p:spPr>
           <a:xfrm>
-            <a:off x="3474720" y="6108192"/>
+            <a:off x="3474720" y="3803904"/>
             <a:ext cx="2423160" cy="1005840"/>
           </a:xfrm>
           <a:prstGeom prst="rect">
@@ -24286,7 +24551,7 @@
         </p:nvSpPr>
         <p:spPr>
           <a:xfrm>
-            <a:off x="3474720" y="7187184"/>
+            <a:off x="3474720" y="4882896"/>
             <a:ext cx="2423160" cy="731520"/>
           </a:xfrm>
           <a:prstGeom prst="rect">
@@ -24321,7 +24586,7 @@
         </p:nvSpPr>
         <p:spPr>
           <a:xfrm>
-            <a:off x="6217920" y="8302752"/>
+            <a:off x="6217920" y="1389888"/>
             <a:ext cx="2697480" cy="2084831"/>
           </a:xfrm>
           <a:prstGeom prst="rect">
@@ -24353,6 +24618,7 @@
           <a:lstStyle/>
           <a:p>
             <a:pPr algn="ctr"/>
+            <a:endParaRPr/>
           </a:p>
         </p:txBody>
       </p:sp>
@@ -24364,7 +24630,7 @@
         </p:nvSpPr>
         <p:spPr>
           <a:xfrm>
-            <a:off x="6355080" y="8412480"/>
+            <a:off x="6355080" y="1499616"/>
             <a:ext cx="2423160" cy="1005840"/>
           </a:xfrm>
           <a:prstGeom prst="rect">
@@ -24399,7 +24665,7 @@
         </p:nvSpPr>
         <p:spPr>
           <a:xfrm>
-            <a:off x="6355080" y="9491472"/>
+            <a:off x="6355080" y="2578608"/>
             <a:ext cx="2423160" cy="731520"/>
           </a:xfrm>
           <a:prstGeom prst="rect">
@@ -24434,7 +24700,7 @@
         </p:nvSpPr>
         <p:spPr>
           <a:xfrm>
-            <a:off x="9098280" y="8302752"/>
+            <a:off x="9098280" y="1389888"/>
             <a:ext cx="2697480" cy="2084831"/>
           </a:xfrm>
           <a:prstGeom prst="rect">
@@ -24466,6 +24732,7 @@
           <a:lstStyle/>
           <a:p>
             <a:pPr algn="ctr"/>
+            <a:endParaRPr/>
           </a:p>
         </p:txBody>
       </p:sp>
@@ -24477,7 +24744,7 @@
         </p:nvSpPr>
         <p:spPr>
           <a:xfrm>
-            <a:off x="9235440" y="8412480"/>
+            <a:off x="9235440" y="1499616"/>
             <a:ext cx="2423160" cy="1005840"/>
           </a:xfrm>
           <a:prstGeom prst="rect">
@@ -24493,7 +24760,7 @@
           <a:p>
             <a:pPr algn="ctr"/>
             <a:r>
-              <a:rPr sz="5200" b="1">
+              <a:rPr sz="5200" b="1" dirty="0">
                 <a:solidFill>
                   <a:srgbClr val="FFFFFF"/>
                 </a:solidFill>
@@ -24512,7 +24779,7 @@
         </p:nvSpPr>
         <p:spPr>
           <a:xfrm>
-            <a:off x="9235440" y="9491472"/>
+            <a:off x="9235440" y="2578608"/>
             <a:ext cx="2423160" cy="731520"/>
           </a:xfrm>
           <a:prstGeom prst="rect">
@@ -24548,7 +24815,7 @@
 </file>
 
 <file path=ppt/slides/slide25.xml><?xml version="1.0" encoding="utf-8"?>
-<p:sld xmlns:a="http://schemas.openxmlformats.org/drawingml/2006/main" xmlns:p="http://schemas.openxmlformats.org/presentationml/2006/main" xmlns:r="http://schemas.openxmlformats.org/officeDocument/2006/relationships">
+<p:sld xmlns:a="http://schemas.openxmlformats.org/drawingml/2006/main" xmlns:r="http://schemas.openxmlformats.org/officeDocument/2006/relationships" xmlns:p="http://schemas.openxmlformats.org/presentationml/2006/main">
   <p:cSld>
     <p:bg>
       <p:bgPr>
@@ -24564,7 +24831,14 @@
         <p:cNvGrpSpPr/>
         <p:nvPr/>
       </p:nvGrpSpPr>
-      <p:grpSpPr/>
+      <p:grpSpPr>
+        <a:xfrm>
+          <a:off x="0" y="0"/>
+          <a:ext cx="0" cy="0"/>
+          <a:chOff x="0" y="0"/>
+          <a:chExt cx="0" cy="0"/>
+        </a:xfrm>
+      </p:grpSpPr>
       <p:sp>
         <p:nvSpPr>
           <p:cNvPr id="2" name="Rectangle 1"/>
@@ -24605,6 +24879,7 @@
           <a:lstStyle/>
           <a:p>
             <a:pPr algn="ctr"/>
+            <a:endParaRPr/>
           </a:p>
         </p:txBody>
       </p:sp>
@@ -24718,6 +24993,7 @@
           <a:lstStyle/>
           <a:p>
             <a:pPr algn="ctr"/>
+            <a:endParaRPr/>
           </a:p>
         </p:txBody>
       </p:sp>
@@ -24796,6 +25072,7 @@
           <a:lstStyle/>
           <a:p>
             <a:pPr algn="ctr"/>
+            <a:endParaRPr/>
           </a:p>
         </p:txBody>
       </p:sp>
@@ -24874,6 +25151,7 @@
           <a:lstStyle/>
           <a:p>
             <a:pPr algn="ctr"/>
+            <a:endParaRPr/>
           </a:p>
         </p:txBody>
       </p:sp>
@@ -24952,6 +25230,7 @@
           <a:lstStyle/>
           <a:p>
             <a:pPr algn="ctr"/>
+            <a:endParaRPr/>
           </a:p>
         </p:txBody>
       </p:sp>
@@ -25030,6 +25309,7 @@
           <a:lstStyle/>
           <a:p>
             <a:pPr algn="ctr"/>
+            <a:endParaRPr/>
           </a:p>
         </p:txBody>
       </p:sp>
@@ -25108,6 +25388,7 @@
           <a:lstStyle/>
           <a:p>
             <a:pPr algn="ctr"/>
+            <a:endParaRPr/>
           </a:p>
         </p:txBody>
       </p:sp>
@@ -25186,6 +25467,7 @@
           <a:lstStyle/>
           <a:p>
             <a:pPr algn="ctr"/>
+            <a:endParaRPr/>
           </a:p>
         </p:txBody>
       </p:sp>
@@ -25264,6 +25546,7 @@
           <a:lstStyle/>
           <a:p>
             <a:pPr algn="ctr"/>
+            <a:endParaRPr/>
           </a:p>
         </p:txBody>
       </p:sp>
@@ -25311,7 +25594,7 @@
 </file>
 
 <file path=ppt/slides/slide26.xml><?xml version="1.0" encoding="utf-8"?>
-<p:sld xmlns:a="http://schemas.openxmlformats.org/drawingml/2006/main" xmlns:p="http://schemas.openxmlformats.org/presentationml/2006/main" xmlns:r="http://schemas.openxmlformats.org/officeDocument/2006/relationships">
+<p:sld xmlns:a="http://schemas.openxmlformats.org/drawingml/2006/main" xmlns:r="http://schemas.openxmlformats.org/officeDocument/2006/relationships" xmlns:p="http://schemas.openxmlformats.org/presentationml/2006/main">
   <p:cSld>
     <p:bg>
       <p:bgPr>
@@ -25327,7 +25610,14 @@
         <p:cNvGrpSpPr/>
         <p:nvPr/>
       </p:nvGrpSpPr>
-      <p:grpSpPr/>
+      <p:grpSpPr>
+        <a:xfrm>
+          <a:off x="0" y="0"/>
+          <a:ext cx="0" cy="0"/>
+          <a:chOff x="0" y="0"/>
+          <a:chExt cx="0" cy="0"/>
+        </a:xfrm>
+      </p:grpSpPr>
       <p:sp>
         <p:nvSpPr>
           <p:cNvPr id="2" name="Rectangle 1"/>
@@ -25368,6 +25658,7 @@
           <a:lstStyle/>
           <a:p>
             <a:pPr algn="ctr"/>
+            <a:endParaRPr/>
           </a:p>
         </p:txBody>
       </p:sp>
@@ -25481,6 +25772,7 @@
           <a:lstStyle/>
           <a:p>
             <a:pPr algn="ctr"/>
+            <a:endParaRPr/>
           </a:p>
         </p:txBody>
       </p:sp>
@@ -25594,6 +25886,7 @@
           <a:lstStyle/>
           <a:p>
             <a:pPr algn="ctr"/>
+            <a:endParaRPr/>
           </a:p>
         </p:txBody>
       </p:sp>
@@ -25674,6 +25967,7 @@
           <a:lstStyle/>
           <a:p>
             <a:pPr algn="ctr"/>
+            <a:endParaRPr/>
           </a:p>
         </p:txBody>
       </p:sp>
@@ -25787,6 +26081,7 @@
           <a:lstStyle/>
           <a:p>
             <a:pPr algn="ctr"/>
+            <a:endParaRPr/>
           </a:p>
         </p:txBody>
       </p:sp>
@@ -25867,6 +26162,7 @@
           <a:lstStyle/>
           <a:p>
             <a:pPr algn="ctr"/>
+            <a:endParaRPr/>
           </a:p>
         </p:txBody>
       </p:sp>
@@ -25980,6 +26276,7 @@
           <a:lstStyle/>
           <a:p>
             <a:pPr algn="ctr"/>
+            <a:endParaRPr/>
           </a:p>
         </p:txBody>
       </p:sp>
@@ -26060,6 +26357,7 @@
           <a:lstStyle/>
           <a:p>
             <a:pPr algn="ctr"/>
+            <a:endParaRPr/>
           </a:p>
         </p:txBody>
       </p:sp>
@@ -26173,6 +26471,7 @@
           <a:lstStyle/>
           <a:p>
             <a:pPr algn="ctr"/>
+            <a:endParaRPr/>
           </a:p>
         </p:txBody>
       </p:sp>
@@ -26257,7 +26556,7 @@
 </file>
 
 <file path=ppt/slides/slide27.xml><?xml version="1.0" encoding="utf-8"?>
-<p:sld xmlns:a="http://schemas.openxmlformats.org/drawingml/2006/main" xmlns:p="http://schemas.openxmlformats.org/presentationml/2006/main" xmlns:r="http://schemas.openxmlformats.org/officeDocument/2006/relationships">
+<p:sld xmlns:a="http://schemas.openxmlformats.org/drawingml/2006/main" xmlns:r="http://schemas.openxmlformats.org/officeDocument/2006/relationships" xmlns:p="http://schemas.openxmlformats.org/presentationml/2006/main">
   <p:cSld>
     <p:bg>
       <p:bgPr>
@@ -26273,7 +26572,14 @@
         <p:cNvGrpSpPr/>
         <p:nvPr/>
       </p:nvGrpSpPr>
-      <p:grpSpPr/>
+      <p:grpSpPr>
+        <a:xfrm>
+          <a:off x="0" y="0"/>
+          <a:ext cx="0" cy="0"/>
+          <a:chOff x="0" y="0"/>
+          <a:chExt cx="0" cy="0"/>
+        </a:xfrm>
+      </p:grpSpPr>
       <p:sp>
         <p:nvSpPr>
           <p:cNvPr id="2" name="Rectangle 1"/>
@@ -26314,6 +26620,7 @@
           <a:lstStyle/>
           <a:p>
             <a:pPr algn="ctr"/>
+            <a:endParaRPr/>
           </a:p>
         </p:txBody>
       </p:sp>
@@ -26427,6 +26734,7 @@
           <a:lstStyle/>
           <a:p>
             <a:pPr algn="ctr"/>
+            <a:endParaRPr/>
           </a:p>
         </p:txBody>
       </p:sp>
@@ -26540,6 +26848,7 @@
           <a:lstStyle/>
           <a:p>
             <a:pPr algn="ctr"/>
+            <a:endParaRPr/>
           </a:p>
         </p:txBody>
       </p:sp>
@@ -26653,6 +26962,7 @@
           <a:lstStyle/>
           <a:p>
             <a:pPr algn="ctr"/>
+            <a:endParaRPr/>
           </a:p>
         </p:txBody>
       </p:sp>
@@ -26766,6 +27076,7 @@
           <a:lstStyle/>
           <a:p>
             <a:pPr algn="ctr"/>
+            <a:endParaRPr/>
           </a:p>
         </p:txBody>
       </p:sp>
@@ -26813,7 +27124,7 @@
 </file>
 
 <file path=ppt/slides/slide28.xml><?xml version="1.0" encoding="utf-8"?>
-<p:sld xmlns:a="http://schemas.openxmlformats.org/drawingml/2006/main" xmlns:p="http://schemas.openxmlformats.org/presentationml/2006/main" xmlns:r="http://schemas.openxmlformats.org/officeDocument/2006/relationships">
+<p:sld xmlns:a="http://schemas.openxmlformats.org/drawingml/2006/main" xmlns:r="http://schemas.openxmlformats.org/officeDocument/2006/relationships" xmlns:p="http://schemas.openxmlformats.org/presentationml/2006/main">
   <p:cSld>
     <p:bg>
       <p:bgPr>
@@ -26829,7 +27140,14 @@
         <p:cNvGrpSpPr/>
         <p:nvPr/>
       </p:nvGrpSpPr>
-      <p:grpSpPr/>
+      <p:grpSpPr>
+        <a:xfrm>
+          <a:off x="0" y="0"/>
+          <a:ext cx="0" cy="0"/>
+          <a:chOff x="0" y="0"/>
+          <a:chExt cx="0" cy="0"/>
+        </a:xfrm>
+      </p:grpSpPr>
       <p:sp>
         <p:nvSpPr>
           <p:cNvPr id="2" name="Rectangle 1"/>
@@ -26870,6 +27188,7 @@
           <a:lstStyle/>
           <a:p>
             <a:pPr algn="ctr"/>
+            <a:endParaRPr/>
           </a:p>
         </p:txBody>
       </p:sp>
@@ -26913,6 +27232,7 @@
           <a:lstStyle/>
           <a:p>
             <a:pPr algn="ctr"/>
+            <a:endParaRPr/>
           </a:p>
         </p:txBody>
       </p:sp>
@@ -27027,6 +27347,7 @@
           <a:lstStyle/>
           <a:p>
             <a:pPr algn="ctr"/>
+            <a:endParaRPr/>
           </a:p>
         </p:txBody>
       </p:sp>
@@ -27109,7 +27430,7 @@
 </file>
 
 <file path=ppt/slides/slide29.xml><?xml version="1.0" encoding="utf-8"?>
-<p:sld xmlns:a="http://schemas.openxmlformats.org/drawingml/2006/main" xmlns:p="http://schemas.openxmlformats.org/presentationml/2006/main" xmlns:r="http://schemas.openxmlformats.org/officeDocument/2006/relationships">
+<p:sld xmlns:a="http://schemas.openxmlformats.org/drawingml/2006/main" xmlns:r="http://schemas.openxmlformats.org/officeDocument/2006/relationships" xmlns:p="http://schemas.openxmlformats.org/presentationml/2006/main">
   <p:cSld>
     <p:bg>
       <p:bgPr>
@@ -27125,7 +27446,14 @@
         <p:cNvGrpSpPr/>
         <p:nvPr/>
       </p:nvGrpSpPr>
-      <p:grpSpPr/>
+      <p:grpSpPr>
+        <a:xfrm>
+          <a:off x="0" y="0"/>
+          <a:ext cx="0" cy="0"/>
+          <a:chOff x="0" y="0"/>
+          <a:chExt cx="0" cy="0"/>
+        </a:xfrm>
+      </p:grpSpPr>
       <p:sp>
         <p:nvSpPr>
           <p:cNvPr id="2" name="Rectangle 1"/>
@@ -27166,6 +27494,7 @@
           <a:lstStyle/>
           <a:p>
             <a:pPr algn="ctr"/>
+            <a:endParaRPr/>
           </a:p>
         </p:txBody>
       </p:sp>
@@ -27283,7 +27612,7 @@
 </file>
 
 <file path=ppt/slides/slide3.xml><?xml version="1.0" encoding="utf-8"?>
-<p:sld xmlns:a="http://schemas.openxmlformats.org/drawingml/2006/main" xmlns:p="http://schemas.openxmlformats.org/presentationml/2006/main" xmlns:r="http://schemas.openxmlformats.org/officeDocument/2006/relationships">
+<p:sld xmlns:a="http://schemas.openxmlformats.org/drawingml/2006/main" xmlns:r="http://schemas.openxmlformats.org/officeDocument/2006/relationships" xmlns:p="http://schemas.openxmlformats.org/presentationml/2006/main">
   <p:cSld>
     <p:bg>
       <p:bgPr>
@@ -27299,7 +27628,14 @@
         <p:cNvGrpSpPr/>
         <p:nvPr/>
       </p:nvGrpSpPr>
-      <p:grpSpPr/>
+      <p:grpSpPr>
+        <a:xfrm>
+          <a:off x="0" y="0"/>
+          <a:ext cx="0" cy="0"/>
+          <a:chOff x="0" y="0"/>
+          <a:chExt cx="0" cy="0"/>
+        </a:xfrm>
+      </p:grpSpPr>
       <p:sp>
         <p:nvSpPr>
           <p:cNvPr id="2" name="Rectangle 1"/>
@@ -27340,6 +27676,7 @@
           <a:lstStyle/>
           <a:p>
             <a:pPr algn="ctr"/>
+            <a:endParaRPr/>
           </a:p>
         </p:txBody>
       </p:sp>
@@ -27488,6 +27825,7 @@
           <a:lstStyle/>
           <a:p>
             <a:pPr algn="ctr"/>
+            <a:endParaRPr/>
           </a:p>
         </p:txBody>
       </p:sp>
@@ -27531,6 +27869,7 @@
           <a:lstStyle/>
           <a:p>
             <a:pPr algn="ctr"/>
+            <a:endParaRPr/>
           </a:p>
         </p:txBody>
       </p:sp>
@@ -27646,6 +27985,7 @@
           <a:lstStyle/>
           <a:p>
             <a:pPr algn="ctr"/>
+            <a:endParaRPr/>
           </a:p>
         </p:txBody>
       </p:sp>
@@ -27761,6 +28101,7 @@
           <a:lstStyle/>
           <a:p>
             <a:pPr algn="ctr"/>
+            <a:endParaRPr/>
           </a:p>
         </p:txBody>
       </p:sp>
@@ -27876,6 +28217,7 @@
           <a:lstStyle/>
           <a:p>
             <a:pPr algn="ctr"/>
+            <a:endParaRPr/>
           </a:p>
         </p:txBody>
       </p:sp>
@@ -27991,6 +28333,7 @@
           <a:lstStyle/>
           <a:p>
             <a:pPr algn="ctr"/>
+            <a:endParaRPr/>
           </a:p>
         </p:txBody>
       </p:sp>
@@ -28106,6 +28449,7 @@
           <a:lstStyle/>
           <a:p>
             <a:pPr algn="ctr"/>
+            <a:endParaRPr/>
           </a:p>
         </p:txBody>
       </p:sp>
@@ -28221,6 +28565,7 @@
           <a:lstStyle/>
           <a:p>
             <a:pPr algn="ctr"/>
+            <a:endParaRPr/>
           </a:p>
         </p:txBody>
       </p:sp>
@@ -28336,6 +28681,7 @@
           <a:lstStyle/>
           <a:p>
             <a:pPr algn="ctr"/>
+            <a:endParaRPr/>
           </a:p>
         </p:txBody>
       </p:sp>
@@ -28450,6 +28796,7 @@
           <a:lstStyle/>
           <a:p>
             <a:pPr algn="ctr"/>
+            <a:endParaRPr/>
           </a:p>
         </p:txBody>
       </p:sp>
@@ -28564,6 +28911,7 @@
           <a:lstStyle/>
           <a:p>
             <a:pPr algn="ctr"/>
+            <a:endParaRPr/>
           </a:p>
         </p:txBody>
       </p:sp>
@@ -28647,7 +28995,7 @@
 </file>
 
 <file path=ppt/slides/slide4.xml><?xml version="1.0" encoding="utf-8"?>
-<p:sld xmlns:a="http://schemas.openxmlformats.org/drawingml/2006/main" xmlns:p="http://schemas.openxmlformats.org/presentationml/2006/main" xmlns:r="http://schemas.openxmlformats.org/officeDocument/2006/relationships">
+<p:sld xmlns:a="http://schemas.openxmlformats.org/drawingml/2006/main" xmlns:r="http://schemas.openxmlformats.org/officeDocument/2006/relationships" xmlns:p="http://schemas.openxmlformats.org/presentationml/2006/main">
   <p:cSld>
     <p:bg>
       <p:bgPr>
@@ -28663,7 +29011,14 @@
         <p:cNvGrpSpPr/>
         <p:nvPr/>
       </p:nvGrpSpPr>
-      <p:grpSpPr/>
+      <p:grpSpPr>
+        <a:xfrm>
+          <a:off x="0" y="0"/>
+          <a:ext cx="0" cy="0"/>
+          <a:chOff x="0" y="0"/>
+          <a:chExt cx="0" cy="0"/>
+        </a:xfrm>
+      </p:grpSpPr>
       <p:sp>
         <p:nvSpPr>
           <p:cNvPr id="2" name="Rectangle 1"/>
@@ -28704,6 +29059,7 @@
           <a:lstStyle/>
           <a:p>
             <a:pPr algn="ctr"/>
+            <a:endParaRPr/>
           </a:p>
         </p:txBody>
       </p:sp>
@@ -28818,6 +29174,7 @@
           <a:lstStyle/>
           <a:p>
             <a:pPr algn="ctr"/>
+            <a:endParaRPr/>
           </a:p>
         </p:txBody>
       </p:sp>
@@ -28932,6 +29289,7 @@
           <a:lstStyle/>
           <a:p>
             <a:pPr algn="ctr"/>
+            <a:endParaRPr/>
           </a:p>
         </p:txBody>
       </p:sp>
@@ -28959,7 +29317,7 @@
           <a:p>
             <a:pPr algn="l"/>
             <a:r>
-              <a:rPr sz="5600" b="1">
+              <a:rPr sz="5600" b="1" dirty="0">
                 <a:solidFill>
                   <a:srgbClr val="3A9E7A"/>
                 </a:solidFill>
@@ -29046,6 +29404,7 @@
           <a:lstStyle/>
           <a:p>
             <a:pPr algn="ctr"/>
+            <a:endParaRPr/>
           </a:p>
         </p:txBody>
       </p:sp>
@@ -29160,6 +29519,7 @@
           <a:lstStyle/>
           <a:p>
             <a:pPr algn="ctr"/>
+            <a:endParaRPr/>
           </a:p>
         </p:txBody>
       </p:sp>
@@ -29278,7 +29638,7 @@
 </file>
 
 <file path=ppt/slides/slide5.xml><?xml version="1.0" encoding="utf-8"?>
-<p:sld xmlns:a="http://schemas.openxmlformats.org/drawingml/2006/main" xmlns:p="http://schemas.openxmlformats.org/presentationml/2006/main" xmlns:r="http://schemas.openxmlformats.org/officeDocument/2006/relationships">
+<p:sld xmlns:a="http://schemas.openxmlformats.org/drawingml/2006/main" xmlns:r="http://schemas.openxmlformats.org/officeDocument/2006/relationships" xmlns:p="http://schemas.openxmlformats.org/presentationml/2006/main">
   <p:cSld>
     <p:bg>
       <p:bgPr>
@@ -29294,7 +29654,14 @@
         <p:cNvGrpSpPr/>
         <p:nvPr/>
       </p:nvGrpSpPr>
-      <p:grpSpPr/>
+      <p:grpSpPr>
+        <a:xfrm>
+          <a:off x="0" y="0"/>
+          <a:ext cx="0" cy="0"/>
+          <a:chOff x="0" y="0"/>
+          <a:chExt cx="0" cy="0"/>
+        </a:xfrm>
+      </p:grpSpPr>
       <p:sp>
         <p:nvSpPr>
           <p:cNvPr id="2" name="Rectangle 1"/>
@@ -29335,6 +29702,7 @@
           <a:lstStyle/>
           <a:p>
             <a:pPr algn="ctr"/>
+            <a:endParaRPr/>
           </a:p>
         </p:txBody>
       </p:sp>
@@ -29483,6 +29851,7 @@
           <a:lstStyle/>
           <a:p>
             <a:pPr algn="ctr"/>
+            <a:endParaRPr/>
           </a:p>
         </p:txBody>
       </p:sp>
@@ -29561,6 +29930,7 @@
           <a:lstStyle/>
           <a:p>
             <a:pPr algn="ctr"/>
+            <a:endParaRPr/>
           </a:p>
         </p:txBody>
       </p:sp>
@@ -29639,6 +30009,7 @@
           <a:lstStyle/>
           <a:p>
             <a:pPr algn="ctr"/>
+            <a:endParaRPr/>
           </a:p>
         </p:txBody>
       </p:sp>
@@ -29717,6 +30088,7 @@
           <a:lstStyle/>
           <a:p>
             <a:pPr algn="ctr"/>
+            <a:endParaRPr/>
           </a:p>
         </p:txBody>
       </p:sp>
@@ -29795,6 +30167,7 @@
           <a:lstStyle/>
           <a:p>
             <a:pPr algn="ctr"/>
+            <a:endParaRPr/>
           </a:p>
         </p:txBody>
       </p:sp>
@@ -29873,6 +30246,7 @@
           <a:lstStyle/>
           <a:p>
             <a:pPr algn="ctr"/>
+            <a:endParaRPr/>
           </a:p>
         </p:txBody>
       </p:sp>
@@ -29951,6 +30325,7 @@
           <a:lstStyle/>
           <a:p>
             <a:pPr algn="ctr"/>
+            <a:endParaRPr/>
           </a:p>
         </p:txBody>
       </p:sp>
@@ -30029,6 +30404,7 @@
           <a:lstStyle/>
           <a:p>
             <a:pPr algn="ctr"/>
+            <a:endParaRPr/>
           </a:p>
         </p:txBody>
       </p:sp>
@@ -30107,6 +30483,7 @@
           <a:lstStyle/>
           <a:p>
             <a:pPr algn="ctr"/>
+            <a:endParaRPr/>
           </a:p>
         </p:txBody>
       </p:sp>
@@ -30185,6 +30562,7 @@
           <a:lstStyle/>
           <a:p>
             <a:pPr algn="ctr"/>
+            <a:endParaRPr/>
           </a:p>
         </p:txBody>
       </p:sp>
@@ -30263,6 +30641,7 @@
           <a:lstStyle/>
           <a:p>
             <a:pPr algn="ctr"/>
+            <a:endParaRPr/>
           </a:p>
         </p:txBody>
       </p:sp>
@@ -30341,6 +30720,7 @@
           <a:lstStyle/>
           <a:p>
             <a:pPr algn="ctr"/>
+            <a:endParaRPr/>
           </a:p>
         </p:txBody>
       </p:sp>
@@ -30419,6 +30799,7 @@
           <a:lstStyle/>
           <a:p>
             <a:pPr algn="ctr"/>
+            <a:endParaRPr/>
           </a:p>
         </p:txBody>
       </p:sp>
@@ -30497,6 +30878,7 @@
           <a:lstStyle/>
           <a:p>
             <a:pPr algn="ctr"/>
+            <a:endParaRPr/>
           </a:p>
         </p:txBody>
       </p:sp>
@@ -30575,6 +30957,7 @@
           <a:lstStyle/>
           <a:p>
             <a:pPr algn="ctr"/>
+            <a:endParaRPr/>
           </a:p>
         </p:txBody>
       </p:sp>
@@ -30653,6 +31036,7 @@
           <a:lstStyle/>
           <a:p>
             <a:pPr algn="ctr"/>
+            <a:endParaRPr/>
           </a:p>
         </p:txBody>
       </p:sp>
@@ -30731,6 +31115,7 @@
           <a:lstStyle/>
           <a:p>
             <a:pPr algn="ctr"/>
+            <a:endParaRPr/>
           </a:p>
         </p:txBody>
       </p:sp>
@@ -30809,6 +31194,7 @@
           <a:lstStyle/>
           <a:p>
             <a:pPr algn="ctr"/>
+            <a:endParaRPr/>
           </a:p>
         </p:txBody>
       </p:sp>
@@ -30887,6 +31273,7 @@
           <a:lstStyle/>
           <a:p>
             <a:pPr algn="ctr"/>
+            <a:endParaRPr/>
           </a:p>
         </p:txBody>
       </p:sp>
@@ -30965,6 +31352,7 @@
           <a:lstStyle/>
           <a:p>
             <a:pPr algn="ctr"/>
+            <a:endParaRPr/>
           </a:p>
         </p:txBody>
       </p:sp>
@@ -31043,6 +31431,7 @@
           <a:lstStyle/>
           <a:p>
             <a:pPr algn="ctr"/>
+            <a:endParaRPr/>
           </a:p>
         </p:txBody>
       </p:sp>
@@ -31160,7 +31549,7 @@
 </file>
 
 <file path=ppt/slides/slide6.xml><?xml version="1.0" encoding="utf-8"?>
-<p:sld xmlns:a="http://schemas.openxmlformats.org/drawingml/2006/main" xmlns:p="http://schemas.openxmlformats.org/presentationml/2006/main" xmlns:r="http://schemas.openxmlformats.org/officeDocument/2006/relationships">
+<p:sld xmlns:a="http://schemas.openxmlformats.org/drawingml/2006/main" xmlns:r="http://schemas.openxmlformats.org/officeDocument/2006/relationships" xmlns:p="http://schemas.openxmlformats.org/presentationml/2006/main">
   <p:cSld>
     <p:bg>
       <p:bgPr>
@@ -31176,7 +31565,14 @@
         <p:cNvGrpSpPr/>
         <p:nvPr/>
       </p:nvGrpSpPr>
-      <p:grpSpPr/>
+      <p:grpSpPr>
+        <a:xfrm>
+          <a:off x="0" y="0"/>
+          <a:ext cx="0" cy="0"/>
+          <a:chOff x="0" y="0"/>
+          <a:chExt cx="0" cy="0"/>
+        </a:xfrm>
+      </p:grpSpPr>
       <p:sp>
         <p:nvSpPr>
           <p:cNvPr id="2" name="Rectangle 1"/>
@@ -31217,6 +31613,7 @@
           <a:lstStyle/>
           <a:p>
             <a:pPr algn="ctr"/>
+            <a:endParaRPr/>
           </a:p>
         </p:txBody>
       </p:sp>
@@ -31365,6 +31762,7 @@
           <a:lstStyle/>
           <a:p>
             <a:pPr algn="ctr"/>
+            <a:endParaRPr/>
           </a:p>
         </p:txBody>
       </p:sp>
@@ -31478,6 +31876,7 @@
           <a:lstStyle/>
           <a:p>
             <a:pPr algn="ctr"/>
+            <a:endParaRPr/>
           </a:p>
         </p:txBody>
       </p:sp>
@@ -31558,6 +31957,7 @@
           <a:lstStyle/>
           <a:p>
             <a:pPr algn="ctr"/>
+            <a:endParaRPr/>
           </a:p>
         </p:txBody>
       </p:sp>
@@ -31671,6 +32071,7 @@
           <a:lstStyle/>
           <a:p>
             <a:pPr algn="ctr"/>
+            <a:endParaRPr/>
           </a:p>
         </p:txBody>
       </p:sp>
@@ -31751,6 +32152,7 @@
           <a:lstStyle/>
           <a:p>
             <a:pPr algn="ctr"/>
+            <a:endParaRPr/>
           </a:p>
         </p:txBody>
       </p:sp>
@@ -31864,6 +32266,7 @@
           <a:lstStyle/>
           <a:p>
             <a:pPr algn="ctr"/>
+            <a:endParaRPr/>
           </a:p>
         </p:txBody>
       </p:sp>
@@ -31944,6 +32347,7 @@
           <a:lstStyle/>
           <a:p>
             <a:pPr algn="ctr"/>
+            <a:endParaRPr/>
           </a:p>
         </p:txBody>
       </p:sp>
@@ -32057,6 +32461,7 @@
           <a:lstStyle/>
           <a:p>
             <a:pPr algn="ctr"/>
+            <a:endParaRPr/>
           </a:p>
         </p:txBody>
       </p:sp>
@@ -32106,7 +32511,7 @@
 </file>
 
 <file path=ppt/slides/slide7.xml><?xml version="1.0" encoding="utf-8"?>
-<p:sld xmlns:a="http://schemas.openxmlformats.org/drawingml/2006/main" xmlns:p="http://schemas.openxmlformats.org/presentationml/2006/main" xmlns:r="http://schemas.openxmlformats.org/officeDocument/2006/relationships">
+<p:sld xmlns:a="http://schemas.openxmlformats.org/drawingml/2006/main" xmlns:r="http://schemas.openxmlformats.org/officeDocument/2006/relationships" xmlns:p="http://schemas.openxmlformats.org/presentationml/2006/main">
   <p:cSld>
     <p:bg>
       <p:bgPr>
@@ -32122,7 +32527,14 @@
         <p:cNvGrpSpPr/>
         <p:nvPr/>
       </p:nvGrpSpPr>
-      <p:grpSpPr/>
+      <p:grpSpPr>
+        <a:xfrm>
+          <a:off x="0" y="0"/>
+          <a:ext cx="0" cy="0"/>
+          <a:chOff x="0" y="0"/>
+          <a:chExt cx="0" cy="0"/>
+        </a:xfrm>
+      </p:grpSpPr>
       <p:sp>
         <p:nvSpPr>
           <p:cNvPr id="2" name="Rectangle 1"/>
@@ -32163,6 +32575,7 @@
           <a:lstStyle/>
           <a:p>
             <a:pPr algn="ctr"/>
+            <a:endParaRPr/>
           </a:p>
         </p:txBody>
       </p:sp>
@@ -32311,6 +32724,7 @@
           <a:lstStyle/>
           <a:p>
             <a:pPr algn="ctr"/>
+            <a:endParaRPr/>
           </a:p>
         </p:txBody>
       </p:sp>
@@ -32389,6 +32803,7 @@
           <a:lstStyle/>
           <a:p>
             <a:pPr algn="ctr"/>
+            <a:endParaRPr/>
           </a:p>
         </p:txBody>
       </p:sp>
@@ -32468,6 +32883,7 @@
           <a:lstStyle/>
           <a:p>
             <a:pPr algn="ctr"/>
+            <a:endParaRPr/>
           </a:p>
         </p:txBody>
       </p:sp>
@@ -32546,6 +32962,7 @@
           <a:lstStyle/>
           <a:p>
             <a:pPr algn="ctr"/>
+            <a:endParaRPr/>
           </a:p>
         </p:txBody>
       </p:sp>
@@ -32625,6 +33042,7 @@
           <a:lstStyle/>
           <a:p>
             <a:pPr algn="ctr"/>
+            <a:endParaRPr/>
           </a:p>
         </p:txBody>
       </p:sp>
@@ -32703,6 +33121,7 @@
           <a:lstStyle/>
           <a:p>
             <a:pPr algn="ctr"/>
+            <a:endParaRPr/>
           </a:p>
         </p:txBody>
       </p:sp>
@@ -32782,6 +33201,7 @@
           <a:lstStyle/>
           <a:p>
             <a:pPr algn="ctr"/>
+            <a:endParaRPr/>
           </a:p>
         </p:txBody>
       </p:sp>
@@ -32860,6 +33280,7 @@
           <a:lstStyle/>
           <a:p>
             <a:pPr algn="ctr"/>
+            <a:endParaRPr/>
           </a:p>
         </p:txBody>
       </p:sp>
@@ -32939,6 +33360,7 @@
           <a:lstStyle/>
           <a:p>
             <a:pPr algn="ctr"/>
+            <a:endParaRPr/>
           </a:p>
         </p:txBody>
       </p:sp>
@@ -32986,7 +33408,7 @@
 </file>
 
 <file path=ppt/slides/slide8.xml><?xml version="1.0" encoding="utf-8"?>
-<p:sld xmlns:a="http://schemas.openxmlformats.org/drawingml/2006/main" xmlns:p="http://schemas.openxmlformats.org/presentationml/2006/main" xmlns:r="http://schemas.openxmlformats.org/officeDocument/2006/relationships">
+<p:sld xmlns:a="http://schemas.openxmlformats.org/drawingml/2006/main" xmlns:r="http://schemas.openxmlformats.org/officeDocument/2006/relationships" xmlns:p="http://schemas.openxmlformats.org/presentationml/2006/main">
   <p:cSld>
     <p:bg>
       <p:bgPr>
@@ -33002,7 +33424,14 @@
         <p:cNvGrpSpPr/>
         <p:nvPr/>
       </p:nvGrpSpPr>
-      <p:grpSpPr/>
+      <p:grpSpPr>
+        <a:xfrm>
+          <a:off x="0" y="0"/>
+          <a:ext cx="0" cy="0"/>
+          <a:chOff x="0" y="0"/>
+          <a:chExt cx="0" cy="0"/>
+        </a:xfrm>
+      </p:grpSpPr>
       <p:sp>
         <p:nvSpPr>
           <p:cNvPr id="2" name="Rectangle 1"/>
@@ -33043,6 +33472,7 @@
           <a:lstStyle/>
           <a:p>
             <a:pPr algn="ctr"/>
+            <a:endParaRPr/>
           </a:p>
         </p:txBody>
       </p:sp>
@@ -33191,6 +33621,7 @@
           <a:lstStyle/>
           <a:p>
             <a:pPr algn="ctr"/>
+            <a:endParaRPr/>
           </a:p>
         </p:txBody>
       </p:sp>
@@ -33218,7 +33649,7 @@
           <a:p>
             <a:pPr algn="l"/>
             <a:r>
-              <a:rPr sz="1100" b="1">
+              <a:rPr sz="1100" b="1" dirty="0">
                 <a:solidFill>
                   <a:srgbClr val="3A9E7A"/>
                 </a:solidFill>
@@ -33444,6 +33875,7 @@
           <a:lstStyle/>
           <a:p>
             <a:pPr algn="ctr"/>
+            <a:endParaRPr/>
           </a:p>
         </p:txBody>
       </p:sp>
@@ -33666,7 +34098,7 @@
 </file>
 
 <file path=ppt/slides/slide9.xml><?xml version="1.0" encoding="utf-8"?>
-<p:sld xmlns:a="http://schemas.openxmlformats.org/drawingml/2006/main" xmlns:p="http://schemas.openxmlformats.org/presentationml/2006/main" xmlns:r="http://schemas.openxmlformats.org/officeDocument/2006/relationships">
+<p:sld xmlns:a="http://schemas.openxmlformats.org/drawingml/2006/main" xmlns:r="http://schemas.openxmlformats.org/officeDocument/2006/relationships" xmlns:p="http://schemas.openxmlformats.org/presentationml/2006/main">
   <p:cSld>
     <p:bg>
       <p:bgPr>
@@ -33682,7 +34114,14 @@
         <p:cNvGrpSpPr/>
         <p:nvPr/>
       </p:nvGrpSpPr>
-      <p:grpSpPr/>
+      <p:grpSpPr>
+        <a:xfrm>
+          <a:off x="0" y="0"/>
+          <a:ext cx="0" cy="0"/>
+          <a:chOff x="0" y="0"/>
+          <a:chExt cx="0" cy="0"/>
+        </a:xfrm>
+      </p:grpSpPr>
       <p:sp>
         <p:nvSpPr>
           <p:cNvPr id="2" name="Rectangle 1"/>
@@ -33723,6 +34162,7 @@
           <a:lstStyle/>
           <a:p>
             <a:pPr algn="ctr"/>
+            <a:endParaRPr/>
           </a:p>
         </p:txBody>
       </p:sp>
@@ -33836,6 +34276,7 @@
           <a:lstStyle/>
           <a:p>
             <a:pPr algn="ctr"/>
+            <a:endParaRPr/>
           </a:p>
         </p:txBody>
       </p:sp>
@@ -33949,6 +34390,7 @@
           <a:lstStyle/>
           <a:p>
             <a:pPr algn="ctr"/>
+            <a:endParaRPr/>
           </a:p>
         </p:txBody>
       </p:sp>
@@ -34062,6 +34504,7 @@
           <a:lstStyle/>
           <a:p>
             <a:pPr algn="ctr"/>
+            <a:endParaRPr/>
           </a:p>
         </p:txBody>
       </p:sp>
@@ -34464,7 +34907,7 @@
 </file>
 
 <file path=ppt/theme/theme2.xml><?xml version="1.0" encoding="utf-8"?>
-<a:theme xmlns:a="http://schemas.openxmlformats.org/drawingml/2006/main" name="Office Theme">
+<a:theme xmlns:a="http://schemas.openxmlformats.org/drawingml/2006/main" name="Tema de Office">
   <a:themeElements>
     <a:clrScheme name="Office">
       <a:dk1>
@@ -34474,44 +34917,44 @@
         <a:sysClr val="window" lastClr="FFFFFF"/>
       </a:lt1>
       <a:dk2>
-        <a:srgbClr val="1F497D"/>
+        <a:srgbClr val="0E2841"/>
       </a:dk2>
       <a:lt2>
-        <a:srgbClr val="EEECE1"/>
+        <a:srgbClr val="E8E8E8"/>
       </a:lt2>
       <a:accent1>
-        <a:srgbClr val="4F81BD"/>
+        <a:srgbClr val="156082"/>
       </a:accent1>
       <a:accent2>
-        <a:srgbClr val="C0504D"/>
+        <a:srgbClr val="E97132"/>
       </a:accent2>
       <a:accent3>
-        <a:srgbClr val="9BBB59"/>
+        <a:srgbClr val="196B24"/>
       </a:accent3>
       <a:accent4>
-        <a:srgbClr val="8064A2"/>
+        <a:srgbClr val="0F9ED5"/>
       </a:accent4>
       <a:accent5>
-        <a:srgbClr val="4BACC6"/>
+        <a:srgbClr val="A02B93"/>
       </a:accent5>
       <a:accent6>
-        <a:srgbClr val="F79646"/>
+        <a:srgbClr val="4EA72E"/>
       </a:accent6>
       <a:hlink>
-        <a:srgbClr val="0000FF"/>
+        <a:srgbClr val="467886"/>
       </a:hlink>
       <a:folHlink>
-        <a:srgbClr val="800080"/>
+        <a:srgbClr val="96607D"/>
       </a:folHlink>
     </a:clrScheme>
     <a:fontScheme name="Office">
       <a:majorFont>
-        <a:latin typeface="Calibri"/>
+        <a:latin typeface="Aptos Display" panose="02110004020202020204"/>
         <a:ea typeface=""/>
         <a:cs typeface=""/>
-        <a:font script="Jpan" typeface="ＭＳ Ｐゴシック"/>
+        <a:font script="Jpan" typeface="游ゴシック Light"/>
         <a:font script="Hang" typeface="맑은 고딕"/>
-        <a:font script="Hans" typeface="宋体"/>
+        <a:font script="Hans" typeface="等线 Light"/>
         <a:font script="Hant" typeface="新細明體"/>
         <a:font script="Arab" typeface="Times New Roman"/>
         <a:font script="Hebr" typeface="Times New Roman"/>
@@ -34539,14 +34982,31 @@
         <a:font script="Viet" typeface="Times New Roman"/>
         <a:font script="Uigh" typeface="Microsoft Uighur"/>
         <a:font script="Geor" typeface="Sylfaen"/>
+        <a:font script="Armn" typeface="Arial"/>
+        <a:font script="Bugi" typeface="Leelawadee UI"/>
+        <a:font script="Bopo" typeface="Microsoft JhengHei"/>
+        <a:font script="Java" typeface="Javanese Text"/>
+        <a:font script="Lisu" typeface="Segoe UI"/>
+        <a:font script="Mymr" typeface="Myanmar Text"/>
+        <a:font script="Nkoo" typeface="Ebrima"/>
+        <a:font script="Olck" typeface="Nirmala UI"/>
+        <a:font script="Osma" typeface="Ebrima"/>
+        <a:font script="Phag" typeface="Phagspa"/>
+        <a:font script="Syrn" typeface="Estrangelo Edessa"/>
+        <a:font script="Syrj" typeface="Estrangelo Edessa"/>
+        <a:font script="Syre" typeface="Estrangelo Edessa"/>
+        <a:font script="Sora" typeface="Nirmala UI"/>
+        <a:font script="Tale" typeface="Microsoft Tai Le"/>
+        <a:font script="Talu" typeface="Microsoft New Tai Lue"/>
+        <a:font script="Tfng" typeface="Ebrima"/>
       </a:majorFont>
       <a:minorFont>
-        <a:latin typeface="Calibri"/>
+        <a:latin typeface="Aptos" panose="02110004020202020204"/>
         <a:ea typeface=""/>
         <a:cs typeface=""/>
-        <a:font script="Jpan" typeface="ＭＳ Ｐゴシック"/>
+        <a:font script="Jpan" typeface="游ゴシック"/>
         <a:font script="Hang" typeface="맑은 고딕"/>
-        <a:font script="Hans" typeface="宋体"/>
+        <a:font script="Hans" typeface="等线"/>
         <a:font script="Hant" typeface="新細明體"/>
         <a:font script="Arab" typeface="Arial"/>
         <a:font script="Hebr" typeface="Arial"/>
@@ -34574,6 +35034,23 @@
         <a:font script="Viet" typeface="Arial"/>
         <a:font script="Uigh" typeface="Microsoft Uighur"/>
         <a:font script="Geor" typeface="Sylfaen"/>
+        <a:font script="Armn" typeface="Arial"/>
+        <a:font script="Bugi" typeface="Leelawadee UI"/>
+        <a:font script="Bopo" typeface="Microsoft JhengHei"/>
+        <a:font script="Java" typeface="Javanese Text"/>
+        <a:font script="Lisu" typeface="Segoe UI"/>
+        <a:font script="Mymr" typeface="Myanmar Text"/>
+        <a:font script="Nkoo" typeface="Ebrima"/>
+        <a:font script="Olck" typeface="Nirmala UI"/>
+        <a:font script="Osma" typeface="Ebrima"/>
+        <a:font script="Phag" typeface="Phagspa"/>
+        <a:font script="Syrn" typeface="Estrangelo Edessa"/>
+        <a:font script="Syrj" typeface="Estrangelo Edessa"/>
+        <a:font script="Syre" typeface="Estrangelo Edessa"/>
+        <a:font script="Sora" typeface="Nirmala UI"/>
+        <a:font script="Tale" typeface="Microsoft Tai Le"/>
+        <a:font script="Talu" typeface="Microsoft New Tai Lue"/>
+        <a:font script="Tfng" typeface="Ebrima"/>
       </a:minorFont>
     </a:fontScheme>
     <a:fmtScheme name="Office">
@@ -34585,180 +35062,136 @@
           <a:gsLst>
             <a:gs pos="0">
               <a:schemeClr val="phClr">
-                <a:tint val="50000"/>
-                <a:satMod val="300000"/>
+                <a:lumMod val="110000"/>
+                <a:satMod val="105000"/>
+                <a:tint val="67000"/>
               </a:schemeClr>
             </a:gs>
-            <a:gs pos="35000">
+            <a:gs pos="50000">
               <a:schemeClr val="phClr">
-                <a:tint val="37000"/>
-                <a:satMod val="300000"/>
+                <a:lumMod val="105000"/>
+                <a:satMod val="103000"/>
+                <a:tint val="73000"/>
               </a:schemeClr>
             </a:gs>
             <a:gs pos="100000">
               <a:schemeClr val="phClr">
-                <a:tint val="15000"/>
-                <a:satMod val="350000"/>
+                <a:lumMod val="105000"/>
+                <a:satMod val="109000"/>
+                <a:tint val="81000"/>
               </a:schemeClr>
             </a:gs>
           </a:gsLst>
-          <a:lin ang="16200000" scaled="1"/>
+          <a:lin ang="5400000" scaled="0"/>
         </a:gradFill>
         <a:gradFill rotWithShape="1">
           <a:gsLst>
             <a:gs pos="0">
               <a:schemeClr val="phClr">
-                <a:tint val="100000"/>
+                <a:satMod val="103000"/>
+                <a:lumMod val="102000"/>
+                <a:tint val="94000"/>
+              </a:schemeClr>
+            </a:gs>
+            <a:gs pos="50000">
+              <a:schemeClr val="phClr">
+                <a:satMod val="110000"/>
+                <a:lumMod val="100000"/>
                 <a:shade val="100000"/>
-                <a:satMod val="130000"/>
               </a:schemeClr>
             </a:gs>
             <a:gs pos="100000">
               <a:schemeClr val="phClr">
-                <a:tint val="50000"/>
-                <a:shade val="100000"/>
-                <a:satMod val="350000"/>
+                <a:lumMod val="99000"/>
+                <a:satMod val="120000"/>
+                <a:shade val="78000"/>
               </a:schemeClr>
             </a:gs>
           </a:gsLst>
-          <a:lin ang="16200000" scaled="0"/>
+          <a:lin ang="5400000" scaled="0"/>
         </a:gradFill>
       </a:fillStyleLst>
       <a:lnStyleLst>
-        <a:ln w="9525" cap="flat" cmpd="sng" algn="ctr">
+        <a:ln w="12700" cap="flat" cmpd="sng" algn="ctr">
           <a:solidFill>
-            <a:schemeClr val="phClr">
-              <a:shade val="95000"/>
-              <a:satMod val="105000"/>
-            </a:schemeClr>
+            <a:schemeClr val="phClr"/>
           </a:solidFill>
           <a:prstDash val="solid"/>
+          <a:miter lim="800000"/>
+        </a:ln>
+        <a:ln w="19050" cap="flat" cmpd="sng" algn="ctr">
+          <a:solidFill>
+            <a:schemeClr val="phClr"/>
+          </a:solidFill>
+          <a:prstDash val="solid"/>
+          <a:miter lim="800000"/>
         </a:ln>
         <a:ln w="25400" cap="flat" cmpd="sng" algn="ctr">
           <a:solidFill>
             <a:schemeClr val="phClr"/>
           </a:solidFill>
           <a:prstDash val="solid"/>
-        </a:ln>
-        <a:ln w="38100" cap="flat" cmpd="sng" algn="ctr">
-          <a:solidFill>
-            <a:schemeClr val="phClr"/>
-          </a:solidFill>
-          <a:prstDash val="solid"/>
+          <a:miter lim="800000"/>
         </a:ln>
       </a:lnStyleLst>
       <a:effectStyleLst>
         <a:effectStyle>
+          <a:effectLst/>
+        </a:effectStyle>
+        <a:effectStyle>
+          <a:effectLst/>
+        </a:effectStyle>
+        <a:effectStyle>
           <a:effectLst>
-            <a:outerShdw blurRad="40000" dist="20000" dir="5400000" rotWithShape="0">
+            <a:outerShdw blurRad="57150" dist="19050" dir="5400000" algn="ctr" rotWithShape="0">
               <a:srgbClr val="000000">
-                <a:alpha val="38000"/>
+                <a:alpha val="63000"/>
               </a:srgbClr>
             </a:outerShdw>
           </a:effectLst>
-        </a:effectStyle>
-        <a:effectStyle>
-          <a:effectLst>
-            <a:outerShdw blurRad="40000" dist="23000" dir="5400000" rotWithShape="0">
-              <a:srgbClr val="000000">
-                <a:alpha val="35000"/>
-              </a:srgbClr>
-            </a:outerShdw>
-          </a:effectLst>
-        </a:effectStyle>
-        <a:effectStyle>
-          <a:effectLst>
-            <a:outerShdw blurRad="40000" dist="23000" dir="5400000" rotWithShape="0">
-              <a:srgbClr val="000000">
-                <a:alpha val="35000"/>
-              </a:srgbClr>
-            </a:outerShdw>
-          </a:effectLst>
-          <a:scene3d>
-            <a:camera prst="orthographicFront">
-              <a:rot lat="0" lon="0" rev="0"/>
-            </a:camera>
-            <a:lightRig rig="threePt" dir="t">
-              <a:rot lat="0" lon="0" rev="1200000"/>
-            </a:lightRig>
-          </a:scene3d>
-          <a:sp3d>
-            <a:bevelT w="63500" h="25400"/>
-          </a:sp3d>
         </a:effectStyle>
       </a:effectStyleLst>
       <a:bgFillStyleLst>
         <a:solidFill>
           <a:schemeClr val="phClr"/>
         </a:solidFill>
+        <a:solidFill>
+          <a:schemeClr val="phClr">
+            <a:tint val="95000"/>
+            <a:satMod val="170000"/>
+          </a:schemeClr>
+        </a:solidFill>
         <a:gradFill rotWithShape="1">
           <a:gsLst>
             <a:gs pos="0">
               <a:schemeClr val="phClr">
-                <a:tint val="40000"/>
-                <a:satMod val="350000"/>
+                <a:tint val="93000"/>
+                <a:satMod val="150000"/>
+                <a:shade val="98000"/>
+                <a:lumMod val="102000"/>
               </a:schemeClr>
             </a:gs>
-            <a:gs pos="40000">
+            <a:gs pos="50000">
               <a:schemeClr val="phClr">
-                <a:tint val="45000"/>
-                <a:shade val="99000"/>
-                <a:satMod val="350000"/>
+                <a:tint val="98000"/>
+                <a:satMod val="130000"/>
+                <a:shade val="90000"/>
+                <a:lumMod val="103000"/>
               </a:schemeClr>
             </a:gs>
             <a:gs pos="100000">
               <a:schemeClr val="phClr">
-                <a:shade val="20000"/>
-                <a:satMod val="255000"/>
+                <a:shade val="63000"/>
+                <a:satMod val="120000"/>
               </a:schemeClr>
             </a:gs>
           </a:gsLst>
-          <a:path path="circle">
-            <a:fillToRect l="50000" t="-80000" r="50000" b="180000"/>
-          </a:path>
-        </a:gradFill>
-        <a:gradFill rotWithShape="1">
-          <a:gsLst>
-            <a:gs pos="0">
-              <a:schemeClr val="phClr">
-                <a:tint val="80000"/>
-                <a:satMod val="300000"/>
-              </a:schemeClr>
-            </a:gs>
-            <a:gs pos="100000">
-              <a:schemeClr val="phClr">
-                <a:shade val="30000"/>
-                <a:satMod val="200000"/>
-              </a:schemeClr>
-            </a:gs>
-          </a:gsLst>
-          <a:path path="circle">
-            <a:fillToRect l="50000" t="50000" r="50000" b="50000"/>
-          </a:path>
+          <a:lin ang="5400000" scaled="0"/>
         </a:gradFill>
       </a:bgFillStyleLst>
     </a:fmtScheme>
   </a:themeElements>
   <a:objectDefaults>
-    <a:spDef>
-      <a:spPr/>
-      <a:bodyPr/>
-      <a:lstStyle/>
-      <a:style>
-        <a:lnRef idx="1">
-          <a:schemeClr val="accent1"/>
-        </a:lnRef>
-        <a:fillRef idx="3">
-          <a:schemeClr val="accent1"/>
-        </a:fillRef>
-        <a:effectRef idx="2">
-          <a:schemeClr val="accent1"/>
-        </a:effectRef>
-        <a:fontRef idx="minor">
-          <a:schemeClr val="lt1"/>
-        </a:fontRef>
-      </a:style>
-    </a:spDef>
     <a:lnDef>
       <a:spPr/>
       <a:bodyPr/>
@@ -34780,5 +35213,10 @@
     </a:lnDef>
   </a:objectDefaults>
   <a:extraClrSchemeLst/>
+  <a:extLst>
+    <a:ext uri="{05A4C25C-085E-4340-85A3-A5531E510DB2}">
+      <thm15:themeFamily xmlns:thm15="http://schemas.microsoft.com/office/thememl/2012/main" name="Office Theme" id="{2E142A2C-CD16-42D6-873A-C26D2A0506FA}" vid="{1BDDFF52-6CD6-40A5-AB3C-68EB2F1E4D0A}"/>
+    </a:ext>
+  </a:extLst>
 </a:theme>
 </file>